--- a/docs/reports/project-status-2026-06-14.pptx
+++ b/docs/reports/project-status-2026-06-14.pptx
@@ -1887,21 +1887,21 @@
         </p:nvSpPr>
         <p:spPr>
           <a:xfrm>
-            <a:off x="8275320" y="-777240"/>
-            <a:ext cx="4023360" cy="4023360"/>
+            <a:off x="8458200" y="-713232"/>
+            <a:ext cx="3657600" cy="3657600"/>
           </a:xfrm>
           <a:prstGeom prst="ellipse">
             <a:avLst/>
           </a:prstGeom>
           <a:solidFill>
             <a:srgbClr val="00A896">
-              <a:alpha val="18000"/>
+              <a:alpha val="14000"/>
             </a:srgbClr>
           </a:solidFill>
-          <a:ln w="25400">
+          <a:ln w="19050">
             <a:solidFill>
               <a:srgbClr val="00A896">
-                <a:alpha val="75000"/>
+                <a:alpha val="65000"/>
               </a:srgbClr>
             </a:solidFill>
             <a:prstDash val="solid"/>
@@ -1916,21 +1916,21 @@
         </p:nvSpPr>
         <p:spPr>
           <a:xfrm>
-            <a:off x="9372600" y="4343400"/>
-            <a:ext cx="2971800" cy="2971800"/>
+            <a:off x="9646920" y="4526280"/>
+            <a:ext cx="2560320" cy="2560320"/>
           </a:xfrm>
           <a:prstGeom prst="ellipse">
             <a:avLst/>
           </a:prstGeom>
           <a:solidFill>
             <a:srgbClr val="02C39A">
-              <a:alpha val="15000"/>
+              <a:alpha val="12000"/>
             </a:srgbClr>
           </a:solidFill>
-          <a:ln w="25400">
+          <a:ln w="19050">
             <a:solidFill>
               <a:srgbClr val="02C39A">
-                <a:alpha val="72000"/>
+                <a:alpha val="62000"/>
               </a:srgbClr>
             </a:solidFill>
             <a:prstDash val="solid"/>
@@ -1945,15 +1945,15 @@
         </p:nvSpPr>
         <p:spPr>
           <a:xfrm>
-            <a:off x="365760" y="5212080"/>
-            <a:ext cx="1051560" cy="1051560"/>
+            <a:off x="384048" y="5074920"/>
+            <a:ext cx="914400" cy="914400"/>
           </a:xfrm>
           <a:prstGeom prst="ellipse">
             <a:avLst/>
           </a:prstGeom>
           <a:solidFill>
             <a:srgbClr val="00A896">
-              <a:alpha val="90000"/>
+              <a:alpha val="88000"/>
             </a:srgbClr>
           </a:solidFill>
           <a:ln w="12700">
@@ -1972,8 +1972,8 @@
         </p:nvSpPr>
         <p:spPr>
           <a:xfrm>
-            <a:off x="987552" y="5596128"/>
-            <a:ext cx="502920" cy="502920"/>
+            <a:off x="950976" y="5440680"/>
+            <a:ext cx="411480" cy="411480"/>
           </a:xfrm>
           <a:prstGeom prst="ellipse">
             <a:avLst/>
@@ -2064,7 +2064,7 @@
         <p:spPr>
           <a:xfrm>
             <a:off x="713232" y="1417320"/>
-            <a:ext cx="7863840" cy="658368"/>
+            <a:ext cx="7589520" cy="658368"/>
           </a:xfrm>
           <a:prstGeom prst="rect">
             <a:avLst/>
@@ -2193,7 +2193,7 @@
               <a:buNone/>
             </a:pPr>
             <a:r>
-              <a:rPr lang="en-US" sz="1450" dirty="0">
+              <a:rPr lang="en-US" sz="1500" dirty="0">
                 <a:solidFill>
                   <a:srgbClr val="FFFFFF"/>
                 </a:solidFill>
@@ -2201,9 +2201,9 @@
                 <a:ea typeface="Calibri" pitchFamily="34" charset="-122"/>
                 <a:cs typeface="Calibri" pitchFamily="34" charset="-120"/>
               </a:rPr>
-              <a:t>基于 README、源码模块、当前分支提交历史与测试/监控配置整理。面向项目维护者，用于每日同步能力边界、风险与下一步优先级。</a:t>
-            </a:r>
-            <a:endParaRPr lang="en-US" sz="1450" dirty="0"/>
+              <a:t>基于 README、源码模块、提交历史与测试/监控配置整理。用于每日同步能力边界、风险与下一步优先级。</a:t>
+            </a:r>
+            <a:endParaRPr lang="en-US" sz="1500" dirty="0"/>
           </a:p>
         </p:txBody>
       </p:sp>
@@ -2215,7 +2215,7 @@
         </p:nvSpPr>
         <p:spPr>
           <a:xfrm>
-            <a:off x="7114032" y="1234440"/>
+            <a:off x="6995160" y="1234440"/>
             <a:ext cx="2148840" cy="1325880"/>
           </a:xfrm>
           <a:prstGeom prst="roundRect">
@@ -2235,7 +2235,7 @@
           <a:effectLst>
             <a:outerShdw sx="100000" sy="100000" kx="0" ky="0" algn="bl" rotWithShape="0" blurRad="63500" dist="25400" dir="2700000">
               <a:srgbClr val="000000">
-                <a:alpha val="12000"/>
+                <a:alpha val="10000"/>
               </a:srgbClr>
             </a:outerShdw>
           </a:effectLst>
@@ -2249,7 +2249,7 @@
         </p:nvSpPr>
         <p:spPr>
           <a:xfrm>
-            <a:off x="7278624" y="1399032"/>
+            <a:off x="7159752" y="1399032"/>
             <a:ext cx="1783080" cy="502920"/>
           </a:xfrm>
           <a:prstGeom prst="rect">
@@ -2290,8 +2290,8 @@
         </p:nvSpPr>
         <p:spPr>
           <a:xfrm>
-            <a:off x="7315200" y="1993392"/>
-            <a:ext cx="1737360" cy="182880"/>
+            <a:off x="7159752" y="1993392"/>
+            <a:ext cx="1819656" cy="182880"/>
           </a:xfrm>
           <a:prstGeom prst="rect">
             <a:avLst/>
@@ -2309,7 +2309,7 @@
               <a:buNone/>
             </a:pPr>
             <a:r>
-              <a:rPr lang="en-US" sz="1100" b="1" dirty="0">
+              <a:rPr lang="en-US" sz="1130" b="1" dirty="0">
                 <a:solidFill>
                   <a:srgbClr val="18323A"/>
                 </a:solidFill>
@@ -2319,7 +2319,7 @@
               </a:rPr>
               <a:t>主要形态</a:t>
             </a:r>
-            <a:endParaRPr lang="en-US" sz="1100" dirty="0"/>
+            <a:endParaRPr lang="en-US" sz="1130" dirty="0"/>
           </a:p>
         </p:txBody>
       </p:sp>
@@ -2331,8 +2331,8 @@
         </p:nvSpPr>
         <p:spPr>
           <a:xfrm>
-            <a:off x="7315200" y="2258568"/>
-            <a:ext cx="1737360" cy="164592"/>
+            <a:off x="7159752" y="2258568"/>
+            <a:ext cx="1819656" cy="182880"/>
           </a:xfrm>
           <a:prstGeom prst="rect">
             <a:avLst/>
@@ -2350,9 +2350,9 @@
               <a:buNone/>
             </a:pPr>
             <a:r>
-              <a:rPr lang="en-US" sz="880" dirty="0">
-                <a:solidFill>
-                  <a:srgbClr val="5E7680"/>
+              <a:rPr lang="en-US" sz="940" dirty="0">
+                <a:solidFill>
+                  <a:srgbClr val="334E57"/>
                 </a:solidFill>
                 <a:latin typeface="Calibri" pitchFamily="34" charset="0"/>
                 <a:ea typeface="Calibri" pitchFamily="34" charset="-122"/>
@@ -2360,7 +2360,7 @@
               </a:rPr>
               <a:t>单体 / 微服务 / 前端</a:t>
             </a:r>
-            <a:endParaRPr lang="en-US" sz="880" dirty="0"/>
+            <a:endParaRPr lang="en-US" sz="940" dirty="0"/>
           </a:p>
         </p:txBody>
       </p:sp>
@@ -2372,7 +2372,7 @@
         </p:nvSpPr>
         <p:spPr>
           <a:xfrm>
-            <a:off x="9491472" y="1234440"/>
+            <a:off x="9345168" y="1234440"/>
             <a:ext cx="2148840" cy="1325880"/>
           </a:xfrm>
           <a:prstGeom prst="roundRect">
@@ -2392,7 +2392,7 @@
           <a:effectLst>
             <a:outerShdw sx="100000" sy="100000" kx="0" ky="0" algn="bl" rotWithShape="0" blurRad="63500" dist="25400" dir="2700000">
               <a:srgbClr val="000000">
-                <a:alpha val="12000"/>
+                <a:alpha val="10000"/>
               </a:srgbClr>
             </a:outerShdw>
           </a:effectLst>
@@ -2406,7 +2406,7 @@
         </p:nvSpPr>
         <p:spPr>
           <a:xfrm>
-            <a:off x="9656064" y="1399032"/>
+            <a:off x="9509760" y="1399032"/>
             <a:ext cx="1783080" cy="502920"/>
           </a:xfrm>
           <a:prstGeom prst="rect">
@@ -2447,8 +2447,8 @@
         </p:nvSpPr>
         <p:spPr>
           <a:xfrm>
-            <a:off x="9692640" y="1993392"/>
-            <a:ext cx="1737360" cy="182880"/>
+            <a:off x="9509760" y="1993392"/>
+            <a:ext cx="1819656" cy="182880"/>
           </a:xfrm>
           <a:prstGeom prst="rect">
             <a:avLst/>
@@ -2466,7 +2466,7 @@
               <a:buNone/>
             </a:pPr>
             <a:r>
-              <a:rPr lang="en-US" sz="1100" b="1" dirty="0">
+              <a:rPr lang="en-US" sz="1130" b="1" dirty="0">
                 <a:solidFill>
                   <a:srgbClr val="18323A"/>
                 </a:solidFill>
@@ -2476,7 +2476,7 @@
               </a:rPr>
               <a:t>微服务模块</a:t>
             </a:r>
-            <a:endParaRPr lang="en-US" sz="1100" dirty="0"/>
+            <a:endParaRPr lang="en-US" sz="1130" dirty="0"/>
           </a:p>
         </p:txBody>
       </p:sp>
@@ -2488,8 +2488,8 @@
         </p:nvSpPr>
         <p:spPr>
           <a:xfrm>
-            <a:off x="9692640" y="2258568"/>
-            <a:ext cx="1737360" cy="164592"/>
+            <a:off x="9509760" y="2258568"/>
+            <a:ext cx="1819656" cy="182880"/>
           </a:xfrm>
           <a:prstGeom prst="rect">
             <a:avLst/>
@@ -2507,17 +2507,17 @@
               <a:buNone/>
             </a:pPr>
             <a:r>
-              <a:rPr lang="en-US" sz="880" dirty="0">
-                <a:solidFill>
-                  <a:srgbClr val="5E7680"/>
+              <a:rPr lang="en-US" sz="940" dirty="0">
+                <a:solidFill>
+                  <a:srgbClr val="334E57"/>
                 </a:solidFill>
                 <a:latin typeface="Calibri" pitchFamily="34" charset="0"/>
                 <a:ea typeface="Calibri" pitchFamily="34" charset="-122"/>
                 <a:cs typeface="Calibri" pitchFamily="34" charset="-120"/>
               </a:rPr>
-              <a:t>common/model/client/user/app/ai/screenshot</a:t>
-            </a:r>
-            <a:endParaRPr lang="en-US" sz="880" dirty="0"/>
+              <a:t>common/model/client 等</a:t>
+            </a:r>
+            <a:endParaRPr lang="en-US" sz="940" dirty="0"/>
           </a:p>
         </p:txBody>
       </p:sp>
@@ -2529,7 +2529,7 @@
         </p:nvSpPr>
         <p:spPr>
           <a:xfrm>
-            <a:off x="7114032" y="2788920"/>
+            <a:off x="6995160" y="2788920"/>
             <a:ext cx="2148840" cy="1325880"/>
           </a:xfrm>
           <a:prstGeom prst="roundRect">
@@ -2549,7 +2549,7 @@
           <a:effectLst>
             <a:outerShdw sx="100000" sy="100000" kx="0" ky="0" algn="bl" rotWithShape="0" blurRad="63500" dist="25400" dir="2700000">
               <a:srgbClr val="000000">
-                <a:alpha val="12000"/>
+                <a:alpha val="10000"/>
               </a:srgbClr>
             </a:outerShdw>
           </a:effectLst>
@@ -2563,7 +2563,7 @@
         </p:nvSpPr>
         <p:spPr>
           <a:xfrm>
-            <a:off x="7278624" y="2953512"/>
+            <a:off x="7159752" y="2953512"/>
             <a:ext cx="1783080" cy="502920"/>
           </a:xfrm>
           <a:prstGeom prst="rect">
@@ -2604,8 +2604,8 @@
         </p:nvSpPr>
         <p:spPr>
           <a:xfrm>
-            <a:off x="7315200" y="3547872"/>
-            <a:ext cx="1737360" cy="182880"/>
+            <a:off x="7159752" y="3547872"/>
+            <a:ext cx="1819656" cy="182880"/>
           </a:xfrm>
           <a:prstGeom prst="rect">
             <a:avLst/>
@@ -2623,7 +2623,7 @@
               <a:buNone/>
             </a:pPr>
             <a:r>
-              <a:rPr lang="en-US" sz="1100" b="1" dirty="0">
+              <a:rPr lang="en-US" sz="1130" b="1" dirty="0">
                 <a:solidFill>
                   <a:srgbClr val="18323A"/>
                 </a:solidFill>
@@ -2633,7 +2633,7 @@
               </a:rPr>
               <a:t>核心能力域</a:t>
             </a:r>
-            <a:endParaRPr lang="en-US" sz="1100" dirty="0"/>
+            <a:endParaRPr lang="en-US" sz="1130" dirty="0"/>
           </a:p>
         </p:txBody>
       </p:sp>
@@ -2645,8 +2645,8 @@
         </p:nvSpPr>
         <p:spPr>
           <a:xfrm>
-            <a:off x="7315200" y="3813048"/>
-            <a:ext cx="1737360" cy="164592"/>
+            <a:off x="7159752" y="3813048"/>
+            <a:ext cx="1819656" cy="182880"/>
           </a:xfrm>
           <a:prstGeom prst="rect">
             <a:avLst/>
@@ -2664,17 +2664,17 @@
               <a:buNone/>
             </a:pPr>
             <a:r>
-              <a:rPr lang="en-US" sz="880" dirty="0">
-                <a:solidFill>
-                  <a:srgbClr val="5E7680"/>
+              <a:rPr lang="en-US" sz="940" dirty="0">
+                <a:solidFill>
+                  <a:srgbClr val="334E57"/>
                 </a:solidFill>
                 <a:latin typeface="Calibri" pitchFamily="34" charset="0"/>
                 <a:ea typeface="Calibri" pitchFamily="34" charset="-122"/>
                 <a:cs typeface="Calibri" pitchFamily="34" charset="-120"/>
               </a:rPr>
-              <a:t>生成、编辑、部署、管理、监控、下载</a:t>
-            </a:r>
-            <a:endParaRPr lang="en-US" sz="880" dirty="0"/>
+              <a:t>生成、编辑、部署、管理等</a:t>
+            </a:r>
+            <a:endParaRPr lang="en-US" sz="940" dirty="0"/>
           </a:p>
         </p:txBody>
       </p:sp>
@@ -2686,7 +2686,7 @@
         </p:nvSpPr>
         <p:spPr>
           <a:xfrm>
-            <a:off x="9491472" y="2788920"/>
+            <a:off x="9345168" y="2788920"/>
             <a:ext cx="2148840" cy="1325880"/>
           </a:xfrm>
           <a:prstGeom prst="roundRect">
@@ -2706,7 +2706,7 @@
           <a:effectLst>
             <a:outerShdw sx="100000" sy="100000" kx="0" ky="0" algn="bl" rotWithShape="0" blurRad="63500" dist="25400" dir="2700000">
               <a:srgbClr val="000000">
-                <a:alpha val="12000"/>
+                <a:alpha val="10000"/>
               </a:srgbClr>
             </a:outerShdw>
           </a:effectLst>
@@ -2720,7 +2720,7 @@
         </p:nvSpPr>
         <p:spPr>
           <a:xfrm>
-            <a:off x="9656064" y="2953512"/>
+            <a:off x="9509760" y="2953512"/>
             <a:ext cx="1783080" cy="502920"/>
           </a:xfrm>
           <a:prstGeom prst="rect">
@@ -2761,8 +2761,8 @@
         </p:nvSpPr>
         <p:spPr>
           <a:xfrm>
-            <a:off x="9692640" y="3547872"/>
-            <a:ext cx="1737360" cy="182880"/>
+            <a:off x="9509760" y="3547872"/>
+            <a:ext cx="1819656" cy="182880"/>
           </a:xfrm>
           <a:prstGeom prst="rect">
             <a:avLst/>
@@ -2780,7 +2780,7 @@
               <a:buNone/>
             </a:pPr>
             <a:r>
-              <a:rPr lang="en-US" sz="1100" b="1" dirty="0">
+              <a:rPr lang="en-US" sz="1130" b="1" dirty="0">
                 <a:solidFill>
                   <a:srgbClr val="18323A"/>
                 </a:solidFill>
@@ -2788,9 +2788,9 @@
                 <a:ea typeface="Calibri" pitchFamily="34" charset="-122"/>
                 <a:cs typeface="Calibri" pitchFamily="34" charset="-120"/>
               </a:rPr>
-              <a:t>当前分支近7日代码提交</a:t>
-            </a:r>
-            <a:endParaRPr lang="en-US" sz="1100" dirty="0"/>
+              <a:t>近7日代码提交</a:t>
+            </a:r>
+            <a:endParaRPr lang="en-US" sz="1130" dirty="0"/>
           </a:p>
         </p:txBody>
       </p:sp>
@@ -2802,8 +2802,8 @@
         </p:nvSpPr>
         <p:spPr>
           <a:xfrm>
-            <a:off x="9692640" y="3813048"/>
-            <a:ext cx="1737360" cy="164592"/>
+            <a:off x="9509760" y="3813048"/>
+            <a:ext cx="1819656" cy="182880"/>
           </a:xfrm>
           <a:prstGeom prst="rect">
             <a:avLst/>
@@ -2821,17 +2821,17 @@
               <a:buNone/>
             </a:pPr>
             <a:r>
-              <a:rPr lang="en-US" sz="880" dirty="0">
-                <a:solidFill>
-                  <a:srgbClr val="5E7680"/>
+              <a:rPr lang="en-US" sz="940" dirty="0">
+                <a:solidFill>
+                  <a:srgbClr val="334E57"/>
                 </a:solidFill>
                 <a:latin typeface="Calibri" pitchFamily="34" charset="0"/>
                 <a:ea typeface="Calibri" pitchFamily="34" charset="-122"/>
                 <a:cs typeface="Calibri" pitchFamily="34" charset="-120"/>
               </a:rPr>
-              <a:t>近期变更以报告为主</a:t>
-            </a:r>
-            <a:endParaRPr lang="en-US" sz="880" dirty="0"/>
+              <a:t>当前分支无业务变更</a:t>
+            </a:r>
+            <a:endParaRPr lang="en-US" sz="940" dirty="0"/>
           </a:p>
         </p:txBody>
       </p:sp>
@@ -2843,7 +2843,7 @@
         </p:nvSpPr>
         <p:spPr>
           <a:xfrm>
-            <a:off x="749808" y="6144768"/>
+            <a:off x="749808" y="5989320"/>
             <a:ext cx="4389120" cy="256032"/>
           </a:xfrm>
           <a:prstGeom prst="rect">
@@ -2860,7 +2860,7 @@
               <a:buNone/>
             </a:pPr>
             <a:r>
-              <a:rPr lang="en-US" sz="1200" dirty="0">
+              <a:rPr lang="en-US" sz="1250" dirty="0">
                 <a:solidFill>
                   <a:srgbClr val="D7F7F0"/>
                 </a:solidFill>
@@ -2870,7 +2870,7 @@
               </a:rPr>
               <a:t>日期：2026-06-14（北京时间）</a:t>
             </a:r>
-            <a:endParaRPr lang="en-US" sz="1200" dirty="0"/>
+            <a:endParaRPr lang="en-US" sz="1250" dirty="0"/>
           </a:p>
         </p:txBody>
       </p:sp>
@@ -2964,8 +2964,8 @@
         </p:nvSpPr>
         <p:spPr>
           <a:xfrm>
-            <a:off x="10835640" y="-274320"/>
-            <a:ext cx="1234440" cy="1234440"/>
+            <a:off x="10927080" y="-237744"/>
+            <a:ext cx="1024128" cy="1024128"/>
           </a:xfrm>
           <a:prstGeom prst="ellipse">
             <a:avLst/>
@@ -2989,8 +2989,8 @@
         </p:nvSpPr>
         <p:spPr>
           <a:xfrm>
-            <a:off x="11356848" y="137160"/>
-            <a:ext cx="475488" cy="475488"/>
+            <a:off x="11384280" y="128016"/>
+            <a:ext cx="393192" cy="393192"/>
           </a:xfrm>
           <a:prstGeom prst="ellipse">
             <a:avLst/>
@@ -3015,7 +3015,7 @@
         <p:spPr>
           <a:xfrm>
             <a:off x="658368" y="384048"/>
-            <a:ext cx="8138160" cy="502920"/>
+            <a:ext cx="8046720" cy="502920"/>
           </a:xfrm>
           <a:prstGeom prst="rect">
             <a:avLst/>
@@ -3056,7 +3056,7 @@
         <p:spPr>
           <a:xfrm>
             <a:off x="685800" y="932688"/>
-            <a:ext cx="7863840" cy="256032"/>
+            <a:ext cx="7726680" cy="256032"/>
           </a:xfrm>
           <a:prstGeom prst="rect">
             <a:avLst/>
@@ -3074,9 +3074,9 @@
               <a:buNone/>
             </a:pPr>
             <a:r>
-              <a:rPr lang="en-US" sz="1050" dirty="0">
-                <a:solidFill>
-                  <a:srgbClr val="5E7680"/>
+              <a:rPr lang="en-US" sz="1100" dirty="0">
+                <a:solidFill>
+                  <a:srgbClr val="334E57"/>
                 </a:solidFill>
                 <a:latin typeface="Calibri" pitchFamily="34" charset="0"/>
                 <a:ea typeface="Calibri" pitchFamily="34" charset="-122"/>
@@ -3084,7 +3084,7 @@
               </a:rPr>
               <a:t>关注影响可维护性、上线稳定性和日报真实性的风险。</a:t>
             </a:r>
-            <a:endParaRPr lang="en-US" sz="1050" dirty="0"/>
+            <a:endParaRPr lang="en-US" sz="1100" dirty="0"/>
           </a:p>
         </p:txBody>
       </p:sp>
@@ -3162,7 +3162,7 @@
         </p:nvSpPr>
         <p:spPr>
           <a:xfrm>
-            <a:off x="658368" y="6419088"/>
+            <a:off x="658368" y="6291072"/>
             <a:ext cx="4389120" cy="201168"/>
           </a:xfrm>
           <a:prstGeom prst="rect">
@@ -3179,9 +3179,9 @@
               <a:buNone/>
             </a:pPr>
             <a:r>
-              <a:rPr lang="en-US" sz="850" dirty="0">
-                <a:solidFill>
-                  <a:srgbClr val="5E7680"/>
+              <a:rPr lang="en-US" sz="880" dirty="0">
+                <a:solidFill>
+                  <a:srgbClr val="334E57"/>
                 </a:solidFill>
                 <a:latin typeface="Calibri" pitchFamily="34" charset="0"/>
                 <a:ea typeface="Calibri" pitchFamily="34" charset="-122"/>
@@ -3189,7 +3189,7 @@
               </a:rPr>
               <a:t>yu-ai-code-mother · 2026-06-14 · 9</a:t>
             </a:r>
-            <a:endParaRPr lang="en-US" sz="850" dirty="0"/>
+            <a:endParaRPr lang="en-US" sz="880" dirty="0"/>
           </a:p>
         </p:txBody>
       </p:sp>
@@ -3201,7 +3201,7 @@
         </p:nvSpPr>
         <p:spPr>
           <a:xfrm>
-            <a:off x="11109960" y="6446520"/>
+            <a:off x="11109960" y="6318504"/>
             <a:ext cx="402336" cy="73152"/>
           </a:xfrm>
           <a:prstGeom prst="rect">
@@ -3226,7 +3226,7 @@
         </p:nvSpPr>
         <p:spPr>
           <a:xfrm>
-            <a:off x="11558016" y="6446520"/>
+            <a:off x="11558016" y="6318504"/>
             <a:ext cx="210312" cy="73152"/>
           </a:xfrm>
           <a:prstGeom prst="rect">
@@ -3252,11 +3252,11 @@
         <p:spPr>
           <a:xfrm>
             <a:off x="749808" y="1207008"/>
-            <a:ext cx="5074920" cy="1225296"/>
+            <a:ext cx="5074920" cy="1170432"/>
           </a:xfrm>
           <a:prstGeom prst="roundRect">
             <a:avLst>
-              <a:gd name="adj" fmla="val 8955"/>
+              <a:gd name="adj" fmla="val 9375"/>
             </a:avLst>
           </a:prstGeom>
           <a:solidFill>
@@ -3271,7 +3271,7 @@
           <a:effectLst>
             <a:outerShdw sx="100000" sy="100000" kx="0" ky="0" algn="bl" rotWithShape="0" blurRad="63500" dist="25400" dir="2700000">
               <a:srgbClr val="000000">
-                <a:alpha val="12000"/>
+                <a:alpha val="10000"/>
               </a:srgbClr>
             </a:outerShdw>
           </a:effectLst>
@@ -3286,17 +3286,17 @@
         <p:spPr>
           <a:xfrm>
             <a:off x="749808" y="1207008"/>
-            <a:ext cx="100584" cy="1225296"/>
-          </a:xfrm>
-          <a:prstGeom prst="rect">
-            <a:avLst/>
-          </a:prstGeom>
-          <a:solidFill>
-            <a:srgbClr val="C8553D"/>
-          </a:solidFill>
-          <a:ln w="12700">
-            <a:solidFill>
-              <a:srgbClr val="C8553D"/>
+            <a:ext cx="100584" cy="1170432"/>
+          </a:xfrm>
+          <a:prstGeom prst="rect">
+            <a:avLst/>
+          </a:prstGeom>
+          <a:solidFill>
+            <a:srgbClr val="B84A35"/>
+          </a:solidFill>
+          <a:ln w="12700">
+            <a:solidFill>
+              <a:srgbClr val="B84A35"/>
             </a:solidFill>
             <a:prstDash val="solid"/>
           </a:ln>
@@ -3317,11 +3317,11 @@
             <a:avLst/>
           </a:prstGeom>
           <a:solidFill>
-            <a:srgbClr val="C8553D"/>
-          </a:solidFill>
-          <a:ln w="12700">
-            <a:solidFill>
-              <a:srgbClr val="C8553D"/>
+            <a:srgbClr val="B84A35"/>
+          </a:solidFill>
+          <a:ln w="12700">
+            <a:solidFill>
+              <a:srgbClr val="B84A35"/>
             </a:solidFill>
             <a:prstDash val="solid"/>
           </a:ln>
@@ -3354,7 +3354,7 @@
               <a:buNone/>
             </a:pPr>
             <a:r>
-              <a:rPr lang="en-US" sz="850" b="1" dirty="0">
+              <a:rPr lang="en-US" sz="880" b="1" dirty="0">
                 <a:solidFill>
                   <a:srgbClr val="FFFFFF"/>
                 </a:solidFill>
@@ -3364,7 +3364,7 @@
               </a:rPr>
               <a:t>1</a:t>
             </a:r>
-            <a:endParaRPr lang="en-US" sz="850" dirty="0"/>
+            <a:endParaRPr lang="en-US" sz="880" dirty="0"/>
           </a:p>
         </p:txBody>
       </p:sp>
@@ -3395,7 +3395,7 @@
               <a:buNone/>
             </a:pPr>
             <a:r>
-              <a:rPr lang="en-US" sz="1500" b="1" dirty="0">
+              <a:rPr lang="en-US" sz="1540" b="1" dirty="0">
                 <a:solidFill>
                   <a:srgbClr val="18323A"/>
                 </a:solidFill>
@@ -3405,7 +3405,7 @@
               </a:rPr>
               <a:t>配置与密钥</a:t>
             </a:r>
-            <a:endParaRPr lang="en-US" sz="1500" dirty="0"/>
+            <a:endParaRPr lang="en-US" sz="1540" dirty="0"/>
           </a:p>
         </p:txBody>
       </p:sp>
@@ -3418,7 +3418,7 @@
         <p:spPr>
           <a:xfrm>
             <a:off x="1536192" y="1828800"/>
-            <a:ext cx="4114800" cy="475488"/>
+            <a:ext cx="4114800" cy="457200"/>
           </a:xfrm>
           <a:prstGeom prst="rect">
             <a:avLst/>
@@ -3436,17 +3436,17 @@
               <a:buNone/>
             </a:pPr>
             <a:r>
-              <a:rPr lang="en-US" sz="1170" dirty="0">
-                <a:solidFill>
-                  <a:srgbClr val="5E7680"/>
+              <a:rPr lang="en-US" sz="1200" dirty="0">
+                <a:solidFill>
+                  <a:srgbClr val="334E57"/>
                 </a:solidFill>
                 <a:latin typeface="Calibri" pitchFamily="34" charset="0"/>
                 <a:ea typeface="Calibri" pitchFamily="34" charset="-122"/>
                 <a:cs typeface="Calibri" pitchFamily="34" charset="-120"/>
               </a:rPr>
-              <a:t>AI、对象存储、数据库、Redis、Nacos/Dubbo 等环境依赖较多，环境样例与安全检查需持续维护。</a:t>
-            </a:r>
-            <a:endParaRPr lang="en-US" sz="1170" dirty="0"/>
+              <a:t>AI、对象存储、数据库、Redis、Nacos/Dubbo 等环境依赖较多。</a:t>
+            </a:r>
+            <a:endParaRPr lang="en-US" sz="1200" dirty="0"/>
           </a:p>
         </p:txBody>
       </p:sp>
@@ -3459,11 +3459,11 @@
         <p:spPr>
           <a:xfrm>
             <a:off x="6199632" y="1207008"/>
-            <a:ext cx="5074920" cy="1225296"/>
+            <a:ext cx="5074920" cy="1170432"/>
           </a:xfrm>
           <a:prstGeom prst="roundRect">
             <a:avLst>
-              <a:gd name="adj" fmla="val 8955"/>
+              <a:gd name="adj" fmla="val 9375"/>
             </a:avLst>
           </a:prstGeom>
           <a:solidFill>
@@ -3478,7 +3478,7 @@
           <a:effectLst>
             <a:outerShdw sx="100000" sy="100000" kx="0" ky="0" algn="bl" rotWithShape="0" blurRad="63500" dist="25400" dir="2700000">
               <a:srgbClr val="000000">
-                <a:alpha val="12000"/>
+                <a:alpha val="10000"/>
               </a:srgbClr>
             </a:outerShdw>
           </a:effectLst>
@@ -3493,17 +3493,17 @@
         <p:spPr>
           <a:xfrm>
             <a:off x="6199632" y="1207008"/>
-            <a:ext cx="100584" cy="1225296"/>
-          </a:xfrm>
-          <a:prstGeom prst="rect">
-            <a:avLst/>
-          </a:prstGeom>
-          <a:solidFill>
-            <a:srgbClr val="F2A65A"/>
-          </a:solidFill>
-          <a:ln w="12700">
-            <a:solidFill>
-              <a:srgbClr val="F2A65A"/>
+            <a:ext cx="100584" cy="1170432"/>
+          </a:xfrm>
+          <a:prstGeom prst="rect">
+            <a:avLst/>
+          </a:prstGeom>
+          <a:solidFill>
+            <a:srgbClr val="D98032"/>
+          </a:solidFill>
+          <a:ln w="12700">
+            <a:solidFill>
+              <a:srgbClr val="D98032"/>
             </a:solidFill>
             <a:prstDash val="solid"/>
           </a:ln>
@@ -3524,11 +3524,11 @@
             <a:avLst/>
           </a:prstGeom>
           <a:solidFill>
-            <a:srgbClr val="F2A65A"/>
-          </a:solidFill>
-          <a:ln w="12700">
-            <a:solidFill>
-              <a:srgbClr val="F2A65A"/>
+            <a:srgbClr val="D98032"/>
+          </a:solidFill>
+          <a:ln w="12700">
+            <a:solidFill>
+              <a:srgbClr val="D98032"/>
             </a:solidFill>
             <a:prstDash val="solid"/>
           </a:ln>
@@ -3561,7 +3561,7 @@
               <a:buNone/>
             </a:pPr>
             <a:r>
-              <a:rPr lang="en-US" sz="850" b="1" dirty="0">
+              <a:rPr lang="en-US" sz="880" b="1" dirty="0">
                 <a:solidFill>
                   <a:srgbClr val="FFFFFF"/>
                 </a:solidFill>
@@ -3571,7 +3571,7 @@
               </a:rPr>
               <a:t>2</a:t>
             </a:r>
-            <a:endParaRPr lang="en-US" sz="850" dirty="0"/>
+            <a:endParaRPr lang="en-US" sz="880" dirty="0"/>
           </a:p>
         </p:txBody>
       </p:sp>
@@ -3602,7 +3602,7 @@
               <a:buNone/>
             </a:pPr>
             <a:r>
-              <a:rPr lang="en-US" sz="1500" b="1" dirty="0">
+              <a:rPr lang="en-US" sz="1540" b="1" dirty="0">
                 <a:solidFill>
                   <a:srgbClr val="18323A"/>
                 </a:solidFill>
@@ -3612,7 +3612,7 @@
               </a:rPr>
               <a:t>代码形态并存</a:t>
             </a:r>
-            <a:endParaRPr lang="en-US" sz="1500" dirty="0"/>
+            <a:endParaRPr lang="en-US" sz="1540" dirty="0"/>
           </a:p>
         </p:txBody>
       </p:sp>
@@ -3625,7 +3625,7 @@
         <p:spPr>
           <a:xfrm>
             <a:off x="6986016" y="1828800"/>
-            <a:ext cx="4114800" cy="475488"/>
+            <a:ext cx="4114800" cy="457200"/>
           </a:xfrm>
           <a:prstGeom prst="rect">
             <a:avLst/>
@@ -3643,17 +3643,17 @@
               <a:buNone/>
             </a:pPr>
             <a:r>
-              <a:rPr lang="en-US" sz="1170" dirty="0">
-                <a:solidFill>
-                  <a:srgbClr val="5E7680"/>
+              <a:rPr lang="en-US" sz="1200" dirty="0">
+                <a:solidFill>
+                  <a:srgbClr val="334E57"/>
                 </a:solidFill>
                 <a:latin typeface="Calibri" pitchFamily="34" charset="0"/>
                 <a:ea typeface="Calibri" pitchFamily="34" charset="-122"/>
                 <a:cs typeface="Calibri" pitchFamily="34" charset="-120"/>
               </a:rPr>
-              <a:t>单体与微服务目录同时存在，若缺少清晰运行指引，容易出现修复遗漏或模块职责混淆。</a:t>
-            </a:r>
-            <a:endParaRPr lang="en-US" sz="1170" dirty="0"/>
+              <a:t>单体与微服务目录同时存在，缺少清晰运行指引时易出现修复遗漏。</a:t>
+            </a:r>
+            <a:endParaRPr lang="en-US" sz="1200" dirty="0"/>
           </a:p>
         </p:txBody>
       </p:sp>
@@ -3666,11 +3666,11 @@
         <p:spPr>
           <a:xfrm>
             <a:off x="749808" y="2880360"/>
-            <a:ext cx="5074920" cy="1225296"/>
+            <a:ext cx="5074920" cy="1170432"/>
           </a:xfrm>
           <a:prstGeom prst="roundRect">
             <a:avLst>
-              <a:gd name="adj" fmla="val 8955"/>
+              <a:gd name="adj" fmla="val 9375"/>
             </a:avLst>
           </a:prstGeom>
           <a:solidFill>
@@ -3685,7 +3685,7 @@
           <a:effectLst>
             <a:outerShdw sx="100000" sy="100000" kx="0" ky="0" algn="bl" rotWithShape="0" blurRad="63500" dist="25400" dir="2700000">
               <a:srgbClr val="000000">
-                <a:alpha val="12000"/>
+                <a:alpha val="10000"/>
               </a:srgbClr>
             </a:outerShdw>
           </a:effectLst>
@@ -3700,17 +3700,17 @@
         <p:spPr>
           <a:xfrm>
             <a:off x="749808" y="2880360"/>
-            <a:ext cx="100584" cy="1225296"/>
-          </a:xfrm>
-          <a:prstGeom prst="rect">
-            <a:avLst/>
-          </a:prstGeom>
-          <a:solidFill>
-            <a:srgbClr val="C8553D"/>
-          </a:solidFill>
-          <a:ln w="12700">
-            <a:solidFill>
-              <a:srgbClr val="C8553D"/>
+            <a:ext cx="100584" cy="1170432"/>
+          </a:xfrm>
+          <a:prstGeom prst="rect">
+            <a:avLst/>
+          </a:prstGeom>
+          <a:solidFill>
+            <a:srgbClr val="B84A35"/>
+          </a:solidFill>
+          <a:ln w="12700">
+            <a:solidFill>
+              <a:srgbClr val="B84A35"/>
             </a:solidFill>
             <a:prstDash val="solid"/>
           </a:ln>
@@ -3731,11 +3731,11 @@
             <a:avLst/>
           </a:prstGeom>
           <a:solidFill>
-            <a:srgbClr val="C8553D"/>
-          </a:solidFill>
-          <a:ln w="12700">
-            <a:solidFill>
-              <a:srgbClr val="C8553D"/>
+            <a:srgbClr val="B84A35"/>
+          </a:solidFill>
+          <a:ln w="12700">
+            <a:solidFill>
+              <a:srgbClr val="B84A35"/>
             </a:solidFill>
             <a:prstDash val="solid"/>
           </a:ln>
@@ -3768,7 +3768,7 @@
               <a:buNone/>
             </a:pPr>
             <a:r>
-              <a:rPr lang="en-US" sz="850" b="1" dirty="0">
+              <a:rPr lang="en-US" sz="880" b="1" dirty="0">
                 <a:solidFill>
                   <a:srgbClr val="FFFFFF"/>
                 </a:solidFill>
@@ -3778,7 +3778,7 @@
               </a:rPr>
               <a:t>3</a:t>
             </a:r>
-            <a:endParaRPr lang="en-US" sz="850" dirty="0"/>
+            <a:endParaRPr lang="en-US" sz="880" dirty="0"/>
           </a:p>
         </p:txBody>
       </p:sp>
@@ -3809,7 +3809,7 @@
               <a:buNone/>
             </a:pPr>
             <a:r>
-              <a:rPr lang="en-US" sz="1500" b="1" dirty="0">
+              <a:rPr lang="en-US" sz="1540" b="1" dirty="0">
                 <a:solidFill>
                   <a:srgbClr val="18323A"/>
                 </a:solidFill>
@@ -3819,7 +3819,7 @@
               </a:rPr>
               <a:t>第三方 AI 成本</a:t>
             </a:r>
-            <a:endParaRPr lang="en-US" sz="1500" dirty="0"/>
+            <a:endParaRPr lang="en-US" sz="1540" dirty="0"/>
           </a:p>
         </p:txBody>
       </p:sp>
@@ -3832,7 +3832,7 @@
         <p:spPr>
           <a:xfrm>
             <a:off x="1536192" y="3502152"/>
-            <a:ext cx="4114800" cy="475488"/>
+            <a:ext cx="4114800" cy="457200"/>
           </a:xfrm>
           <a:prstGeom prst="rect">
             <a:avLst/>
@@ -3850,17 +3850,17 @@
               <a:buNone/>
             </a:pPr>
             <a:r>
-              <a:rPr lang="en-US" sz="1170" dirty="0">
-                <a:solidFill>
-                  <a:srgbClr val="5E7680"/>
+              <a:rPr lang="en-US" sz="1200" dirty="0">
+                <a:solidFill>
+                  <a:srgbClr val="334E57"/>
                 </a:solidFill>
                 <a:latin typeface="Calibri" pitchFamily="34" charset="0"/>
                 <a:ea typeface="Calibri" pitchFamily="34" charset="-122"/>
                 <a:cs typeface="Calibri" pitchFamily="34" charset="-120"/>
               </a:rPr>
-              <a:t>生成链路依赖模型调用和工具调用，需跟踪 token 成本、超时、失败重试和限流体验。</a:t>
-            </a:r>
-            <a:endParaRPr lang="en-US" sz="1170" dirty="0"/>
+              <a:t>生成链路依赖模型和工具调用，需跟踪成本、超时、失败重试和限流体验。</a:t>
+            </a:r>
+            <a:endParaRPr lang="en-US" sz="1200" dirty="0"/>
           </a:p>
         </p:txBody>
       </p:sp>
@@ -3873,11 +3873,11 @@
         <p:spPr>
           <a:xfrm>
             <a:off x="6199632" y="2880360"/>
-            <a:ext cx="5074920" cy="1225296"/>
+            <a:ext cx="5074920" cy="1170432"/>
           </a:xfrm>
           <a:prstGeom prst="roundRect">
             <a:avLst>
-              <a:gd name="adj" fmla="val 8955"/>
+              <a:gd name="adj" fmla="val 9375"/>
             </a:avLst>
           </a:prstGeom>
           <a:solidFill>
@@ -3892,7 +3892,7 @@
           <a:effectLst>
             <a:outerShdw sx="100000" sy="100000" kx="0" ky="0" algn="bl" rotWithShape="0" blurRad="63500" dist="25400" dir="2700000">
               <a:srgbClr val="000000">
-                <a:alpha val="12000"/>
+                <a:alpha val="10000"/>
               </a:srgbClr>
             </a:outerShdw>
           </a:effectLst>
@@ -3907,17 +3907,17 @@
         <p:spPr>
           <a:xfrm>
             <a:off x="6199632" y="2880360"/>
-            <a:ext cx="100584" cy="1225296"/>
-          </a:xfrm>
-          <a:prstGeom prst="rect">
-            <a:avLst/>
-          </a:prstGeom>
-          <a:solidFill>
-            <a:srgbClr val="F2A65A"/>
-          </a:solidFill>
-          <a:ln w="12700">
-            <a:solidFill>
-              <a:srgbClr val="F2A65A"/>
+            <a:ext cx="100584" cy="1170432"/>
+          </a:xfrm>
+          <a:prstGeom prst="rect">
+            <a:avLst/>
+          </a:prstGeom>
+          <a:solidFill>
+            <a:srgbClr val="D98032"/>
+          </a:solidFill>
+          <a:ln w="12700">
+            <a:solidFill>
+              <a:srgbClr val="D98032"/>
             </a:solidFill>
             <a:prstDash val="solid"/>
           </a:ln>
@@ -3938,11 +3938,11 @@
             <a:avLst/>
           </a:prstGeom>
           <a:solidFill>
-            <a:srgbClr val="F2A65A"/>
-          </a:solidFill>
-          <a:ln w="12700">
-            <a:solidFill>
-              <a:srgbClr val="F2A65A"/>
+            <a:srgbClr val="D98032"/>
+          </a:solidFill>
+          <a:ln w="12700">
+            <a:solidFill>
+              <a:srgbClr val="D98032"/>
             </a:solidFill>
             <a:prstDash val="solid"/>
           </a:ln>
@@ -3975,7 +3975,7 @@
               <a:buNone/>
             </a:pPr>
             <a:r>
-              <a:rPr lang="en-US" sz="850" b="1" dirty="0">
+              <a:rPr lang="en-US" sz="880" b="1" dirty="0">
                 <a:solidFill>
                   <a:srgbClr val="FFFFFF"/>
                 </a:solidFill>
@@ -3985,7 +3985,7 @@
               </a:rPr>
               <a:t>4</a:t>
             </a:r>
-            <a:endParaRPr lang="en-US" sz="850" dirty="0"/>
+            <a:endParaRPr lang="en-US" sz="880" dirty="0"/>
           </a:p>
         </p:txBody>
       </p:sp>
@@ -4016,7 +4016,7 @@
               <a:buNone/>
             </a:pPr>
             <a:r>
-              <a:rPr lang="en-US" sz="1500" b="1" dirty="0">
+              <a:rPr lang="en-US" sz="1540" b="1" dirty="0">
                 <a:solidFill>
                   <a:srgbClr val="18323A"/>
                 </a:solidFill>
@@ -4026,7 +4026,7 @@
               </a:rPr>
               <a:t>测试自动化缺口</a:t>
             </a:r>
-            <a:endParaRPr lang="en-US" sz="1500" dirty="0"/>
+            <a:endParaRPr lang="en-US" sz="1540" dirty="0"/>
           </a:p>
         </p:txBody>
       </p:sp>
@@ -4039,7 +4039,7 @@
         <p:spPr>
           <a:xfrm>
             <a:off x="6986016" y="3502152"/>
-            <a:ext cx="4114800" cy="475488"/>
+            <a:ext cx="4114800" cy="457200"/>
           </a:xfrm>
           <a:prstGeom prst="rect">
             <a:avLst/>
@@ -4057,9 +4057,9 @@
               <a:buNone/>
             </a:pPr>
             <a:r>
-              <a:rPr lang="en-US" sz="1170" dirty="0">
-                <a:solidFill>
-                  <a:srgbClr val="5E7680"/>
+              <a:rPr lang="en-US" sz="1200" dirty="0">
+                <a:solidFill>
+                  <a:srgbClr val="334E57"/>
                 </a:solidFill>
                 <a:latin typeface="Calibri" pitchFamily="34" charset="0"/>
                 <a:ea typeface="Calibri" pitchFamily="34" charset="-122"/>
@@ -4067,7 +4067,7 @@
               </a:rPr>
               <a:t>无仓库内 CI 配置，业务提交质量无法在 PR 阶段自动证明。</a:t>
             </a:r>
-            <a:endParaRPr lang="en-US" sz="1170" dirty="0"/>
+            <a:endParaRPr lang="en-US" sz="1200" dirty="0"/>
           </a:p>
         </p:txBody>
       </p:sp>
@@ -4079,12 +4079,12 @@
         </p:nvSpPr>
         <p:spPr>
           <a:xfrm>
-            <a:off x="749808" y="4553712"/>
-            <a:ext cx="10515600" cy="1225296"/>
+            <a:off x="749808" y="4498848"/>
+            <a:ext cx="10515600" cy="1170432"/>
           </a:xfrm>
           <a:prstGeom prst="roundRect">
             <a:avLst>
-              <a:gd name="adj" fmla="val 8955"/>
+              <a:gd name="adj" fmla="val 9375"/>
             </a:avLst>
           </a:prstGeom>
           <a:solidFill>
@@ -4099,7 +4099,7 @@
           <a:effectLst>
             <a:outerShdw sx="100000" sy="100000" kx="0" ky="0" algn="bl" rotWithShape="0" blurRad="63500" dist="25400" dir="2700000">
               <a:srgbClr val="000000">
-                <a:alpha val="12000"/>
+                <a:alpha val="10000"/>
               </a:srgbClr>
             </a:outerShdw>
           </a:effectLst>
@@ -4113,18 +4113,18 @@
         </p:nvSpPr>
         <p:spPr>
           <a:xfrm>
-            <a:off x="749808" y="4553712"/>
-            <a:ext cx="100584" cy="1225296"/>
-          </a:xfrm>
-          <a:prstGeom prst="rect">
-            <a:avLst/>
-          </a:prstGeom>
-          <a:solidFill>
-            <a:srgbClr val="C8553D"/>
-          </a:solidFill>
-          <a:ln w="12700">
-            <a:solidFill>
-              <a:srgbClr val="C8553D"/>
+            <a:off x="749808" y="4498848"/>
+            <a:ext cx="100584" cy="1170432"/>
+          </a:xfrm>
+          <a:prstGeom prst="rect">
+            <a:avLst/>
+          </a:prstGeom>
+          <a:solidFill>
+            <a:srgbClr val="B84A35"/>
+          </a:solidFill>
+          <a:ln w="12700">
+            <a:solidFill>
+              <a:srgbClr val="B84A35"/>
             </a:solidFill>
             <a:prstDash val="solid"/>
           </a:ln>
@@ -4138,18 +4138,18 @@
         </p:nvSpPr>
         <p:spPr>
           <a:xfrm>
-            <a:off x="950976" y="4754880"/>
+            <a:off x="950976" y="4700016"/>
             <a:ext cx="438912" cy="438912"/>
           </a:xfrm>
           <a:prstGeom prst="ellipse">
             <a:avLst/>
           </a:prstGeom>
           <a:solidFill>
-            <a:srgbClr val="C8553D"/>
-          </a:solidFill>
-          <a:ln w="12700">
-            <a:solidFill>
-              <a:srgbClr val="C8553D"/>
+            <a:srgbClr val="B84A35"/>
+          </a:solidFill>
+          <a:ln w="12700">
+            <a:solidFill>
+              <a:srgbClr val="B84A35"/>
             </a:solidFill>
             <a:prstDash val="solid"/>
           </a:ln>
@@ -4163,7 +4163,7 @@
         </p:nvSpPr>
         <p:spPr>
           <a:xfrm>
-            <a:off x="950976" y="4873752"/>
+            <a:off x="950976" y="4818888"/>
             <a:ext cx="438912" cy="128016"/>
           </a:xfrm>
           <a:prstGeom prst="rect">
@@ -4182,7 +4182,7 @@
               <a:buNone/>
             </a:pPr>
             <a:r>
-              <a:rPr lang="en-US" sz="850" b="1" dirty="0">
+              <a:rPr lang="en-US" sz="880" b="1" dirty="0">
                 <a:solidFill>
                   <a:srgbClr val="FFFFFF"/>
                 </a:solidFill>
@@ -4192,7 +4192,7 @@
               </a:rPr>
               <a:t>5</a:t>
             </a:r>
-            <a:endParaRPr lang="en-US" sz="850" dirty="0"/>
+            <a:endParaRPr lang="en-US" sz="880" dirty="0"/>
           </a:p>
         </p:txBody>
       </p:sp>
@@ -4204,7 +4204,7 @@
         </p:nvSpPr>
         <p:spPr>
           <a:xfrm>
-            <a:off x="1536192" y="4754880"/>
+            <a:off x="1536192" y="4700016"/>
             <a:ext cx="9509760" cy="301752"/>
           </a:xfrm>
           <a:prstGeom prst="rect">
@@ -4223,7 +4223,7 @@
               <a:buNone/>
             </a:pPr>
             <a:r>
-              <a:rPr lang="en-US" sz="1500" b="1" dirty="0">
+              <a:rPr lang="en-US" sz="1540" b="1" dirty="0">
                 <a:solidFill>
                   <a:srgbClr val="18323A"/>
                 </a:solidFill>
@@ -4233,7 +4233,7 @@
               </a:rPr>
               <a:t>监控未闭环</a:t>
             </a:r>
-            <a:endParaRPr lang="en-US" sz="1500" dirty="0"/>
+            <a:endParaRPr lang="en-US" sz="1540" dirty="0"/>
           </a:p>
         </p:txBody>
       </p:sp>
@@ -4245,8 +4245,8 @@
         </p:nvSpPr>
         <p:spPr>
           <a:xfrm>
-            <a:off x="1536192" y="5175504"/>
-            <a:ext cx="9555480" cy="475488"/>
+            <a:off x="1536192" y="5120640"/>
+            <a:ext cx="9555480" cy="457200"/>
           </a:xfrm>
           <a:prstGeom prst="rect">
             <a:avLst/>
@@ -4264,17 +4264,17 @@
               <a:buNone/>
             </a:pPr>
             <a:r>
-              <a:rPr lang="en-US" sz="1170" dirty="0">
-                <a:solidFill>
-                  <a:srgbClr val="5E7680"/>
+              <a:rPr lang="en-US" sz="1200" dirty="0">
+                <a:solidFill>
+                  <a:srgbClr val="334E57"/>
                 </a:solidFill>
                 <a:latin typeface="Calibri" pitchFamily="34" charset="0"/>
                 <a:ea typeface="Calibri" pitchFamily="34" charset="-122"/>
                 <a:cs typeface="Calibri" pitchFamily="34" charset="-120"/>
               </a:rPr>
-              <a:t>Prometheus 配置存在，但日报还未自动读取实际指标，风险趋势难以及时量化。</a:t>
-            </a:r>
-            <a:endParaRPr lang="en-US" sz="1170" dirty="0"/>
+              <a:t>Prometheus 配置存在，但日报还未自动读取实际指标，风险趋势难以量化。</a:t>
+            </a:r>
+            <a:endParaRPr lang="en-US" sz="1200" dirty="0"/>
           </a:p>
         </p:txBody>
       </p:sp>
@@ -4368,8 +4368,8 @@
         </p:nvSpPr>
         <p:spPr>
           <a:xfrm>
-            <a:off x="10835640" y="-274320"/>
-            <a:ext cx="1234440" cy="1234440"/>
+            <a:off x="10927080" y="-237744"/>
+            <a:ext cx="1024128" cy="1024128"/>
           </a:xfrm>
           <a:prstGeom prst="ellipse">
             <a:avLst/>
@@ -4393,8 +4393,8 @@
         </p:nvSpPr>
         <p:spPr>
           <a:xfrm>
-            <a:off x="11356848" y="137160"/>
-            <a:ext cx="475488" cy="475488"/>
+            <a:off x="11384280" y="128016"/>
+            <a:ext cx="393192" cy="393192"/>
           </a:xfrm>
           <a:prstGeom prst="ellipse">
             <a:avLst/>
@@ -4419,7 +4419,7 @@
         <p:spPr>
           <a:xfrm>
             <a:off x="658368" y="384048"/>
-            <a:ext cx="8138160" cy="502920"/>
+            <a:ext cx="8046720" cy="502920"/>
           </a:xfrm>
           <a:prstGeom prst="rect">
             <a:avLst/>
@@ -4460,7 +4460,7 @@
         <p:spPr>
           <a:xfrm>
             <a:off x="685800" y="932688"/>
-            <a:ext cx="7863840" cy="256032"/>
+            <a:ext cx="7726680" cy="256032"/>
           </a:xfrm>
           <a:prstGeom prst="rect">
             <a:avLst/>
@@ -4478,9 +4478,9 @@
               <a:buNone/>
             </a:pPr>
             <a:r>
-              <a:rPr lang="en-US" sz="1050" dirty="0">
-                <a:solidFill>
-                  <a:srgbClr val="5E7680"/>
+              <a:rPr lang="en-US" sz="1100" dirty="0">
+                <a:solidFill>
+                  <a:srgbClr val="334E57"/>
                 </a:solidFill>
                 <a:latin typeface="Calibri" pitchFamily="34" charset="0"/>
                 <a:ea typeface="Calibri" pitchFamily="34" charset="-122"/>
@@ -4488,7 +4488,7 @@
               </a:rPr>
               <a:t>以提高可验证性、可观测性和交付稳定性为优先。</a:t>
             </a:r>
-            <a:endParaRPr lang="en-US" sz="1050" dirty="0"/>
+            <a:endParaRPr lang="en-US" sz="1100" dirty="0"/>
           </a:p>
         </p:txBody>
       </p:sp>
@@ -4566,7 +4566,7 @@
         </p:nvSpPr>
         <p:spPr>
           <a:xfrm>
-            <a:off x="658368" y="6419088"/>
+            <a:off x="658368" y="6291072"/>
             <a:ext cx="4389120" cy="201168"/>
           </a:xfrm>
           <a:prstGeom prst="rect">
@@ -4583,9 +4583,9 @@
               <a:buNone/>
             </a:pPr>
             <a:r>
-              <a:rPr lang="en-US" sz="850" dirty="0">
-                <a:solidFill>
-                  <a:srgbClr val="5E7680"/>
+              <a:rPr lang="en-US" sz="880" dirty="0">
+                <a:solidFill>
+                  <a:srgbClr val="334E57"/>
                 </a:solidFill>
                 <a:latin typeface="Calibri" pitchFamily="34" charset="0"/>
                 <a:ea typeface="Calibri" pitchFamily="34" charset="-122"/>
@@ -4593,7 +4593,7 @@
               </a:rPr>
               <a:t>yu-ai-code-mother · 2026-06-14 · 10</a:t>
             </a:r>
-            <a:endParaRPr lang="en-US" sz="850" dirty="0"/>
+            <a:endParaRPr lang="en-US" sz="880" dirty="0"/>
           </a:p>
         </p:txBody>
       </p:sp>
@@ -4605,7 +4605,7 @@
         </p:nvSpPr>
         <p:spPr>
           <a:xfrm>
-            <a:off x="11109960" y="6446520"/>
+            <a:off x="11109960" y="6318504"/>
             <a:ext cx="402336" cy="73152"/>
           </a:xfrm>
           <a:prstGeom prst="rect">
@@ -4630,7 +4630,7 @@
         </p:nvSpPr>
         <p:spPr>
           <a:xfrm>
-            <a:off x="11558016" y="6446520"/>
+            <a:off x="11558016" y="6318504"/>
             <a:ext cx="210312" cy="73152"/>
           </a:xfrm>
           <a:prstGeom prst="rect">
@@ -4739,7 +4739,7 @@
           <a:effectLst>
             <a:outerShdw sx="100000" sy="100000" kx="0" ky="0" algn="bl" rotWithShape="0" blurRad="63500" dist="25400" dir="2700000">
               <a:srgbClr val="000000">
-                <a:alpha val="12000"/>
+                <a:alpha val="10000"/>
               </a:srgbClr>
             </a:outerShdw>
           </a:effectLst>
@@ -4813,17 +4813,17 @@
               <a:buNone/>
             </a:pPr>
             <a:r>
-              <a:rPr lang="en-US" sz="1250" dirty="0">
-                <a:solidFill>
-                  <a:srgbClr val="5E7680"/>
+              <a:rPr lang="en-US" sz="1300" dirty="0">
+                <a:solidFill>
+                  <a:srgbClr val="334E57"/>
                 </a:solidFill>
                 <a:latin typeface="Calibri" pitchFamily="34" charset="0"/>
                 <a:ea typeface="Calibri" pitchFamily="34" charset="-122"/>
                 <a:cs typeface="Calibri" pitchFamily="34" charset="-120"/>
               </a:rPr>
-              <a:t>新增后端 Maven test、前端 type-check/build、报告占位符检查等最小工作流。</a:t>
-            </a:r>
-            <a:endParaRPr lang="en-US" sz="1250" dirty="0"/>
+              <a:t>新增 Maven test、前端 type-check/build、报告占位符检查。</a:t>
+            </a:r>
+            <a:endParaRPr lang="en-US" sz="1300" dirty="0"/>
           </a:p>
         </p:txBody>
       </p:sp>
@@ -4919,7 +4919,7 @@
           <a:effectLst>
             <a:outerShdw sx="100000" sy="100000" kx="0" ky="0" algn="bl" rotWithShape="0" blurRad="63500" dist="25400" dir="2700000">
               <a:srgbClr val="000000">
-                <a:alpha val="12000"/>
+                <a:alpha val="10000"/>
               </a:srgbClr>
             </a:outerShdw>
           </a:effectLst>
@@ -4993,9 +4993,9 @@
               <a:buNone/>
             </a:pPr>
             <a:r>
-              <a:rPr lang="en-US" sz="1250" dirty="0">
-                <a:solidFill>
-                  <a:srgbClr val="5E7680"/>
+              <a:rPr lang="en-US" sz="1300" dirty="0">
+                <a:solidFill>
+                  <a:srgbClr val="334E57"/>
                 </a:solidFill>
                 <a:latin typeface="Calibri" pitchFamily="34" charset="0"/>
                 <a:ea typeface="Calibri" pitchFamily="34" charset="-122"/>
@@ -5003,7 +5003,7 @@
               </a:rPr>
               <a:t>从 Prometheus/日志/数据库提取生成量、成功率、耗时、成本与部署指标。</a:t>
             </a:r>
-            <a:endParaRPr lang="en-US" sz="1250" dirty="0"/>
+            <a:endParaRPr lang="en-US" sz="1300" dirty="0"/>
           </a:p>
         </p:txBody>
       </p:sp>
@@ -5099,7 +5099,7 @@
           <a:effectLst>
             <a:outerShdw sx="100000" sy="100000" kx="0" ky="0" algn="bl" rotWithShape="0" blurRad="63500" dist="25400" dir="2700000">
               <a:srgbClr val="000000">
-                <a:alpha val="12000"/>
+                <a:alpha val="10000"/>
               </a:srgbClr>
             </a:outerShdw>
           </a:effectLst>
@@ -5173,17 +5173,17 @@
               <a:buNone/>
             </a:pPr>
             <a:r>
-              <a:rPr lang="en-US" sz="1250" dirty="0">
-                <a:solidFill>
-                  <a:srgbClr val="5E7680"/>
+              <a:rPr lang="en-US" sz="1300" dirty="0">
+                <a:solidFill>
+                  <a:srgbClr val="334E57"/>
                 </a:solidFill>
                 <a:latin typeface="Calibri" pitchFamily="34" charset="0"/>
                 <a:ea typeface="Calibri" pitchFamily="34" charset="-122"/>
                 <a:cs typeface="Calibri" pitchFamily="34" charset="-120"/>
               </a:rPr>
-              <a:t>整理单体与微服务两种部署方式、必需中间件、环境变量和常见故障。</a:t>
-            </a:r>
-            <a:endParaRPr lang="en-US" sz="1250" dirty="0"/>
+              <a:t>整理单体与微服务两种部署方式、必需中间件和环境变量。</a:t>
+            </a:r>
+            <a:endParaRPr lang="en-US" sz="1300" dirty="0"/>
           </a:p>
         </p:txBody>
       </p:sp>
@@ -5279,7 +5279,7 @@
           <a:effectLst>
             <a:outerShdw sx="100000" sy="100000" kx="0" ky="0" algn="bl" rotWithShape="0" blurRad="63500" dist="25400" dir="2700000">
               <a:srgbClr val="000000">
-                <a:alpha val="12000"/>
+                <a:alpha val="10000"/>
               </a:srgbClr>
             </a:outerShdw>
           </a:effectLst>
@@ -5353,17 +5353,17 @@
               <a:buNone/>
             </a:pPr>
             <a:r>
-              <a:rPr lang="en-US" sz="1250" dirty="0">
-                <a:solidFill>
-                  <a:srgbClr val="5E7680"/>
+              <a:rPr lang="en-US" sz="1300" dirty="0">
+                <a:solidFill>
+                  <a:srgbClr val="334E57"/>
                 </a:solidFill>
                 <a:latin typeface="Calibri" pitchFamily="34" charset="0"/>
                 <a:ea typeface="Calibri" pitchFamily="34" charset="-122"/>
                 <a:cs typeface="Calibri" pitchFamily="34" charset="-120"/>
               </a:rPr>
-              <a:t>为创建应用、对话生成、部署弹窗、管理员管理页补充端到端校验。</a:t>
-            </a:r>
-            <a:endParaRPr lang="en-US" sz="1250" dirty="0"/>
+              <a:t>为创建应用、对话生成、部署弹窗和管理员页补充端到端校验。</a:t>
+            </a:r>
+            <a:endParaRPr lang="en-US" sz="1300" dirty="0"/>
           </a:p>
         </p:txBody>
       </p:sp>
@@ -5459,7 +5459,7 @@
           <a:effectLst>
             <a:outerShdw sx="100000" sy="100000" kx="0" ky="0" algn="bl" rotWithShape="0" blurRad="63500" dist="25400" dir="2700000">
               <a:srgbClr val="000000">
-                <a:alpha val="12000"/>
+                <a:alpha val="10000"/>
               </a:srgbClr>
             </a:outerShdw>
           </a:effectLst>
@@ -5533,17 +5533,17 @@
               <a:buNone/>
             </a:pPr>
             <a:r>
-              <a:rPr lang="en-US" sz="1250" dirty="0">
-                <a:solidFill>
-                  <a:srgbClr val="5E7680"/>
+              <a:rPr lang="en-US" sz="1300" dirty="0">
+                <a:solidFill>
+                  <a:srgbClr val="334E57"/>
                 </a:solidFill>
                 <a:latin typeface="Calibri" pitchFamily="34" charset="0"/>
                 <a:ea typeface="Calibri" pitchFamily="34" charset="-122"/>
                 <a:cs typeface="Calibri" pitchFamily="34" charset="-120"/>
               </a:rPr>
-              <a:t>对 AI 调用失败、成本超限、截图/部署失败、权限绕过等场景设定告警和应急动作。</a:t>
-            </a:r>
-            <a:endParaRPr lang="en-US" sz="1250" dirty="0"/>
+              <a:t>对 AI 调用失败、成本超限、截图/部署失败和权限问题设定告警。</a:t>
+            </a:r>
+            <a:endParaRPr lang="en-US" sz="1300" dirty="0"/>
           </a:p>
         </p:txBody>
       </p:sp>
@@ -5612,21 +5612,21 @@
         </p:nvSpPr>
         <p:spPr>
           <a:xfrm>
-            <a:off x="8275320" y="-777240"/>
-            <a:ext cx="4023360" cy="4023360"/>
+            <a:off x="8458200" y="-713232"/>
+            <a:ext cx="3657600" cy="3657600"/>
           </a:xfrm>
           <a:prstGeom prst="ellipse">
             <a:avLst/>
           </a:prstGeom>
           <a:solidFill>
             <a:srgbClr val="00A896">
-              <a:alpha val="18000"/>
+              <a:alpha val="14000"/>
             </a:srgbClr>
           </a:solidFill>
-          <a:ln w="25400">
+          <a:ln w="19050">
             <a:solidFill>
               <a:srgbClr val="00A896">
-                <a:alpha val="75000"/>
+                <a:alpha val="65000"/>
               </a:srgbClr>
             </a:solidFill>
             <a:prstDash val="solid"/>
@@ -5641,21 +5641,21 @@
         </p:nvSpPr>
         <p:spPr>
           <a:xfrm>
-            <a:off x="9372600" y="4343400"/>
-            <a:ext cx="2971800" cy="2971800"/>
+            <a:off x="9646920" y="4526280"/>
+            <a:ext cx="2560320" cy="2560320"/>
           </a:xfrm>
           <a:prstGeom prst="ellipse">
             <a:avLst/>
           </a:prstGeom>
           <a:solidFill>
             <a:srgbClr val="02C39A">
-              <a:alpha val="15000"/>
+              <a:alpha val="12000"/>
             </a:srgbClr>
           </a:solidFill>
-          <a:ln w="25400">
+          <a:ln w="19050">
             <a:solidFill>
               <a:srgbClr val="02C39A">
-                <a:alpha val="72000"/>
+                <a:alpha val="62000"/>
               </a:srgbClr>
             </a:solidFill>
             <a:prstDash val="solid"/>
@@ -5670,15 +5670,15 @@
         </p:nvSpPr>
         <p:spPr>
           <a:xfrm>
-            <a:off x="365760" y="5212080"/>
-            <a:ext cx="1051560" cy="1051560"/>
+            <a:off x="384048" y="5074920"/>
+            <a:ext cx="914400" cy="914400"/>
           </a:xfrm>
           <a:prstGeom prst="ellipse">
             <a:avLst/>
           </a:prstGeom>
           <a:solidFill>
             <a:srgbClr val="00A896">
-              <a:alpha val="90000"/>
+              <a:alpha val="88000"/>
             </a:srgbClr>
           </a:solidFill>
           <a:ln w="12700">
@@ -5697,8 +5697,8 @@
         </p:nvSpPr>
         <p:spPr>
           <a:xfrm>
-            <a:off x="987552" y="5596128"/>
-            <a:ext cx="502920" cy="502920"/>
+            <a:off x="950976" y="5440680"/>
+            <a:ext cx="411480" cy="411480"/>
           </a:xfrm>
           <a:prstGeom prst="ellipse">
             <a:avLst/>
@@ -5762,7 +5762,7 @@
         <p:spPr>
           <a:xfrm>
             <a:off x="749808" y="1325880"/>
-            <a:ext cx="7955280" cy="658368"/>
+            <a:ext cx="7452360" cy="786384"/>
           </a:xfrm>
           <a:prstGeom prst="rect">
             <a:avLst/>
@@ -5780,7 +5780,7 @@
               <a:buNone/>
             </a:pPr>
             <a:r>
-              <a:rPr lang="en-US" sz="3400" b="1" dirty="0">
+              <a:rPr lang="en-US" sz="3300" b="1" dirty="0">
                 <a:solidFill>
                   <a:srgbClr val="FFFFFF"/>
                 </a:solidFill>
@@ -5790,7 +5790,7 @@
               </a:rPr>
               <a:t>平台核心能力完整，下一阶段重点是“可验证、可观测、可运营”。</a:t>
             </a:r>
-            <a:endParaRPr lang="en-US" sz="3400" dirty="0"/>
+            <a:endParaRPr lang="en-US" sz="3300" dirty="0"/>
           </a:p>
         </p:txBody>
       </p:sp>
@@ -5812,13 +5812,13 @@
           </a:prstGeom>
           <a:solidFill>
             <a:srgbClr val="FFFFFF">
-              <a:alpha val="14000"/>
+              <a:alpha val="22000"/>
             </a:srgbClr>
           </a:solidFill>
           <a:ln w="12700">
             <a:solidFill>
               <a:srgbClr val="00A896">
-                <a:alpha val="80000"/>
+                <a:alpha val="90000"/>
               </a:srgbClr>
             </a:solidFill>
             <a:prstDash val="solid"/>
@@ -5875,7 +5875,7 @@
               <a:buNone/>
             </a:pPr>
             <a:r>
-              <a:rPr lang="en-US" sz="850" b="1" dirty="0">
+              <a:rPr lang="en-US" sz="880" b="1" dirty="0">
                 <a:solidFill>
                   <a:srgbClr val="21295C"/>
                 </a:solidFill>
@@ -5885,7 +5885,7 @@
               </a:rPr>
               <a:t>能力</a:t>
             </a:r>
-            <a:endParaRPr lang="en-US" sz="850" dirty="0"/>
+            <a:endParaRPr lang="en-US" sz="880" dirty="0"/>
           </a:p>
         </p:txBody>
       </p:sp>
@@ -5897,8 +5897,8 @@
         </p:nvSpPr>
         <p:spPr>
           <a:xfrm>
-            <a:off x="1691640" y="3072384"/>
-            <a:ext cx="3703320" cy="329184"/>
+            <a:off x="1691640" y="3044952"/>
+            <a:ext cx="3703320" cy="402336"/>
           </a:xfrm>
           <a:prstGeom prst="rect">
             <a:avLst/>
@@ -5916,7 +5916,7 @@
               <a:buNone/>
             </a:pPr>
             <a:r>
-              <a:rPr lang="en-US" sz="1250" dirty="0">
+              <a:rPr lang="en-US" sz="1330" dirty="0">
                 <a:solidFill>
                   <a:srgbClr val="FFFFFF"/>
                 </a:solidFill>
@@ -5926,7 +5926,7 @@
               </a:rPr>
               <a:t>AI 生成、可视化编辑、部署下载、后台管理和监控基础已具备。</a:t>
             </a:r>
-            <a:endParaRPr lang="en-US" sz="1250" dirty="0"/>
+            <a:endParaRPr lang="en-US" sz="1330" dirty="0"/>
           </a:p>
         </p:txBody>
       </p:sp>
@@ -5938,7 +5938,7 @@
         </p:nvSpPr>
         <p:spPr>
           <a:xfrm>
-            <a:off x="822960" y="4526280"/>
+            <a:off x="822960" y="4407408"/>
             <a:ext cx="4892040" cy="1060704"/>
           </a:xfrm>
           <a:prstGeom prst="roundRect">
@@ -5948,13 +5948,13 @@
           </a:prstGeom>
           <a:solidFill>
             <a:srgbClr val="FFFFFF">
-              <a:alpha val="14000"/>
+              <a:alpha val="22000"/>
             </a:srgbClr>
           </a:solidFill>
           <a:ln w="12700">
             <a:solidFill>
               <a:srgbClr val="00A896">
-                <a:alpha val="80000"/>
+                <a:alpha val="90000"/>
               </a:srgbClr>
             </a:solidFill>
             <a:prstDash val="solid"/>
@@ -5969,7 +5969,7 @@
         </p:nvSpPr>
         <p:spPr>
           <a:xfrm>
-            <a:off x="1024128" y="4773168"/>
+            <a:off x="1024128" y="4654296"/>
             <a:ext cx="502920" cy="502920"/>
           </a:xfrm>
           <a:prstGeom prst="ellipse">
@@ -5994,7 +5994,7 @@
         </p:nvSpPr>
         <p:spPr>
           <a:xfrm>
-            <a:off x="1024128" y="4928616"/>
+            <a:off x="1024128" y="4809744"/>
             <a:ext cx="502920" cy="109728"/>
           </a:xfrm>
           <a:prstGeom prst="rect">
@@ -6011,7 +6011,7 @@
               <a:buNone/>
             </a:pPr>
             <a:r>
-              <a:rPr lang="en-US" sz="850" b="1" dirty="0">
+              <a:rPr lang="en-US" sz="880" b="1" dirty="0">
                 <a:solidFill>
                   <a:srgbClr val="FFFFFF"/>
                 </a:solidFill>
@@ -6021,7 +6021,7 @@
               </a:rPr>
               <a:t>变更</a:t>
             </a:r>
-            <a:endParaRPr lang="en-US" sz="850" dirty="0"/>
+            <a:endParaRPr lang="en-US" sz="880" dirty="0"/>
           </a:p>
         </p:txBody>
       </p:sp>
@@ -6033,8 +6033,8 @@
         </p:nvSpPr>
         <p:spPr>
           <a:xfrm>
-            <a:off x="1691640" y="4809744"/>
-            <a:ext cx="3703320" cy="329184"/>
+            <a:off x="1691640" y="4663440"/>
+            <a:ext cx="3703320" cy="402336"/>
           </a:xfrm>
           <a:prstGeom prst="rect">
             <a:avLst/>
@@ -6052,7 +6052,7 @@
               <a:buNone/>
             </a:pPr>
             <a:r>
-              <a:rPr lang="en-US" sz="1250" dirty="0">
+              <a:rPr lang="en-US" sz="1330" dirty="0">
                 <a:solidFill>
                   <a:srgbClr val="FFFFFF"/>
                 </a:solidFill>
@@ -6060,9 +6060,9 @@
                 <a:ea typeface="Calibri" pitchFamily="34" charset="-122"/>
                 <a:cs typeface="Calibri" pitchFamily="34" charset="-120"/>
               </a:rPr>
-              <a:t>当前分支近 7 天无业务代码提交，本次仅新增 2026-06-14 状态报告。</a:t>
-            </a:r>
-            <a:endParaRPr lang="en-US" sz="1250" dirty="0"/>
+              <a:t>当前分支近 7 天无业务代码提交，本次仅新增状态报告。</a:t>
+            </a:r>
+            <a:endParaRPr lang="en-US" sz="1330" dirty="0"/>
           </a:p>
         </p:txBody>
       </p:sp>
@@ -6084,13 +6084,13 @@
           </a:prstGeom>
           <a:solidFill>
             <a:srgbClr val="FFFFFF">
-              <a:alpha val="14000"/>
+              <a:alpha val="22000"/>
             </a:srgbClr>
           </a:solidFill>
           <a:ln w="12700">
             <a:solidFill>
               <a:srgbClr val="00A896">
-                <a:alpha val="80000"/>
+                <a:alpha val="90000"/>
               </a:srgbClr>
             </a:solidFill>
             <a:prstDash val="solid"/>
@@ -6147,7 +6147,7 @@
               <a:buNone/>
             </a:pPr>
             <a:r>
-              <a:rPr lang="en-US" sz="850" b="1" dirty="0">
+              <a:rPr lang="en-US" sz="880" b="1" dirty="0">
                 <a:solidFill>
                   <a:srgbClr val="21295C"/>
                 </a:solidFill>
@@ -6157,7 +6157,7 @@
               </a:rPr>
               <a:t>风险</a:t>
             </a:r>
-            <a:endParaRPr lang="en-US" sz="850" dirty="0"/>
+            <a:endParaRPr lang="en-US" sz="880" dirty="0"/>
           </a:p>
         </p:txBody>
       </p:sp>
@@ -6169,8 +6169,8 @@
         </p:nvSpPr>
         <p:spPr>
           <a:xfrm>
-            <a:off x="7178040" y="3072384"/>
-            <a:ext cx="3703320" cy="329184"/>
+            <a:off x="7178040" y="3044952"/>
+            <a:ext cx="3703320" cy="402336"/>
           </a:xfrm>
           <a:prstGeom prst="rect">
             <a:avLst/>
@@ -6188,7 +6188,7 @@
               <a:buNone/>
             </a:pPr>
             <a:r>
-              <a:rPr lang="en-US" sz="1250" dirty="0">
+              <a:rPr lang="en-US" sz="1330" dirty="0">
                 <a:solidFill>
                   <a:srgbClr val="FFFFFF"/>
                 </a:solidFill>
@@ -6196,9 +6196,9 @@
                 <a:ea typeface="Calibri" pitchFamily="34" charset="-122"/>
                 <a:cs typeface="Calibri" pitchFamily="34" charset="-120"/>
               </a:rPr>
-              <a:t>CI 缺口、运行数据缺口、单体/微服务并存和外部 AI 依赖需要重点治理。</a:t>
-            </a:r>
-            <a:endParaRPr lang="en-US" sz="1250" dirty="0"/>
+              <a:t>CI、运行数据、架构并存和外部 AI 依赖需要重点治理。</a:t>
+            </a:r>
+            <a:endParaRPr lang="en-US" sz="1330" dirty="0"/>
           </a:p>
         </p:txBody>
       </p:sp>
@@ -6210,7 +6210,7 @@
         </p:nvSpPr>
         <p:spPr>
           <a:xfrm>
-            <a:off x="6309360" y="4526280"/>
+            <a:off x="6309360" y="4407408"/>
             <a:ext cx="4892040" cy="1060704"/>
           </a:xfrm>
           <a:prstGeom prst="roundRect">
@@ -6220,13 +6220,13 @@
           </a:prstGeom>
           <a:solidFill>
             <a:srgbClr val="FFFFFF">
-              <a:alpha val="14000"/>
+              <a:alpha val="22000"/>
             </a:srgbClr>
           </a:solidFill>
           <a:ln w="12700">
             <a:solidFill>
               <a:srgbClr val="00A896">
-                <a:alpha val="80000"/>
+                <a:alpha val="90000"/>
               </a:srgbClr>
             </a:solidFill>
             <a:prstDash val="solid"/>
@@ -6241,7 +6241,7 @@
         </p:nvSpPr>
         <p:spPr>
           <a:xfrm>
-            <a:off x="6510528" y="4773168"/>
+            <a:off x="6510528" y="4654296"/>
             <a:ext cx="502920" cy="502920"/>
           </a:xfrm>
           <a:prstGeom prst="ellipse">
@@ -6266,7 +6266,7 @@
         </p:nvSpPr>
         <p:spPr>
           <a:xfrm>
-            <a:off x="6510528" y="4928616"/>
+            <a:off x="6510528" y="4809744"/>
             <a:ext cx="502920" cy="109728"/>
           </a:xfrm>
           <a:prstGeom prst="rect">
@@ -6283,7 +6283,7 @@
               <a:buNone/>
             </a:pPr>
             <a:r>
-              <a:rPr lang="en-US" sz="850" b="1" dirty="0">
+              <a:rPr lang="en-US" sz="880" b="1" dirty="0">
                 <a:solidFill>
                   <a:srgbClr val="FFFFFF"/>
                 </a:solidFill>
@@ -6293,7 +6293,7 @@
               </a:rPr>
               <a:t>行动</a:t>
             </a:r>
-            <a:endParaRPr lang="en-US" sz="850" dirty="0"/>
+            <a:endParaRPr lang="en-US" sz="880" dirty="0"/>
           </a:p>
         </p:txBody>
       </p:sp>
@@ -6305,8 +6305,8 @@
         </p:nvSpPr>
         <p:spPr>
           <a:xfrm>
-            <a:off x="7178040" y="4809744"/>
-            <a:ext cx="3703320" cy="329184"/>
+            <a:off x="7178040" y="4663440"/>
+            <a:ext cx="3703320" cy="402336"/>
           </a:xfrm>
           <a:prstGeom prst="rect">
             <a:avLst/>
@@ -6324,7 +6324,7 @@
               <a:buNone/>
             </a:pPr>
             <a:r>
-              <a:rPr lang="en-US" sz="1250" dirty="0">
+              <a:rPr lang="en-US" sz="1330" dirty="0">
                 <a:solidFill>
                   <a:srgbClr val="FFFFFF"/>
                 </a:solidFill>
@@ -6334,7 +6334,7 @@
               </a:rPr>
               <a:t>优先补 CI、日报指标采集、运行手册和关键路径测试。</a:t>
             </a:r>
-            <a:endParaRPr lang="en-US" sz="1250" dirty="0"/>
+            <a:endParaRPr lang="en-US" sz="1330" dirty="0"/>
           </a:p>
         </p:txBody>
       </p:sp>
@@ -6346,8 +6346,8 @@
         </p:nvSpPr>
         <p:spPr>
           <a:xfrm>
-            <a:off x="749808" y="6263640"/>
-            <a:ext cx="6217920" cy="164592"/>
+            <a:off x="749808" y="6053328"/>
+            <a:ext cx="6217920" cy="182880"/>
           </a:xfrm>
           <a:prstGeom prst="rect">
             <a:avLst/>
@@ -6363,7 +6363,7 @@
               <a:buNone/>
             </a:pPr>
             <a:r>
-              <a:rPr lang="en-US" sz="920" dirty="0">
+              <a:rPr lang="en-US" sz="980" dirty="0">
                 <a:solidFill>
                   <a:srgbClr val="D7F7F0"/>
                 </a:solidFill>
@@ -6373,7 +6373,7 @@
               </a:rPr>
               <a:t>报告文件：docs/reports/project-status-2026-06-14.pptx</a:t>
             </a:r>
-            <a:endParaRPr lang="en-US" sz="920" dirty="0"/>
+            <a:endParaRPr lang="en-US" sz="980" dirty="0"/>
           </a:p>
         </p:txBody>
       </p:sp>
@@ -6467,8 +6467,8 @@
         </p:nvSpPr>
         <p:spPr>
           <a:xfrm>
-            <a:off x="10835640" y="-274320"/>
-            <a:ext cx="1234440" cy="1234440"/>
+            <a:off x="10927080" y="-237744"/>
+            <a:ext cx="1024128" cy="1024128"/>
           </a:xfrm>
           <a:prstGeom prst="ellipse">
             <a:avLst/>
@@ -6492,8 +6492,8 @@
         </p:nvSpPr>
         <p:spPr>
           <a:xfrm>
-            <a:off x="11356848" y="137160"/>
-            <a:ext cx="475488" cy="475488"/>
+            <a:off x="11384280" y="128016"/>
+            <a:ext cx="393192" cy="393192"/>
           </a:xfrm>
           <a:prstGeom prst="ellipse">
             <a:avLst/>
@@ -6518,7 +6518,7 @@
         <p:spPr>
           <a:xfrm>
             <a:off x="658368" y="384048"/>
-            <a:ext cx="8138160" cy="502920"/>
+            <a:ext cx="8046720" cy="502920"/>
           </a:xfrm>
           <a:prstGeom prst="rect">
             <a:avLst/>
@@ -6559,7 +6559,7 @@
         <p:spPr>
           <a:xfrm>
             <a:off x="685800" y="932688"/>
-            <a:ext cx="7863840" cy="256032"/>
+            <a:ext cx="7726680" cy="256032"/>
           </a:xfrm>
           <a:prstGeom prst="rect">
             <a:avLst/>
@@ -6577,17 +6577,17 @@
               <a:buNone/>
             </a:pPr>
             <a:r>
-              <a:rPr lang="en-US" sz="1050" dirty="0">
-                <a:solidFill>
-                  <a:srgbClr val="5E7680"/>
+              <a:rPr lang="en-US" sz="1100" dirty="0">
+                <a:solidFill>
+                  <a:srgbClr val="334E57"/>
                 </a:solidFill>
                 <a:latin typeface="Calibri" pitchFamily="34" charset="0"/>
                 <a:ea typeface="Calibri" pitchFamily="34" charset="-122"/>
                 <a:cs typeface="Calibri" pitchFamily="34" charset="-120"/>
               </a:rPr>
-              <a:t>企业级 AI 代码生成平台，覆盖应用创建、对话生成、预览部署、后台管理与可观测性。</a:t>
-            </a:r>
-            <a:endParaRPr lang="en-US" sz="1050" dirty="0"/>
+              <a:t>企业级 AI 代码生成平台，覆盖创建、对话生成、预览部署、后台管理与可观测性。</a:t>
+            </a:r>
+            <a:endParaRPr lang="en-US" sz="1100" dirty="0"/>
           </a:p>
         </p:txBody>
       </p:sp>
@@ -6665,7 +6665,7 @@
         </p:nvSpPr>
         <p:spPr>
           <a:xfrm>
-            <a:off x="658368" y="6419088"/>
+            <a:off x="658368" y="6291072"/>
             <a:ext cx="4389120" cy="201168"/>
           </a:xfrm>
           <a:prstGeom prst="rect">
@@ -6682,9 +6682,9 @@
               <a:buNone/>
             </a:pPr>
             <a:r>
-              <a:rPr lang="en-US" sz="850" dirty="0">
-                <a:solidFill>
-                  <a:srgbClr val="5E7680"/>
+              <a:rPr lang="en-US" sz="880" dirty="0">
+                <a:solidFill>
+                  <a:srgbClr val="334E57"/>
                 </a:solidFill>
                 <a:latin typeface="Calibri" pitchFamily="34" charset="0"/>
                 <a:ea typeface="Calibri" pitchFamily="34" charset="-122"/>
@@ -6692,7 +6692,7 @@
               </a:rPr>
               <a:t>yu-ai-code-mother · 2026-06-14 · 1</a:t>
             </a:r>
-            <a:endParaRPr lang="en-US" sz="850" dirty="0"/>
+            <a:endParaRPr lang="en-US" sz="880" dirty="0"/>
           </a:p>
         </p:txBody>
       </p:sp>
@@ -6704,7 +6704,7 @@
         </p:nvSpPr>
         <p:spPr>
           <a:xfrm>
-            <a:off x="11109960" y="6446520"/>
+            <a:off x="11109960" y="6318504"/>
             <a:ext cx="402336" cy="73152"/>
           </a:xfrm>
           <a:prstGeom prst="rect">
@@ -6729,7 +6729,7 @@
         </p:nvSpPr>
         <p:spPr>
           <a:xfrm>
-            <a:off x="11558016" y="6446520"/>
+            <a:off x="11558016" y="6318504"/>
             <a:ext cx="210312" cy="73152"/>
           </a:xfrm>
           <a:prstGeom prst="rect">
@@ -6774,7 +6774,7 @@
           <a:effectLst>
             <a:outerShdw sx="100000" sy="100000" kx="0" ky="0" algn="bl" rotWithShape="0" blurRad="63500" dist="25400" dir="2700000">
               <a:srgbClr val="000000">
-                <a:alpha val="12000"/>
+                <a:alpha val="10000"/>
               </a:srgbClr>
             </a:outerShdw>
           </a:effectLst>
@@ -6829,8 +6829,8 @@
         </p:nvSpPr>
         <p:spPr>
           <a:xfrm>
-            <a:off x="950976" y="2203704"/>
-            <a:ext cx="1737360" cy="182880"/>
+            <a:off x="914400" y="2203704"/>
+            <a:ext cx="1819656" cy="182880"/>
           </a:xfrm>
           <a:prstGeom prst="rect">
             <a:avLst/>
@@ -6848,7 +6848,7 @@
               <a:buNone/>
             </a:pPr>
             <a:r>
-              <a:rPr lang="en-US" sz="1100" b="1" dirty="0">
+              <a:rPr lang="en-US" sz="1130" b="1" dirty="0">
                 <a:solidFill>
                   <a:srgbClr val="18323A"/>
                 </a:solidFill>
@@ -6858,7 +6858,7 @@
               </a:rPr>
               <a:t>后端主线</a:t>
             </a:r>
-            <a:endParaRPr lang="en-US" sz="1100" dirty="0"/>
+            <a:endParaRPr lang="en-US" sz="1130" dirty="0"/>
           </a:p>
         </p:txBody>
       </p:sp>
@@ -6870,8 +6870,8 @@
         </p:nvSpPr>
         <p:spPr>
           <a:xfrm>
-            <a:off x="950976" y="2468880"/>
-            <a:ext cx="1737360" cy="164592"/>
+            <a:off x="914400" y="2468880"/>
+            <a:ext cx="1819656" cy="182880"/>
           </a:xfrm>
           <a:prstGeom prst="rect">
             <a:avLst/>
@@ -6889,9 +6889,9 @@
               <a:buNone/>
             </a:pPr>
             <a:r>
-              <a:rPr lang="en-US" sz="880" dirty="0">
-                <a:solidFill>
-                  <a:srgbClr val="5E7680"/>
+              <a:rPr lang="en-US" sz="940" dirty="0">
+                <a:solidFill>
+                  <a:srgbClr val="334E57"/>
                 </a:solidFill>
                 <a:latin typeface="Calibri" pitchFamily="34" charset="0"/>
                 <a:ea typeface="Calibri" pitchFamily="34" charset="-122"/>
@@ -6899,7 +6899,7 @@
               </a:rPr>
               <a:t>Java 21 / LangChain4j</a:t>
             </a:r>
-            <a:endParaRPr lang="en-US" sz="880" dirty="0"/>
+            <a:endParaRPr lang="en-US" sz="940" dirty="0"/>
           </a:p>
         </p:txBody>
       </p:sp>
@@ -6931,7 +6931,7 @@
           <a:effectLst>
             <a:outerShdw sx="100000" sy="100000" kx="0" ky="0" algn="bl" rotWithShape="0" blurRad="63500" dist="25400" dir="2700000">
               <a:srgbClr val="000000">
-                <a:alpha val="12000"/>
+                <a:alpha val="10000"/>
               </a:srgbClr>
             </a:outerShdw>
           </a:effectLst>
@@ -6986,8 +6986,8 @@
         </p:nvSpPr>
         <p:spPr>
           <a:xfrm>
-            <a:off x="3328416" y="2203704"/>
-            <a:ext cx="1737360" cy="182880"/>
+            <a:off x="3291840" y="2203704"/>
+            <a:ext cx="1819656" cy="182880"/>
           </a:xfrm>
           <a:prstGeom prst="rect">
             <a:avLst/>
@@ -7005,7 +7005,7 @@
               <a:buNone/>
             </a:pPr>
             <a:r>
-              <a:rPr lang="en-US" sz="1100" b="1" dirty="0">
+              <a:rPr lang="en-US" sz="1130" b="1" dirty="0">
                 <a:solidFill>
                   <a:srgbClr val="18323A"/>
                 </a:solidFill>
@@ -7015,7 +7015,7 @@
               </a:rPr>
               <a:t>前端体验</a:t>
             </a:r>
-            <a:endParaRPr lang="en-US" sz="1100" dirty="0"/>
+            <a:endParaRPr lang="en-US" sz="1130" dirty="0"/>
           </a:p>
         </p:txBody>
       </p:sp>
@@ -7027,8 +7027,8 @@
         </p:nvSpPr>
         <p:spPr>
           <a:xfrm>
-            <a:off x="3328416" y="2468880"/>
-            <a:ext cx="1737360" cy="164592"/>
+            <a:off x="3291840" y="2468880"/>
+            <a:ext cx="1819656" cy="182880"/>
           </a:xfrm>
           <a:prstGeom prst="rect">
             <a:avLst/>
@@ -7046,9 +7046,9 @@
               <a:buNone/>
             </a:pPr>
             <a:r>
-              <a:rPr lang="en-US" sz="880" dirty="0">
-                <a:solidFill>
-                  <a:srgbClr val="5E7680"/>
+              <a:rPr lang="en-US" sz="940" dirty="0">
+                <a:solidFill>
+                  <a:srgbClr val="334E57"/>
                 </a:solidFill>
                 <a:latin typeface="Calibri" pitchFamily="34" charset="0"/>
                 <a:ea typeface="Calibri" pitchFamily="34" charset="-122"/>
@@ -7056,7 +7056,7 @@
               </a:rPr>
               <a:t>Vite / TS / Ant Design Vue</a:t>
             </a:r>
-            <a:endParaRPr lang="en-US" sz="880" dirty="0"/>
+            <a:endParaRPr lang="en-US" sz="940" dirty="0"/>
           </a:p>
         </p:txBody>
       </p:sp>
@@ -7088,7 +7088,7 @@
           <a:effectLst>
             <a:outerShdw sx="100000" sy="100000" kx="0" ky="0" algn="bl" rotWithShape="0" blurRad="63500" dist="25400" dir="2700000">
               <a:srgbClr val="000000">
-                <a:alpha val="12000"/>
+                <a:alpha val="10000"/>
               </a:srgbClr>
             </a:outerShdw>
           </a:effectLst>
@@ -7143,8 +7143,8 @@
         </p:nvSpPr>
         <p:spPr>
           <a:xfrm>
-            <a:off x="5705856" y="2203704"/>
-            <a:ext cx="1737360" cy="182880"/>
+            <a:off x="5669280" y="2203704"/>
+            <a:ext cx="1819656" cy="182880"/>
           </a:xfrm>
           <a:prstGeom prst="rect">
             <a:avLst/>
@@ -7162,7 +7162,7 @@
               <a:buNone/>
             </a:pPr>
             <a:r>
-              <a:rPr lang="en-US" sz="1100" b="1" dirty="0">
+              <a:rPr lang="en-US" sz="1130" b="1" dirty="0">
                 <a:solidFill>
                   <a:srgbClr val="18323A"/>
                 </a:solidFill>
@@ -7172,7 +7172,7 @@
               </a:rPr>
               <a:t>AI 工作流</a:t>
             </a:r>
-            <a:endParaRPr lang="en-US" sz="1100" dirty="0"/>
+            <a:endParaRPr lang="en-US" sz="1130" dirty="0"/>
           </a:p>
         </p:txBody>
       </p:sp>
@@ -7184,8 +7184,8 @@
         </p:nvSpPr>
         <p:spPr>
           <a:xfrm>
-            <a:off x="5705856" y="2468880"/>
-            <a:ext cx="1737360" cy="164592"/>
+            <a:off x="5669280" y="2468880"/>
+            <a:ext cx="1819656" cy="182880"/>
           </a:xfrm>
           <a:prstGeom prst="rect">
             <a:avLst/>
@@ -7203,9 +7203,9 @@
               <a:buNone/>
             </a:pPr>
             <a:r>
-              <a:rPr lang="en-US" sz="880" dirty="0">
-                <a:solidFill>
-                  <a:srgbClr val="5E7680"/>
+              <a:rPr lang="en-US" sz="940" dirty="0">
+                <a:solidFill>
+                  <a:srgbClr val="334E57"/>
                 </a:solidFill>
                 <a:latin typeface="Calibri" pitchFamily="34" charset="0"/>
                 <a:ea typeface="Calibri" pitchFamily="34" charset="-122"/>
@@ -7213,7 +7213,7 @@
               </a:rPr>
               <a:t>路由 / 质检 / 构建</a:t>
             </a:r>
-            <a:endParaRPr lang="en-US" sz="880" dirty="0"/>
+            <a:endParaRPr lang="en-US" sz="940" dirty="0"/>
           </a:p>
         </p:txBody>
       </p:sp>
@@ -7245,7 +7245,7 @@
           <a:effectLst>
             <a:outerShdw sx="100000" sy="100000" kx="0" ky="0" algn="bl" rotWithShape="0" blurRad="63500" dist="25400" dir="2700000">
               <a:srgbClr val="000000">
-                <a:alpha val="12000"/>
+                <a:alpha val="10000"/>
               </a:srgbClr>
             </a:outerShdw>
           </a:effectLst>
@@ -7300,8 +7300,8 @@
         </p:nvSpPr>
         <p:spPr>
           <a:xfrm>
-            <a:off x="8083296" y="2203704"/>
-            <a:ext cx="1737360" cy="182880"/>
+            <a:off x="8046720" y="2203704"/>
+            <a:ext cx="1819656" cy="182880"/>
           </a:xfrm>
           <a:prstGeom prst="rect">
             <a:avLst/>
@@ -7319,7 +7319,7 @@
               <a:buNone/>
             </a:pPr>
             <a:r>
-              <a:rPr lang="en-US" sz="1100" b="1" dirty="0">
+              <a:rPr lang="en-US" sz="1130" b="1" dirty="0">
                 <a:solidFill>
                   <a:srgbClr val="18323A"/>
                 </a:solidFill>
@@ -7329,7 +7329,7 @@
               </a:rPr>
               <a:t>监控指标</a:t>
             </a:r>
-            <a:endParaRPr lang="en-US" sz="1100" dirty="0"/>
+            <a:endParaRPr lang="en-US" sz="1130" dirty="0"/>
           </a:p>
         </p:txBody>
       </p:sp>
@@ -7341,8 +7341,8 @@
         </p:nvSpPr>
         <p:spPr>
           <a:xfrm>
-            <a:off x="8083296" y="2468880"/>
-            <a:ext cx="1737360" cy="164592"/>
+            <a:off x="8046720" y="2468880"/>
+            <a:ext cx="1819656" cy="182880"/>
           </a:xfrm>
           <a:prstGeom prst="rect">
             <a:avLst/>
@@ -7360,9 +7360,9 @@
               <a:buNone/>
             </a:pPr>
             <a:r>
-              <a:rPr lang="en-US" sz="880" dirty="0">
-                <a:solidFill>
-                  <a:srgbClr val="5E7680"/>
+              <a:rPr lang="en-US" sz="940" dirty="0">
+                <a:solidFill>
+                  <a:srgbClr val="334E57"/>
                 </a:solidFill>
                 <a:latin typeface="Calibri" pitchFamily="34" charset="0"/>
                 <a:ea typeface="Calibri" pitchFamily="34" charset="-122"/>
@@ -7370,7 +7370,7 @@
               </a:rPr>
               <a:t>Actuator scrape 配置</a:t>
             </a:r>
-            <a:endParaRPr lang="en-US" sz="880" dirty="0"/>
+            <a:endParaRPr lang="en-US" sz="940" dirty="0"/>
           </a:p>
         </p:txBody>
       </p:sp>
@@ -7402,7 +7402,7 @@
           <a:effectLst>
             <a:outerShdw sx="100000" sy="100000" kx="0" ky="0" algn="bl" rotWithShape="0" blurRad="63500" dist="25400" dir="2700000">
               <a:srgbClr val="000000">
-                <a:alpha val="12000"/>
+                <a:alpha val="10000"/>
               </a:srgbClr>
             </a:outerShdw>
           </a:effectLst>
@@ -7485,7 +7485,7 @@
               <a:buNone/>
             </a:pPr>
             <a:r>
-              <a:rPr lang="en-US" sz="850" b="1" dirty="0">
+              <a:rPr lang="en-US" sz="880" b="1" dirty="0">
                 <a:solidFill>
                   <a:srgbClr val="FFFFFF"/>
                 </a:solidFill>
@@ -7495,7 +7495,7 @@
               </a:rPr>
               <a:t>P</a:t>
             </a:r>
-            <a:endParaRPr lang="en-US" sz="850" dirty="0"/>
+            <a:endParaRPr lang="en-US" sz="880" dirty="0"/>
           </a:p>
         </p:txBody>
       </p:sp>
@@ -7526,7 +7526,7 @@
               <a:buNone/>
             </a:pPr>
             <a:r>
-              <a:rPr lang="en-US" sz="1500" b="1" dirty="0">
+              <a:rPr lang="en-US" sz="1540" b="1" dirty="0">
                 <a:solidFill>
                   <a:srgbClr val="18323A"/>
                 </a:solidFill>
@@ -7536,7 +7536,7 @@
               </a:rPr>
               <a:t>产品定位</a:t>
             </a:r>
-            <a:endParaRPr lang="en-US" sz="1500" dirty="0"/>
+            <a:endParaRPr lang="en-US" sz="1540" dirty="0"/>
           </a:p>
         </p:txBody>
       </p:sp>
@@ -7549,7 +7549,7 @@
         <p:spPr>
           <a:xfrm>
             <a:off x="1536192" y="3867912"/>
-            <a:ext cx="4023360" cy="1216152"/>
+            <a:ext cx="4023360" cy="1252728"/>
           </a:xfrm>
           <a:prstGeom prst="rect">
             <a:avLst/>
@@ -7567,17 +7567,17 @@
               <a:buNone/>
             </a:pPr>
             <a:r>
-              <a:rPr lang="en-US" sz="1170" dirty="0">
-                <a:solidFill>
-                  <a:srgbClr val="5E7680"/>
+              <a:rPr lang="en-US" sz="1220" dirty="0">
+                <a:solidFill>
+                  <a:srgbClr val="334E57"/>
                 </a:solidFill>
                 <a:latin typeface="Calibri" pitchFamily="34" charset="0"/>
                 <a:ea typeface="Calibri" pitchFamily="34" charset="-122"/>
                 <a:cs typeface="Calibri" pitchFamily="34" charset="-120"/>
               </a:rPr>
-              <a:t>让用户用自然语言创建网站应用，实时查看 AI 生成过程和应用效果，并支持云端部署、源码下载与精选展示。</a:t>
-            </a:r>
-            <a:endParaRPr lang="en-US" sz="1170" dirty="0"/>
+              <a:t>用户用自然语言创建网站应用，实时查看 AI 生成过程，并支持部署、源码下载与精选展示。</a:t>
+            </a:r>
+            <a:endParaRPr lang="en-US" sz="1220" dirty="0"/>
           </a:p>
         </p:txBody>
       </p:sp>
@@ -7609,7 +7609,7 @@
           <a:effectLst>
             <a:outerShdw sx="100000" sy="100000" kx="0" ky="0" algn="bl" rotWithShape="0" blurRad="63500" dist="25400" dir="2700000">
               <a:srgbClr val="000000">
-                <a:alpha val="12000"/>
+                <a:alpha val="10000"/>
               </a:srgbClr>
             </a:outerShdw>
           </a:effectLst>
@@ -7692,7 +7692,7 @@
               <a:buNone/>
             </a:pPr>
             <a:r>
-              <a:rPr lang="en-US" sz="850" b="1" dirty="0">
+              <a:rPr lang="en-US" sz="880" b="1" dirty="0">
                 <a:solidFill>
                   <a:srgbClr val="FFFFFF"/>
                 </a:solidFill>
@@ -7702,7 +7702,7 @@
               </a:rPr>
               <a:t>E</a:t>
             </a:r>
-            <a:endParaRPr lang="en-US" sz="850" dirty="0"/>
+            <a:endParaRPr lang="en-US" sz="880" dirty="0"/>
           </a:p>
         </p:txBody>
       </p:sp>
@@ -7733,7 +7733,7 @@
               <a:buNone/>
             </a:pPr>
             <a:r>
-              <a:rPr lang="en-US" sz="1500" b="1" dirty="0">
+              <a:rPr lang="en-US" sz="1540" b="1" dirty="0">
                 <a:solidFill>
                   <a:srgbClr val="18323A"/>
                 </a:solidFill>
@@ -7743,7 +7743,7 @@
               </a:rPr>
               <a:t>工程定位</a:t>
             </a:r>
-            <a:endParaRPr lang="en-US" sz="1500" dirty="0"/>
+            <a:endParaRPr lang="en-US" sz="1540" dirty="0"/>
           </a:p>
         </p:txBody>
       </p:sp>
@@ -7756,7 +7756,7 @@
         <p:spPr>
           <a:xfrm>
             <a:off x="6931152" y="3867912"/>
-            <a:ext cx="4023360" cy="1216152"/>
+            <a:ext cx="4023360" cy="1252728"/>
           </a:xfrm>
           <a:prstGeom prst="rect">
             <a:avLst/>
@@ -7774,17 +7774,17 @@
               <a:buNone/>
             </a:pPr>
             <a:r>
-              <a:rPr lang="en-US" sz="1170" dirty="0">
-                <a:solidFill>
-                  <a:srgbClr val="5E7680"/>
+              <a:rPr lang="en-US" sz="1220" dirty="0">
+                <a:solidFill>
+                  <a:srgbClr val="334E57"/>
                 </a:solidFill>
                 <a:latin typeface="Calibri" pitchFamily="34" charset="0"/>
                 <a:ea typeface="Calibri" pitchFamily="34" charset="-122"/>
                 <a:cs typeface="Calibri" pitchFamily="34" charset="-120"/>
               </a:rPr>
-              <a:t>仓库同时保留单体应用与微服务改造版本，方便教学演进和架构对比；前端独立维护用户/管理员页面。</a:t>
-            </a:r>
-            <a:endParaRPr lang="en-US" sz="1170" dirty="0"/>
+              <a:t>仓库保留单体应用与微服务改造版本，便于教学演进和架构对比；前端独立维护。</a:t>
+            </a:r>
+            <a:endParaRPr lang="en-US" sz="1220" dirty="0"/>
           </a:p>
         </p:txBody>
       </p:sp>
@@ -7878,8 +7878,8 @@
         </p:nvSpPr>
         <p:spPr>
           <a:xfrm>
-            <a:off x="10835640" y="-274320"/>
-            <a:ext cx="1234440" cy="1234440"/>
+            <a:off x="10927080" y="-237744"/>
+            <a:ext cx="1024128" cy="1024128"/>
           </a:xfrm>
           <a:prstGeom prst="ellipse">
             <a:avLst/>
@@ -7903,8 +7903,8 @@
         </p:nvSpPr>
         <p:spPr>
           <a:xfrm>
-            <a:off x="11356848" y="137160"/>
-            <a:ext cx="475488" cy="475488"/>
+            <a:off x="11384280" y="128016"/>
+            <a:ext cx="393192" cy="393192"/>
           </a:xfrm>
           <a:prstGeom prst="ellipse">
             <a:avLst/>
@@ -7929,7 +7929,7 @@
         <p:spPr>
           <a:xfrm>
             <a:off x="658368" y="384048"/>
-            <a:ext cx="8138160" cy="502920"/>
+            <a:ext cx="8046720" cy="502920"/>
           </a:xfrm>
           <a:prstGeom prst="rect">
             <a:avLst/>
@@ -7970,7 +7970,7 @@
         <p:spPr>
           <a:xfrm>
             <a:off x="685800" y="932688"/>
-            <a:ext cx="7863840" cy="256032"/>
+            <a:ext cx="7726680" cy="256032"/>
           </a:xfrm>
           <a:prstGeom prst="rect">
             <a:avLst/>
@@ -7988,17 +7988,17 @@
               <a:buNone/>
             </a:pPr>
             <a:r>
-              <a:rPr lang="en-US" sz="1050" dirty="0">
-                <a:solidFill>
-                  <a:srgbClr val="5E7680"/>
+              <a:rPr lang="en-US" sz="1100" dirty="0">
+                <a:solidFill>
+                  <a:srgbClr val="334E57"/>
                 </a:solidFill>
                 <a:latin typeface="Calibri" pitchFamily="34" charset="0"/>
                 <a:ea typeface="Calibri" pitchFamily="34" charset="-122"/>
                 <a:cs typeface="Calibri" pitchFamily="34" charset="-120"/>
               </a:rPr>
-              <a:t>当前仓库由根后端、微服务目录、前端子项目、SQL 与监控配置共同组成。</a:t>
-            </a:r>
-            <a:endParaRPr lang="en-US" sz="1050" dirty="0"/>
+              <a:t>根后端、微服务目录、前端子项目、SQL 与监控配置共同组成当前仓库。</a:t>
+            </a:r>
+            <a:endParaRPr lang="en-US" sz="1100" dirty="0"/>
           </a:p>
         </p:txBody>
       </p:sp>
@@ -8076,7 +8076,7 @@
         </p:nvSpPr>
         <p:spPr>
           <a:xfrm>
-            <a:off x="658368" y="6419088"/>
+            <a:off x="658368" y="6291072"/>
             <a:ext cx="4389120" cy="201168"/>
           </a:xfrm>
           <a:prstGeom prst="rect">
@@ -8093,9 +8093,9 @@
               <a:buNone/>
             </a:pPr>
             <a:r>
-              <a:rPr lang="en-US" sz="850" dirty="0">
-                <a:solidFill>
-                  <a:srgbClr val="5E7680"/>
+              <a:rPr lang="en-US" sz="880" dirty="0">
+                <a:solidFill>
+                  <a:srgbClr val="334E57"/>
                 </a:solidFill>
                 <a:latin typeface="Calibri" pitchFamily="34" charset="0"/>
                 <a:ea typeface="Calibri" pitchFamily="34" charset="-122"/>
@@ -8103,7 +8103,7 @@
               </a:rPr>
               <a:t>yu-ai-code-mother · 2026-06-14 · 2</a:t>
             </a:r>
-            <a:endParaRPr lang="en-US" sz="850" dirty="0"/>
+            <a:endParaRPr lang="en-US" sz="880" dirty="0"/>
           </a:p>
         </p:txBody>
       </p:sp>
@@ -8115,7 +8115,7 @@
         </p:nvSpPr>
         <p:spPr>
           <a:xfrm>
-            <a:off x="11109960" y="6446520"/>
+            <a:off x="11109960" y="6318504"/>
             <a:ext cx="402336" cy="73152"/>
           </a:xfrm>
           <a:prstGeom prst="rect">
@@ -8140,7 +8140,7 @@
         </p:nvSpPr>
         <p:spPr>
           <a:xfrm>
-            <a:off x="11558016" y="6446520"/>
+            <a:off x="11558016" y="6318504"/>
             <a:ext cx="210312" cy="73152"/>
           </a:xfrm>
           <a:prstGeom prst="rect">
@@ -8185,7 +8185,7 @@
           <a:effectLst>
             <a:outerShdw sx="100000" sy="100000" kx="0" ky="0" algn="bl" rotWithShape="0" blurRad="63500" dist="25400" dir="2700000">
               <a:srgbClr val="000000">
-                <a:alpha val="12000"/>
+                <a:alpha val="10000"/>
               </a:srgbClr>
             </a:outerShdw>
           </a:effectLst>
@@ -8268,7 +8268,7 @@
               <a:buNone/>
             </a:pPr>
             <a:r>
-              <a:rPr lang="en-US" sz="850" b="1" dirty="0">
+              <a:rPr lang="en-US" sz="880" b="1" dirty="0">
                 <a:solidFill>
                   <a:srgbClr val="FFFFFF"/>
                 </a:solidFill>
@@ -8278,7 +8278,7 @@
               </a:rPr>
               <a:t>1</a:t>
             </a:r>
-            <a:endParaRPr lang="en-US" sz="850" dirty="0"/>
+            <a:endParaRPr lang="en-US" sz="880" dirty="0"/>
           </a:p>
         </p:txBody>
       </p:sp>
@@ -8309,7 +8309,7 @@
               <a:buNone/>
             </a:pPr>
             <a:r>
-              <a:rPr lang="en-US" sz="1500" b="1" dirty="0">
+              <a:rPr lang="en-US" sz="1540" b="1" dirty="0">
                 <a:solidFill>
                   <a:srgbClr val="18323A"/>
                 </a:solidFill>
@@ -8319,7 +8319,7 @@
               </a:rPr>
               <a:t>单体后端</a:t>
             </a:r>
-            <a:endParaRPr lang="en-US" sz="1500" dirty="0"/>
+            <a:endParaRPr lang="en-US" sz="1540" dirty="0"/>
           </a:p>
         </p:txBody>
       </p:sp>
@@ -8332,7 +8332,7 @@
         <p:spPr>
           <a:xfrm>
             <a:off x="1536192" y="2130552"/>
-            <a:ext cx="3931920" cy="941832"/>
+            <a:ext cx="3931920" cy="978408"/>
           </a:xfrm>
           <a:prstGeom prst="rect">
             <a:avLst/>
@@ -8350,9 +8350,9 @@
               <a:buNone/>
             </a:pPr>
             <a:r>
-              <a:rPr lang="en-US" sz="1170" dirty="0">
-                <a:solidFill>
-                  <a:srgbClr val="5E7680"/>
+              <a:rPr lang="en-US" sz="1220" dirty="0">
+                <a:solidFill>
+                  <a:srgbClr val="334E57"/>
                 </a:solidFill>
                 <a:latin typeface="Calibri" pitchFamily="34" charset="0"/>
                 <a:ea typeface="Calibri" pitchFamily="34" charset="-122"/>
@@ -8360,16 +8360,16 @@
               </a:rPr>
               <a:t>src/main/java</a:t>
             </a:r>
-            <a:endParaRPr lang="en-US" sz="1170" dirty="0"/>
+            <a:endParaRPr lang="en-US" sz="1220" dirty="0"/>
           </a:p>
           <a:p>
             <a:pPr indent="0" marL="0">
               <a:buNone/>
             </a:pPr>
             <a:r>
-              <a:rPr lang="en-US" sz="1170" dirty="0">
-                <a:solidFill>
-                  <a:srgbClr val="5E7680"/>
+              <a:rPr lang="en-US" sz="1220" dirty="0">
+                <a:solidFill>
+                  <a:srgbClr val="334E57"/>
                 </a:solidFill>
                 <a:latin typeface="Calibri" pitchFamily="34" charset="0"/>
                 <a:ea typeface="Calibri" pitchFamily="34" charset="-122"/>
@@ -8377,7 +8377,7 @@
               </a:rPr>
               <a:t>应用、用户、聊天历史、静态资源、AI 生成、限流、监控</a:t>
             </a:r>
-            <a:endParaRPr lang="en-US" sz="1170" dirty="0"/>
+            <a:endParaRPr lang="en-US" sz="1220" dirty="0"/>
           </a:p>
         </p:txBody>
       </p:sp>
@@ -8409,7 +8409,7 @@
           <a:effectLst>
             <a:outerShdw sx="100000" sy="100000" kx="0" ky="0" algn="bl" rotWithShape="0" blurRad="63500" dist="25400" dir="2700000">
               <a:srgbClr val="000000">
-                <a:alpha val="12000"/>
+                <a:alpha val="10000"/>
               </a:srgbClr>
             </a:outerShdw>
           </a:effectLst>
@@ -8492,7 +8492,7 @@
               <a:buNone/>
             </a:pPr>
             <a:r>
-              <a:rPr lang="en-US" sz="850" b="1" dirty="0">
+              <a:rPr lang="en-US" sz="880" b="1" dirty="0">
                 <a:solidFill>
                   <a:srgbClr val="FFFFFF"/>
                 </a:solidFill>
@@ -8502,7 +8502,7 @@
               </a:rPr>
               <a:t>2</a:t>
             </a:r>
-            <a:endParaRPr lang="en-US" sz="850" dirty="0"/>
+            <a:endParaRPr lang="en-US" sz="880" dirty="0"/>
           </a:p>
         </p:txBody>
       </p:sp>
@@ -8533,7 +8533,7 @@
               <a:buNone/>
             </a:pPr>
             <a:r>
-              <a:rPr lang="en-US" sz="1500" b="1" dirty="0">
+              <a:rPr lang="en-US" sz="1540" b="1" dirty="0">
                 <a:solidFill>
                   <a:srgbClr val="18323A"/>
                 </a:solidFill>
@@ -8543,7 +8543,7 @@
               </a:rPr>
               <a:t>微服务改造</a:t>
             </a:r>
-            <a:endParaRPr lang="en-US" sz="1500" dirty="0"/>
+            <a:endParaRPr lang="en-US" sz="1540" dirty="0"/>
           </a:p>
         </p:txBody>
       </p:sp>
@@ -8556,7 +8556,7 @@
         <p:spPr>
           <a:xfrm>
             <a:off x="6958584" y="2130552"/>
-            <a:ext cx="3931920" cy="941832"/>
+            <a:ext cx="3931920" cy="978408"/>
           </a:xfrm>
           <a:prstGeom prst="rect">
             <a:avLst/>
@@ -8574,26 +8574,26 @@
               <a:buNone/>
             </a:pPr>
             <a:r>
-              <a:rPr lang="en-US" sz="1170" dirty="0">
-                <a:solidFill>
-                  <a:srgbClr val="5E7680"/>
+              <a:rPr lang="en-US" sz="1220" dirty="0">
+                <a:solidFill>
+                  <a:srgbClr val="334E57"/>
                 </a:solidFill>
                 <a:latin typeface="Calibri" pitchFamily="34" charset="0"/>
                 <a:ea typeface="Calibri" pitchFamily="34" charset="-122"/>
                 <a:cs typeface="Calibri" pitchFamily="34" charset="-120"/>
               </a:rPr>
-              <a:t>yu-ai-code-mother-microservice</a:t>
-            </a:r>
-            <a:endParaRPr lang="en-US" sz="1170" dirty="0"/>
+              <a:t>microservice</a:t>
+            </a:r>
+            <a:endParaRPr lang="en-US" sz="1220" dirty="0"/>
           </a:p>
           <a:p>
             <a:pPr indent="0" marL="0">
               <a:buNone/>
             </a:pPr>
             <a:r>
-              <a:rPr lang="en-US" sz="1170" dirty="0">
-                <a:solidFill>
-                  <a:srgbClr val="5E7680"/>
+              <a:rPr lang="en-US" sz="1220" dirty="0">
+                <a:solidFill>
+                  <a:srgbClr val="334E57"/>
                 </a:solidFill>
                 <a:latin typeface="Calibri" pitchFamily="34" charset="0"/>
                 <a:ea typeface="Calibri" pitchFamily="34" charset="-122"/>
@@ -8601,7 +8601,7 @@
               </a:rPr>
               <a:t>common / model / client / user / app / ai / screenshot</a:t>
             </a:r>
-            <a:endParaRPr lang="en-US" sz="1170" dirty="0"/>
+            <a:endParaRPr lang="en-US" sz="1220" dirty="0"/>
           </a:p>
         </p:txBody>
       </p:sp>
@@ -8633,7 +8633,7 @@
           <a:effectLst>
             <a:outerShdw sx="100000" sy="100000" kx="0" ky="0" algn="bl" rotWithShape="0" blurRad="63500" dist="25400" dir="2700000">
               <a:srgbClr val="000000">
-                <a:alpha val="12000"/>
+                <a:alpha val="10000"/>
               </a:srgbClr>
             </a:outerShdw>
           </a:effectLst>
@@ -8716,7 +8716,7 @@
               <a:buNone/>
             </a:pPr>
             <a:r>
-              <a:rPr lang="en-US" sz="850" b="1" dirty="0">
+              <a:rPr lang="en-US" sz="880" b="1" dirty="0">
                 <a:solidFill>
                   <a:srgbClr val="FFFFFF"/>
                 </a:solidFill>
@@ -8726,7 +8726,7 @@
               </a:rPr>
               <a:t>3</a:t>
             </a:r>
-            <a:endParaRPr lang="en-US" sz="850" dirty="0"/>
+            <a:endParaRPr lang="en-US" sz="880" dirty="0"/>
           </a:p>
         </p:txBody>
       </p:sp>
@@ -8757,7 +8757,7 @@
               <a:buNone/>
             </a:pPr>
             <a:r>
-              <a:rPr lang="en-US" sz="1500" b="1" dirty="0">
+              <a:rPr lang="en-US" sz="1540" b="1" dirty="0">
                 <a:solidFill>
                   <a:srgbClr val="18323A"/>
                 </a:solidFill>
@@ -8767,7 +8767,7 @@
               </a:rPr>
               <a:t>前端工程</a:t>
             </a:r>
-            <a:endParaRPr lang="en-US" sz="1500" dirty="0"/>
+            <a:endParaRPr lang="en-US" sz="1540" dirty="0"/>
           </a:p>
         </p:txBody>
       </p:sp>
@@ -8780,7 +8780,7 @@
         <p:spPr>
           <a:xfrm>
             <a:off x="1536192" y="4443984"/>
-            <a:ext cx="3931920" cy="941832"/>
+            <a:ext cx="3931920" cy="978408"/>
           </a:xfrm>
           <a:prstGeom prst="rect">
             <a:avLst/>
@@ -8798,26 +8798,26 @@
               <a:buNone/>
             </a:pPr>
             <a:r>
-              <a:rPr lang="en-US" sz="1170" dirty="0">
-                <a:solidFill>
-                  <a:srgbClr val="5E7680"/>
+              <a:rPr lang="en-US" sz="1220" dirty="0">
+                <a:solidFill>
+                  <a:srgbClr val="334E57"/>
                 </a:solidFill>
                 <a:latin typeface="Calibri" pitchFamily="34" charset="0"/>
                 <a:ea typeface="Calibri" pitchFamily="34" charset="-122"/>
                 <a:cs typeface="Calibri" pitchFamily="34" charset="-120"/>
               </a:rPr>
-              <a:t>yu-ai-code-mother-frontend</a:t>
-            </a:r>
-            <a:endParaRPr lang="en-US" sz="1170" dirty="0"/>
+              <a:t>frontend</a:t>
+            </a:r>
+            <a:endParaRPr lang="en-US" sz="1220" dirty="0"/>
           </a:p>
           <a:p>
             <a:pPr indent="0" marL="0">
               <a:buNone/>
             </a:pPr>
             <a:r>
-              <a:rPr lang="en-US" sz="1170" dirty="0">
-                <a:solidFill>
-                  <a:srgbClr val="5E7680"/>
+              <a:rPr lang="en-US" sz="1220" dirty="0">
+                <a:solidFill>
+                  <a:srgbClr val="334E57"/>
                 </a:solidFill>
                 <a:latin typeface="Calibri" pitchFamily="34" charset="0"/>
                 <a:ea typeface="Calibri" pitchFamily="34" charset="-122"/>
@@ -8825,7 +8825,7 @@
               </a:rPr>
               <a:t>主页、对话页、应用编辑、应用管理、用户登录注册</a:t>
             </a:r>
-            <a:endParaRPr lang="en-US" sz="1170" dirty="0"/>
+            <a:endParaRPr lang="en-US" sz="1220" dirty="0"/>
           </a:p>
         </p:txBody>
       </p:sp>
@@ -8857,7 +8857,7 @@
           <a:effectLst>
             <a:outerShdw sx="100000" sy="100000" kx="0" ky="0" algn="bl" rotWithShape="0" blurRad="63500" dist="25400" dir="2700000">
               <a:srgbClr val="000000">
-                <a:alpha val="12000"/>
+                <a:alpha val="10000"/>
               </a:srgbClr>
             </a:outerShdw>
           </a:effectLst>
@@ -8940,7 +8940,7 @@
               <a:buNone/>
             </a:pPr>
             <a:r>
-              <a:rPr lang="en-US" sz="850" b="1" dirty="0">
+              <a:rPr lang="en-US" sz="880" b="1" dirty="0">
                 <a:solidFill>
                   <a:srgbClr val="FFFFFF"/>
                 </a:solidFill>
@@ -8950,7 +8950,7 @@
               </a:rPr>
               <a:t>4</a:t>
             </a:r>
-            <a:endParaRPr lang="en-US" sz="850" dirty="0"/>
+            <a:endParaRPr lang="en-US" sz="880" dirty="0"/>
           </a:p>
         </p:txBody>
       </p:sp>
@@ -8981,7 +8981,7 @@
               <a:buNone/>
             </a:pPr>
             <a:r>
-              <a:rPr lang="en-US" sz="1500" b="1" dirty="0">
+              <a:rPr lang="en-US" sz="1540" b="1" dirty="0">
                 <a:solidFill>
                   <a:srgbClr val="18323A"/>
                 </a:solidFill>
@@ -8991,7 +8991,7 @@
               </a:rPr>
               <a:t>数据与监控</a:t>
             </a:r>
-            <a:endParaRPr lang="en-US" sz="1500" dirty="0"/>
+            <a:endParaRPr lang="en-US" sz="1540" dirty="0"/>
           </a:p>
         </p:txBody>
       </p:sp>
@@ -9004,7 +9004,7 @@
         <p:spPr>
           <a:xfrm>
             <a:off x="6958584" y="4443984"/>
-            <a:ext cx="3931920" cy="941832"/>
+            <a:ext cx="3931920" cy="978408"/>
           </a:xfrm>
           <a:prstGeom prst="rect">
             <a:avLst/>
@@ -9022,26 +9022,26 @@
               <a:buNone/>
             </a:pPr>
             <a:r>
-              <a:rPr lang="en-US" sz="1170" dirty="0">
-                <a:solidFill>
-                  <a:srgbClr val="5E7680"/>
+              <a:rPr lang="en-US" sz="1220" dirty="0">
+                <a:solidFill>
+                  <a:srgbClr val="334E57"/>
                 </a:solidFill>
                 <a:latin typeface="Calibri" pitchFamily="34" charset="0"/>
                 <a:ea typeface="Calibri" pitchFamily="34" charset="-122"/>
                 <a:cs typeface="Calibri" pitchFamily="34" charset="-120"/>
               </a:rPr>
-              <a:t>sql / prometheus.yml / grafana</a:t>
-            </a:r>
-            <a:endParaRPr lang="en-US" sz="1170" dirty="0"/>
+              <a:t>sql / prometheus / grafana</a:t>
+            </a:r>
+            <a:endParaRPr lang="en-US" sz="1220" dirty="0"/>
           </a:p>
           <a:p>
             <a:pPr indent="0" marL="0">
               <a:buNone/>
             </a:pPr>
             <a:r>
-              <a:rPr lang="en-US" sz="1170" dirty="0">
-                <a:solidFill>
-                  <a:srgbClr val="5E7680"/>
+              <a:rPr lang="en-US" sz="1220" dirty="0">
+                <a:solidFill>
+                  <a:srgbClr val="334E57"/>
                 </a:solidFill>
                 <a:latin typeface="Calibri" pitchFamily="34" charset="0"/>
                 <a:ea typeface="Calibri" pitchFamily="34" charset="-122"/>
@@ -9049,7 +9049,7 @@
               </a:rPr>
               <a:t>数据库初始化、Prometheus 抓取、Grafana 资产目录</a:t>
             </a:r>
-            <a:endParaRPr lang="en-US" sz="1170" dirty="0"/>
+            <a:endParaRPr lang="en-US" sz="1220" dirty="0"/>
           </a:p>
         </p:txBody>
       </p:sp>
@@ -9061,8 +9061,8 @@
         </p:nvSpPr>
         <p:spPr>
           <a:xfrm>
-            <a:off x="5440680" y="2148840"/>
-            <a:ext cx="658368" cy="384048"/>
+            <a:off x="5468112" y="2148840"/>
+            <a:ext cx="502920" cy="329184"/>
           </a:xfrm>
           <a:prstGeom prst="chevron">
             <a:avLst/>
@@ -9086,8 +9086,8 @@
         </p:nvSpPr>
         <p:spPr>
           <a:xfrm>
-            <a:off x="5440680" y="4480560"/>
-            <a:ext cx="658368" cy="384048"/>
+            <a:off x="5468112" y="4480560"/>
+            <a:ext cx="502920" cy="329184"/>
           </a:xfrm>
           <a:prstGeom prst="chevron">
             <a:avLst/>
@@ -9193,8 +9193,8 @@
         </p:nvSpPr>
         <p:spPr>
           <a:xfrm>
-            <a:off x="10835640" y="-274320"/>
-            <a:ext cx="1234440" cy="1234440"/>
+            <a:off x="10927080" y="-237744"/>
+            <a:ext cx="1024128" cy="1024128"/>
           </a:xfrm>
           <a:prstGeom prst="ellipse">
             <a:avLst/>
@@ -9218,8 +9218,8 @@
         </p:nvSpPr>
         <p:spPr>
           <a:xfrm>
-            <a:off x="11356848" y="137160"/>
-            <a:ext cx="475488" cy="475488"/>
+            <a:off x="11384280" y="128016"/>
+            <a:ext cx="393192" cy="393192"/>
           </a:xfrm>
           <a:prstGeom prst="ellipse">
             <a:avLst/>
@@ -9244,7 +9244,7 @@
         <p:spPr>
           <a:xfrm>
             <a:off x="658368" y="384048"/>
-            <a:ext cx="8138160" cy="502920"/>
+            <a:ext cx="8046720" cy="502920"/>
           </a:xfrm>
           <a:prstGeom prst="rect">
             <a:avLst/>
@@ -9285,7 +9285,7 @@
         <p:spPr>
           <a:xfrm>
             <a:off x="685800" y="932688"/>
-            <a:ext cx="7863840" cy="256032"/>
+            <a:ext cx="7726680" cy="256032"/>
           </a:xfrm>
           <a:prstGeom prst="rect">
             <a:avLst/>
@@ -9303,9 +9303,9 @@
               <a:buNone/>
             </a:pPr>
             <a:r>
-              <a:rPr lang="en-US" sz="1050" dirty="0">
-                <a:solidFill>
-                  <a:srgbClr val="5E7680"/>
+              <a:rPr lang="en-US" sz="1100" dirty="0">
+                <a:solidFill>
+                  <a:srgbClr val="334E57"/>
                 </a:solidFill>
                 <a:latin typeface="Calibri" pitchFamily="34" charset="0"/>
                 <a:ea typeface="Calibri" pitchFamily="34" charset="-122"/>
@@ -9313,7 +9313,7 @@
               </a:rPr>
               <a:t>按 README、接口与前端页面归纳的已具备能力。</a:t>
             </a:r>
-            <a:endParaRPr lang="en-US" sz="1050" dirty="0"/>
+            <a:endParaRPr lang="en-US" sz="1100" dirty="0"/>
           </a:p>
         </p:txBody>
       </p:sp>
@@ -9391,7 +9391,7 @@
         </p:nvSpPr>
         <p:spPr>
           <a:xfrm>
-            <a:off x="658368" y="6419088"/>
+            <a:off x="658368" y="6291072"/>
             <a:ext cx="4389120" cy="201168"/>
           </a:xfrm>
           <a:prstGeom prst="rect">
@@ -9408,9 +9408,9 @@
               <a:buNone/>
             </a:pPr>
             <a:r>
-              <a:rPr lang="en-US" sz="850" dirty="0">
-                <a:solidFill>
-                  <a:srgbClr val="5E7680"/>
+              <a:rPr lang="en-US" sz="880" dirty="0">
+                <a:solidFill>
+                  <a:srgbClr val="334E57"/>
                 </a:solidFill>
                 <a:latin typeface="Calibri" pitchFamily="34" charset="0"/>
                 <a:ea typeface="Calibri" pitchFamily="34" charset="-122"/>
@@ -9418,7 +9418,7 @@
               </a:rPr>
               <a:t>yu-ai-code-mother · 2026-06-14 · 3</a:t>
             </a:r>
-            <a:endParaRPr lang="en-US" sz="850" dirty="0"/>
+            <a:endParaRPr lang="en-US" sz="880" dirty="0"/>
           </a:p>
         </p:txBody>
       </p:sp>
@@ -9430,7 +9430,7 @@
         </p:nvSpPr>
         <p:spPr>
           <a:xfrm>
-            <a:off x="11109960" y="6446520"/>
+            <a:off x="11109960" y="6318504"/>
             <a:ext cx="402336" cy="73152"/>
           </a:xfrm>
           <a:prstGeom prst="rect">
@@ -9455,7 +9455,7 @@
         </p:nvSpPr>
         <p:spPr>
           <a:xfrm>
-            <a:off x="11558016" y="6446520"/>
+            <a:off x="11558016" y="6318504"/>
             <a:ext cx="210312" cy="73152"/>
           </a:xfrm>
           <a:prstGeom prst="rect">
@@ -9500,7 +9500,7 @@
           <a:effectLst>
             <a:outerShdw sx="100000" sy="100000" kx="0" ky="0" algn="bl" rotWithShape="0" blurRad="63500" dist="25400" dir="2700000">
               <a:srgbClr val="000000">
-                <a:alpha val="12000"/>
+                <a:alpha val="10000"/>
               </a:srgbClr>
             </a:outerShdw>
           </a:effectLst>
@@ -9583,7 +9583,7 @@
               <a:buNone/>
             </a:pPr>
             <a:r>
-              <a:rPr lang="en-US" sz="850" b="1" dirty="0">
+              <a:rPr lang="en-US" sz="880" b="1" dirty="0">
                 <a:solidFill>
                   <a:srgbClr val="FFFFFF"/>
                 </a:solidFill>
@@ -9593,7 +9593,7 @@
               </a:rPr>
               <a:t>AI</a:t>
             </a:r>
-            <a:endParaRPr lang="en-US" sz="850" dirty="0"/>
+            <a:endParaRPr lang="en-US" sz="880" dirty="0"/>
           </a:p>
         </p:txBody>
       </p:sp>
@@ -9624,7 +9624,7 @@
               <a:buNone/>
             </a:pPr>
             <a:r>
-              <a:rPr lang="en-US" sz="1500" b="1" dirty="0">
+              <a:rPr lang="en-US" sz="1540" b="1" dirty="0">
                 <a:solidFill>
                   <a:srgbClr val="18323A"/>
                 </a:solidFill>
@@ -9634,7 +9634,7 @@
               </a:rPr>
               <a:t>智能代码生成</a:t>
             </a:r>
-            <a:endParaRPr lang="en-US" sz="1500" dirty="0"/>
+            <a:endParaRPr lang="en-US" sz="1540" dirty="0"/>
           </a:p>
         </p:txBody>
       </p:sp>
@@ -9647,7 +9647,7 @@
         <p:spPr>
           <a:xfrm>
             <a:off x="1536192" y="1947672"/>
-            <a:ext cx="2514600" cy="850392"/>
+            <a:ext cx="2514600" cy="886968"/>
           </a:xfrm>
           <a:prstGeom prst="rect">
             <a:avLst/>
@@ -9665,17 +9665,17 @@
               <a:buNone/>
             </a:pPr>
             <a:r>
-              <a:rPr lang="en-US" sz="1170" dirty="0">
-                <a:solidFill>
-                  <a:srgbClr val="5E7680"/>
+              <a:rPr lang="en-US" sz="1220" dirty="0">
+                <a:solidFill>
+                  <a:srgbClr val="334E57"/>
                 </a:solidFill>
                 <a:latin typeface="Calibri" pitchFamily="34" charset="0"/>
                 <a:ea typeface="Calibri" pitchFamily="34" charset="-122"/>
                 <a:cs typeface="Calibri" pitchFamily="34" charset="-120"/>
               </a:rPr>
-              <a:t>支持 HTML、多文件和 Vue 项目生成；SSE/Flux 流式输出让用户看到生成过程。</a:t>
-            </a:r>
-            <a:endParaRPr lang="en-US" sz="1170" dirty="0"/>
+              <a:t>支持 HTML、多文件和 Vue 项目生成；SSE/Flux 流式输出生成过程。</a:t>
+            </a:r>
+            <a:endParaRPr lang="en-US" sz="1220" dirty="0"/>
           </a:p>
         </p:txBody>
       </p:sp>
@@ -9707,7 +9707,7 @@
           <a:effectLst>
             <a:outerShdw sx="100000" sy="100000" kx="0" ky="0" algn="bl" rotWithShape="0" blurRad="63500" dist="25400" dir="2700000">
               <a:srgbClr val="000000">
-                <a:alpha val="12000"/>
+                <a:alpha val="10000"/>
               </a:srgbClr>
             </a:outerShdw>
           </a:effectLst>
@@ -9790,7 +9790,7 @@
               <a:buNone/>
             </a:pPr>
             <a:r>
-              <a:rPr lang="en-US" sz="850" b="1" dirty="0">
+              <a:rPr lang="en-US" sz="880" b="1" dirty="0">
                 <a:solidFill>
                   <a:srgbClr val="FFFFFF"/>
                 </a:solidFill>
@@ -9800,7 +9800,7 @@
               </a:rPr>
               <a:t>UI</a:t>
             </a:r>
-            <a:endParaRPr lang="en-US" sz="850" dirty="0"/>
+            <a:endParaRPr lang="en-US" sz="880" dirty="0"/>
           </a:p>
         </p:txBody>
       </p:sp>
@@ -9831,7 +9831,7 @@
               <a:buNone/>
             </a:pPr>
             <a:r>
-              <a:rPr lang="en-US" sz="1500" b="1" dirty="0">
+              <a:rPr lang="en-US" sz="1540" b="1" dirty="0">
                 <a:solidFill>
                   <a:srgbClr val="18323A"/>
                 </a:solidFill>
@@ -9841,7 +9841,7 @@
               </a:rPr>
               <a:t>可视化编辑</a:t>
             </a:r>
-            <a:endParaRPr lang="en-US" sz="1500" dirty="0"/>
+            <a:endParaRPr lang="en-US" sz="1540" dirty="0"/>
           </a:p>
         </p:txBody>
       </p:sp>
@@ -9854,7 +9854,7 @@
         <p:spPr>
           <a:xfrm>
             <a:off x="5248656" y="1947672"/>
-            <a:ext cx="2514600" cy="850392"/>
+            <a:ext cx="2514600" cy="886968"/>
           </a:xfrm>
           <a:prstGeom prst="rect">
             <a:avLst/>
@@ -9872,17 +9872,17 @@
               <a:buNone/>
             </a:pPr>
             <a:r>
-              <a:rPr lang="en-US" sz="1170" dirty="0">
-                <a:solidFill>
-                  <a:srgbClr val="5E7680"/>
+              <a:rPr lang="en-US" sz="1220" dirty="0">
+                <a:solidFill>
+                  <a:srgbClr val="334E57"/>
                 </a:solidFill>
                 <a:latin typeface="Calibri" pitchFamily="34" charset="0"/>
                 <a:ea typeface="Calibri" pitchFamily="34" charset="-122"/>
                 <a:cs typeface="Calibri" pitchFamily="34" charset="-120"/>
               </a:rPr>
-              <a:t>前端可向 iframe 注入编辑脚本，支持元素 hover、选中与编辑模式状态同步。</a:t>
-            </a:r>
-            <a:endParaRPr lang="en-US" sz="1170" dirty="0"/>
+              <a:t>前端向 iframe 注入编辑脚本，支持 hover、选中与编辑模式同步。</a:t>
+            </a:r>
+            <a:endParaRPr lang="en-US" sz="1220" dirty="0"/>
           </a:p>
         </p:txBody>
       </p:sp>
@@ -9914,7 +9914,7 @@
           <a:effectLst>
             <a:outerShdw sx="100000" sy="100000" kx="0" ky="0" algn="bl" rotWithShape="0" blurRad="63500" dist="25400" dir="2700000">
               <a:srgbClr val="000000">
-                <a:alpha val="12000"/>
+                <a:alpha val="10000"/>
               </a:srgbClr>
             </a:outerShdw>
           </a:effectLst>
@@ -9997,7 +9997,7 @@
               <a:buNone/>
             </a:pPr>
             <a:r>
-              <a:rPr lang="en-US" sz="850" b="1" dirty="0">
+              <a:rPr lang="en-US" sz="880" b="1" dirty="0">
                 <a:solidFill>
                   <a:srgbClr val="FFFFFF"/>
                 </a:solidFill>
@@ -10007,7 +10007,7 @@
               </a:rPr>
               <a:t>ZIP</a:t>
             </a:r>
-            <a:endParaRPr lang="en-US" sz="850" dirty="0"/>
+            <a:endParaRPr lang="en-US" sz="880" dirty="0"/>
           </a:p>
         </p:txBody>
       </p:sp>
@@ -10038,7 +10038,7 @@
               <a:buNone/>
             </a:pPr>
             <a:r>
-              <a:rPr lang="en-US" sz="1500" b="1" dirty="0">
+              <a:rPr lang="en-US" sz="1540" b="1" dirty="0">
                 <a:solidFill>
                   <a:srgbClr val="18323A"/>
                 </a:solidFill>
@@ -10048,7 +10048,7 @@
               </a:rPr>
               <a:t>部署与下载</a:t>
             </a:r>
-            <a:endParaRPr lang="en-US" sz="1500" dirty="0"/>
+            <a:endParaRPr lang="en-US" sz="1540" dirty="0"/>
           </a:p>
         </p:txBody>
       </p:sp>
@@ -10061,7 +10061,7 @@
         <p:spPr>
           <a:xfrm>
             <a:off x="8961120" y="1947672"/>
-            <a:ext cx="2514600" cy="850392"/>
+            <a:ext cx="2514600" cy="886968"/>
           </a:xfrm>
           <a:prstGeom prst="rect">
             <a:avLst/>
@@ -10079,17 +10079,17 @@
               <a:buNone/>
             </a:pPr>
             <a:r>
-              <a:rPr lang="en-US" sz="1170" dirty="0">
-                <a:solidFill>
-                  <a:srgbClr val="5E7680"/>
+              <a:rPr lang="en-US" sz="1220" dirty="0">
+                <a:solidFill>
+                  <a:srgbClr val="334E57"/>
                 </a:solidFill>
                 <a:latin typeface="Calibri" pitchFamily="34" charset="0"/>
                 <a:ea typeface="Calibri" pitchFamily="34" charset="-122"/>
                 <a:cs typeface="Calibri" pitchFamily="34" charset="-120"/>
               </a:rPr>
-              <a:t>后端提供应用部署、静态资源访问和项目源码 ZIP 下载能力。</a:t>
-            </a:r>
-            <a:endParaRPr lang="en-US" sz="1170" dirty="0"/>
+              <a:t>提供应用部署、静态资源访问和项目源码 ZIP 下载能力。</a:t>
+            </a:r>
+            <a:endParaRPr lang="en-US" sz="1220" dirty="0"/>
           </a:p>
         </p:txBody>
       </p:sp>
@@ -10121,7 +10121,7 @@
           <a:effectLst>
             <a:outerShdw sx="100000" sy="100000" kx="0" ky="0" algn="bl" rotWithShape="0" blurRad="63500" dist="25400" dir="2700000">
               <a:srgbClr val="000000">
-                <a:alpha val="12000"/>
+                <a:alpha val="10000"/>
               </a:srgbClr>
             </a:outerShdw>
           </a:effectLst>
@@ -10204,7 +10204,7 @@
               <a:buNone/>
             </a:pPr>
             <a:r>
-              <a:rPr lang="en-US" sz="850" b="1" dirty="0">
+              <a:rPr lang="en-US" sz="880" b="1" dirty="0">
                 <a:solidFill>
                   <a:srgbClr val="FFFFFF"/>
                 </a:solidFill>
@@ -10214,7 +10214,7 @@
               </a:rPr>
               <a:t>AUTH</a:t>
             </a:r>
-            <a:endParaRPr lang="en-US" sz="850" dirty="0"/>
+            <a:endParaRPr lang="en-US" sz="880" dirty="0"/>
           </a:p>
         </p:txBody>
       </p:sp>
@@ -10245,7 +10245,7 @@
               <a:buNone/>
             </a:pPr>
             <a:r>
-              <a:rPr lang="en-US" sz="1500" b="1" dirty="0">
+              <a:rPr lang="en-US" sz="1540" b="1" dirty="0">
                 <a:solidFill>
                   <a:srgbClr val="18323A"/>
                 </a:solidFill>
@@ -10255,7 +10255,7 @@
               </a:rPr>
               <a:t>用户与权限</a:t>
             </a:r>
-            <a:endParaRPr lang="en-US" sz="1500" dirty="0"/>
+            <a:endParaRPr lang="en-US" sz="1540" dirty="0"/>
           </a:p>
         </p:txBody>
       </p:sp>
@@ -10268,7 +10268,7 @@
         <p:spPr>
           <a:xfrm>
             <a:off x="1536192" y="4005072"/>
-            <a:ext cx="2514600" cy="850392"/>
+            <a:ext cx="2514600" cy="886968"/>
           </a:xfrm>
           <a:prstGeom prst="rect">
             <a:avLst/>
@@ -10286,17 +10286,17 @@
               <a:buNone/>
             </a:pPr>
             <a:r>
-              <a:rPr lang="en-US" sz="1170" dirty="0">
-                <a:solidFill>
-                  <a:srgbClr val="5E7680"/>
+              <a:rPr lang="en-US" sz="1220" dirty="0">
+                <a:solidFill>
+                  <a:srgbClr val="334E57"/>
                 </a:solidFill>
                 <a:latin typeface="Calibri" pitchFamily="34" charset="0"/>
                 <a:ea typeface="Calibri" pitchFamily="34" charset="-122"/>
                 <a:cs typeface="Calibri" pitchFamily="34" charset="-120"/>
               </a:rPr>
-              <a:t>注册、登录、会话、用户管理、管理员鉴权与应用所有者权限控制。</a:t>
-            </a:r>
-            <a:endParaRPr lang="en-US" sz="1170" dirty="0"/>
+              <a:t>注册、登录、会话、用户管理、管理员鉴权与所有者权限控制。</a:t>
+            </a:r>
+            <a:endParaRPr lang="en-US" sz="1220" dirty="0"/>
           </a:p>
         </p:txBody>
       </p:sp>
@@ -10328,7 +10328,7 @@
           <a:effectLst>
             <a:outerShdw sx="100000" sy="100000" kx="0" ky="0" algn="bl" rotWithShape="0" blurRad="63500" dist="25400" dir="2700000">
               <a:srgbClr val="000000">
-                <a:alpha val="12000"/>
+                <a:alpha val="10000"/>
               </a:srgbClr>
             </a:outerShdw>
           </a:effectLst>
@@ -10411,7 +10411,7 @@
               <a:buNone/>
             </a:pPr>
             <a:r>
-              <a:rPr lang="en-US" sz="850" b="1" dirty="0">
+              <a:rPr lang="en-US" sz="880" b="1" dirty="0">
                 <a:solidFill>
                   <a:srgbClr val="FFFFFF"/>
                 </a:solidFill>
@@ -10421,7 +10421,7 @@
               </a:rPr>
               <a:t>OPS</a:t>
             </a:r>
-            <a:endParaRPr lang="en-US" sz="850" dirty="0"/>
+            <a:endParaRPr lang="en-US" sz="880" dirty="0"/>
           </a:p>
         </p:txBody>
       </p:sp>
@@ -10452,7 +10452,7 @@
               <a:buNone/>
             </a:pPr>
             <a:r>
-              <a:rPr lang="en-US" sz="1500" b="1" dirty="0">
+              <a:rPr lang="en-US" sz="1540" b="1" dirty="0">
                 <a:solidFill>
                   <a:srgbClr val="18323A"/>
                 </a:solidFill>
@@ -10462,7 +10462,7 @@
               </a:rPr>
               <a:t>精选与后台管理</a:t>
             </a:r>
-            <a:endParaRPr lang="en-US" sz="1500" dirty="0"/>
+            <a:endParaRPr lang="en-US" sz="1540" dirty="0"/>
           </a:p>
         </p:txBody>
       </p:sp>
@@ -10475,7 +10475,7 @@
         <p:spPr>
           <a:xfrm>
             <a:off x="5248656" y="4005072"/>
-            <a:ext cx="2514600" cy="850392"/>
+            <a:ext cx="2514600" cy="886968"/>
           </a:xfrm>
           <a:prstGeom prst="rect">
             <a:avLst/>
@@ -10493,9 +10493,9 @@
               <a:buNone/>
             </a:pPr>
             <a:r>
-              <a:rPr lang="en-US" sz="1170" dirty="0">
-                <a:solidFill>
-                  <a:srgbClr val="5E7680"/>
+              <a:rPr lang="en-US" sz="1220" dirty="0">
+                <a:solidFill>
+                  <a:srgbClr val="334E57"/>
                 </a:solidFill>
                 <a:latin typeface="Calibri" pitchFamily="34" charset="0"/>
                 <a:ea typeface="Calibri" pitchFamily="34" charset="-122"/>
@@ -10503,7 +10503,7 @@
               </a:rPr>
               <a:t>管理员可管理应用、设置精选、查询聊天记录和用户信息。</a:t>
             </a:r>
-            <a:endParaRPr lang="en-US" sz="1170" dirty="0"/>
+            <a:endParaRPr lang="en-US" sz="1220" dirty="0"/>
           </a:p>
         </p:txBody>
       </p:sp>
@@ -10535,7 +10535,7 @@
           <a:effectLst>
             <a:outerShdw sx="100000" sy="100000" kx="0" ky="0" algn="bl" rotWithShape="0" blurRad="63500" dist="25400" dir="2700000">
               <a:srgbClr val="000000">
-                <a:alpha val="12000"/>
+                <a:alpha val="10000"/>
               </a:srgbClr>
             </a:outerShdw>
           </a:effectLst>
@@ -10618,7 +10618,7 @@
               <a:buNone/>
             </a:pPr>
             <a:r>
-              <a:rPr lang="en-US" sz="850" b="1" dirty="0">
+              <a:rPr lang="en-US" sz="880" b="1" dirty="0">
                 <a:solidFill>
                   <a:srgbClr val="FFFFFF"/>
                 </a:solidFill>
@@ -10628,7 +10628,7 @@
               </a:rPr>
               <a:t>MON</a:t>
             </a:r>
-            <a:endParaRPr lang="en-US" sz="850" dirty="0"/>
+            <a:endParaRPr lang="en-US" sz="880" dirty="0"/>
           </a:p>
         </p:txBody>
       </p:sp>
@@ -10659,7 +10659,7 @@
               <a:buNone/>
             </a:pPr>
             <a:r>
-              <a:rPr lang="en-US" sz="1500" b="1" dirty="0">
+              <a:rPr lang="en-US" sz="1540" b="1" dirty="0">
                 <a:solidFill>
                   <a:srgbClr val="18323A"/>
                 </a:solidFill>
@@ -10669,7 +10669,7 @@
               </a:rPr>
               <a:t>监控与优化基础</a:t>
             </a:r>
-            <a:endParaRPr lang="en-US" sz="1500" dirty="0"/>
+            <a:endParaRPr lang="en-US" sz="1540" dirty="0"/>
           </a:p>
         </p:txBody>
       </p:sp>
@@ -10682,7 +10682,7 @@
         <p:spPr>
           <a:xfrm>
             <a:off x="8961120" y="4005072"/>
-            <a:ext cx="2514600" cy="850392"/>
+            <a:ext cx="2514600" cy="886968"/>
           </a:xfrm>
           <a:prstGeom prst="rect">
             <a:avLst/>
@@ -10700,17 +10700,17 @@
               <a:buNone/>
             </a:pPr>
             <a:r>
-              <a:rPr lang="en-US" sz="1170" dirty="0">
-                <a:solidFill>
-                  <a:srgbClr val="5E7680"/>
+              <a:rPr lang="en-US" sz="1220" dirty="0">
+                <a:solidFill>
+                  <a:srgbClr val="334E57"/>
                 </a:solidFill>
                 <a:latin typeface="Calibri" pitchFamily="34" charset="0"/>
                 <a:ea typeface="Calibri" pitchFamily="34" charset="-122"/>
                 <a:cs typeface="Calibri" pitchFamily="34" charset="-120"/>
               </a:rPr>
-              <a:t>具备限流、缓存、Actuator、Prometheus 指标与 AI 调用监控采集类。</a:t>
-            </a:r>
-            <a:endParaRPr lang="en-US" sz="1170" dirty="0"/>
+              <a:t>具备限流、缓存、Actuator、Prometheus 与 AI 指标采集类。</a:t>
+            </a:r>
+            <a:endParaRPr lang="en-US" sz="1220" dirty="0"/>
           </a:p>
         </p:txBody>
       </p:sp>
@@ -10804,8 +10804,8 @@
         </p:nvSpPr>
         <p:spPr>
           <a:xfrm>
-            <a:off x="10835640" y="-274320"/>
-            <a:ext cx="1234440" cy="1234440"/>
+            <a:off x="10927080" y="-237744"/>
+            <a:ext cx="1024128" cy="1024128"/>
           </a:xfrm>
           <a:prstGeom prst="ellipse">
             <a:avLst/>
@@ -10829,8 +10829,8 @@
         </p:nvSpPr>
         <p:spPr>
           <a:xfrm>
-            <a:off x="11356848" y="137160"/>
-            <a:ext cx="475488" cy="475488"/>
+            <a:off x="11384280" y="128016"/>
+            <a:ext cx="393192" cy="393192"/>
           </a:xfrm>
           <a:prstGeom prst="ellipse">
             <a:avLst/>
@@ -10855,7 +10855,7 @@
         <p:spPr>
           <a:xfrm>
             <a:off x="658368" y="384048"/>
-            <a:ext cx="8138160" cy="502920"/>
+            <a:ext cx="8046720" cy="502920"/>
           </a:xfrm>
           <a:prstGeom prst="rect">
             <a:avLst/>
@@ -10896,7 +10896,7 @@
         <p:spPr>
           <a:xfrm>
             <a:off x="685800" y="932688"/>
-            <a:ext cx="7863840" cy="256032"/>
+            <a:ext cx="7726680" cy="256032"/>
           </a:xfrm>
           <a:prstGeom prst="rect">
             <a:avLst/>
@@ -10914,9 +10914,9 @@
               <a:buNone/>
             </a:pPr>
             <a:r>
-              <a:rPr lang="en-US" sz="1050" dirty="0">
-                <a:solidFill>
-                  <a:srgbClr val="5E7680"/>
+              <a:rPr lang="en-US" sz="1100" dirty="0">
+                <a:solidFill>
+                  <a:srgbClr val="334E57"/>
                 </a:solidFill>
                 <a:latin typeface="Calibri" pitchFamily="34" charset="0"/>
                 <a:ea typeface="Calibri" pitchFamily="34" charset="-122"/>
@@ -10924,7 +10924,7 @@
               </a:rPr>
               <a:t>LangChain4j + LangGraph4j 将生成链路拆成可观察、可扩展的步骤。</a:t>
             </a:r>
-            <a:endParaRPr lang="en-US" sz="1050" dirty="0"/>
+            <a:endParaRPr lang="en-US" sz="1100" dirty="0"/>
           </a:p>
         </p:txBody>
       </p:sp>
@@ -11002,7 +11002,7 @@
         </p:nvSpPr>
         <p:spPr>
           <a:xfrm>
-            <a:off x="658368" y="6419088"/>
+            <a:off x="658368" y="6291072"/>
             <a:ext cx="4389120" cy="201168"/>
           </a:xfrm>
           <a:prstGeom prst="rect">
@@ -11019,9 +11019,9 @@
               <a:buNone/>
             </a:pPr>
             <a:r>
-              <a:rPr lang="en-US" sz="850" dirty="0">
-                <a:solidFill>
-                  <a:srgbClr val="5E7680"/>
+              <a:rPr lang="en-US" sz="880" dirty="0">
+                <a:solidFill>
+                  <a:srgbClr val="334E57"/>
                 </a:solidFill>
                 <a:latin typeface="Calibri" pitchFamily="34" charset="0"/>
                 <a:ea typeface="Calibri" pitchFamily="34" charset="-122"/>
@@ -11029,7 +11029,7 @@
               </a:rPr>
               <a:t>yu-ai-code-mother · 2026-06-14 · 4</a:t>
             </a:r>
-            <a:endParaRPr lang="en-US" sz="850" dirty="0"/>
+            <a:endParaRPr lang="en-US" sz="880" dirty="0"/>
           </a:p>
         </p:txBody>
       </p:sp>
@@ -11041,7 +11041,7 @@
         </p:nvSpPr>
         <p:spPr>
           <a:xfrm>
-            <a:off x="11109960" y="6446520"/>
+            <a:off x="11109960" y="6318504"/>
             <a:ext cx="402336" cy="73152"/>
           </a:xfrm>
           <a:prstGeom prst="rect">
@@ -11066,7 +11066,7 @@
         </p:nvSpPr>
         <p:spPr>
           <a:xfrm>
-            <a:off x="11558016" y="6446520"/>
+            <a:off x="11558016" y="6318504"/>
             <a:ext cx="210312" cy="73152"/>
           </a:xfrm>
           <a:prstGeom prst="rect">
@@ -11091,7 +11091,7 @@
         </p:nvSpPr>
         <p:spPr>
           <a:xfrm>
-            <a:off x="822960" y="1828800"/>
+            <a:off x="841248" y="1828800"/>
             <a:ext cx="749808" cy="749808"/>
           </a:xfrm>
           <a:prstGeom prst="ellipse">
@@ -11116,7 +11116,7 @@
         </p:nvSpPr>
         <p:spPr>
           <a:xfrm>
-            <a:off x="822960" y="2039112"/>
+            <a:off x="841248" y="2039112"/>
             <a:ext cx="749808" cy="164592"/>
           </a:xfrm>
           <a:prstGeom prst="rect">
@@ -11155,7 +11155,7 @@
         </p:nvSpPr>
         <p:spPr>
           <a:xfrm>
-            <a:off x="502920" y="2761488"/>
+            <a:off x="521208" y="2761488"/>
             <a:ext cx="1389888" cy="201168"/>
           </a:xfrm>
           <a:prstGeom prst="rect">
@@ -11172,7 +11172,7 @@
               <a:buNone/>
             </a:pPr>
             <a:r>
-              <a:rPr lang="en-US" sz="1250" b="1" dirty="0">
+              <a:rPr lang="en-US" sz="1280" b="1" dirty="0">
                 <a:solidFill>
                   <a:srgbClr val="18323A"/>
                 </a:solidFill>
@@ -11182,7 +11182,7 @@
               </a:rPr>
               <a:t>素材收集</a:t>
             </a:r>
-            <a:endParaRPr lang="en-US" sz="1250" dirty="0"/>
+            <a:endParaRPr lang="en-US" sz="1280" dirty="0"/>
           </a:p>
         </p:txBody>
       </p:sp>
@@ -11194,8 +11194,8 @@
         </p:nvSpPr>
         <p:spPr>
           <a:xfrm>
-            <a:off x="384048" y="3090672"/>
-            <a:ext cx="1627632" cy="256032"/>
+            <a:off x="502920" y="3090672"/>
+            <a:ext cx="1426464" cy="256032"/>
           </a:xfrm>
           <a:prstGeom prst="rect">
             <a:avLst/>
@@ -11213,17 +11213,17 @@
               <a:buNone/>
             </a:pPr>
             <a:r>
-              <a:rPr lang="en-US" sz="870" dirty="0">
-                <a:solidFill>
-                  <a:srgbClr val="5E7680"/>
+              <a:rPr lang="en-US" sz="1040" dirty="0">
+                <a:solidFill>
+                  <a:srgbClr val="334E57"/>
                 </a:solidFill>
                 <a:latin typeface="Calibri" pitchFamily="34" charset="0"/>
                 <a:ea typeface="Calibri" pitchFamily="34" charset="-122"/>
                 <a:cs typeface="Calibri" pitchFamily="34" charset="-120"/>
               </a:rPr>
-              <a:t>image_collector</a:t>
-            </a:r>
-            <a:endParaRPr lang="en-US" sz="870" dirty="0"/>
+              <a:t>collector</a:t>
+            </a:r>
+            <a:endParaRPr lang="en-US" sz="1040" dirty="0"/>
           </a:p>
         </p:txBody>
       </p:sp>
@@ -11235,8 +11235,8 @@
         </p:nvSpPr>
         <p:spPr>
           <a:xfrm>
-            <a:off x="1792224" y="2011680"/>
-            <a:ext cx="411480" cy="347472"/>
+            <a:off x="1810512" y="2029968"/>
+            <a:ext cx="347472" cy="292608"/>
           </a:xfrm>
           <a:prstGeom prst="chevron">
             <a:avLst/>
@@ -11260,7 +11260,7 @@
         </p:nvSpPr>
         <p:spPr>
           <a:xfrm>
-            <a:off x="2679192" y="1828800"/>
+            <a:off x="2688336" y="1828800"/>
             <a:ext cx="749808" cy="749808"/>
           </a:xfrm>
           <a:prstGeom prst="ellipse">
@@ -11285,7 +11285,7 @@
         </p:nvSpPr>
         <p:spPr>
           <a:xfrm>
-            <a:off x="2679192" y="2039112"/>
+            <a:off x="2688336" y="2039112"/>
             <a:ext cx="749808" cy="164592"/>
           </a:xfrm>
           <a:prstGeom prst="rect">
@@ -11324,7 +11324,7 @@
         </p:nvSpPr>
         <p:spPr>
           <a:xfrm>
-            <a:off x="2359152" y="2761488"/>
+            <a:off x="2368296" y="2761488"/>
             <a:ext cx="1389888" cy="201168"/>
           </a:xfrm>
           <a:prstGeom prst="rect">
@@ -11341,7 +11341,7 @@
               <a:buNone/>
             </a:pPr>
             <a:r>
-              <a:rPr lang="en-US" sz="1250" b="1" dirty="0">
+              <a:rPr lang="en-US" sz="1280" b="1" dirty="0">
                 <a:solidFill>
                   <a:srgbClr val="18323A"/>
                 </a:solidFill>
@@ -11351,7 +11351,7 @@
               </a:rPr>
               <a:t>提示增强</a:t>
             </a:r>
-            <a:endParaRPr lang="en-US" sz="1250" dirty="0"/>
+            <a:endParaRPr lang="en-US" sz="1280" dirty="0"/>
           </a:p>
         </p:txBody>
       </p:sp>
@@ -11363,8 +11363,8 @@
         </p:nvSpPr>
         <p:spPr>
           <a:xfrm>
-            <a:off x="2240280" y="3090672"/>
-            <a:ext cx="1627632" cy="256032"/>
+            <a:off x="2350008" y="3090672"/>
+            <a:ext cx="1426464" cy="256032"/>
           </a:xfrm>
           <a:prstGeom prst="rect">
             <a:avLst/>
@@ -11382,17 +11382,17 @@
               <a:buNone/>
             </a:pPr>
             <a:r>
-              <a:rPr lang="en-US" sz="870" dirty="0">
-                <a:solidFill>
-                  <a:srgbClr val="5E7680"/>
+              <a:rPr lang="en-US" sz="1040" dirty="0">
+                <a:solidFill>
+                  <a:srgbClr val="334E57"/>
                 </a:solidFill>
                 <a:latin typeface="Calibri" pitchFamily="34" charset="0"/>
                 <a:ea typeface="Calibri" pitchFamily="34" charset="-122"/>
                 <a:cs typeface="Calibri" pitchFamily="34" charset="-120"/>
               </a:rPr>
-              <a:t>prompt_enhancer</a:t>
-            </a:r>
-            <a:endParaRPr lang="en-US" sz="870" dirty="0"/>
+              <a:t>enhancer</a:t>
+            </a:r>
+            <a:endParaRPr lang="en-US" sz="1040" dirty="0"/>
           </a:p>
         </p:txBody>
       </p:sp>
@@ -11404,8 +11404,8 @@
         </p:nvSpPr>
         <p:spPr>
           <a:xfrm>
-            <a:off x="3648456" y="2011680"/>
-            <a:ext cx="411480" cy="347472"/>
+            <a:off x="3657600" y="2029968"/>
+            <a:ext cx="347472" cy="292608"/>
           </a:xfrm>
           <a:prstGeom prst="chevron">
             <a:avLst/>
@@ -11510,7 +11510,7 @@
               <a:buNone/>
             </a:pPr>
             <a:r>
-              <a:rPr lang="en-US" sz="1250" b="1" dirty="0">
+              <a:rPr lang="en-US" sz="1280" b="1" dirty="0">
                 <a:solidFill>
                   <a:srgbClr val="18323A"/>
                 </a:solidFill>
@@ -11520,7 +11520,7 @@
               </a:rPr>
               <a:t>类型路由</a:t>
             </a:r>
-            <a:endParaRPr lang="en-US" sz="1250" dirty="0"/>
+            <a:endParaRPr lang="en-US" sz="1280" dirty="0"/>
           </a:p>
         </p:txBody>
       </p:sp>
@@ -11532,8 +11532,8 @@
         </p:nvSpPr>
         <p:spPr>
           <a:xfrm>
-            <a:off x="4096512" y="3090672"/>
-            <a:ext cx="1627632" cy="256032"/>
+            <a:off x="4197096" y="3090672"/>
+            <a:ext cx="1426464" cy="256032"/>
           </a:xfrm>
           <a:prstGeom prst="rect">
             <a:avLst/>
@@ -11551,9 +11551,9 @@
               <a:buNone/>
             </a:pPr>
             <a:r>
-              <a:rPr lang="en-US" sz="870" dirty="0">
-                <a:solidFill>
-                  <a:srgbClr val="5E7680"/>
+              <a:rPr lang="en-US" sz="1040" dirty="0">
+                <a:solidFill>
+                  <a:srgbClr val="334E57"/>
                 </a:solidFill>
                 <a:latin typeface="Calibri" pitchFamily="34" charset="0"/>
                 <a:ea typeface="Calibri" pitchFamily="34" charset="-122"/>
@@ -11561,7 +11561,7 @@
               </a:rPr>
               <a:t>router</a:t>
             </a:r>
-            <a:endParaRPr lang="en-US" sz="870" dirty="0"/>
+            <a:endParaRPr lang="en-US" sz="1040" dirty="0"/>
           </a:p>
         </p:txBody>
       </p:sp>
@@ -11573,8 +11573,8 @@
         </p:nvSpPr>
         <p:spPr>
           <a:xfrm>
-            <a:off x="5504688" y="2011680"/>
-            <a:ext cx="411480" cy="347472"/>
+            <a:off x="5504688" y="2029968"/>
+            <a:ext cx="347472" cy="292608"/>
           </a:xfrm>
           <a:prstGeom prst="chevron">
             <a:avLst/>
@@ -11598,7 +11598,7 @@
         </p:nvSpPr>
         <p:spPr>
           <a:xfrm>
-            <a:off x="6391656" y="1828800"/>
+            <a:off x="6382512" y="1828800"/>
             <a:ext cx="749808" cy="749808"/>
           </a:xfrm>
           <a:prstGeom prst="ellipse">
@@ -11623,7 +11623,7 @@
         </p:nvSpPr>
         <p:spPr>
           <a:xfrm>
-            <a:off x="6391656" y="2039112"/>
+            <a:off x="6382512" y="2039112"/>
             <a:ext cx="749808" cy="164592"/>
           </a:xfrm>
           <a:prstGeom prst="rect">
@@ -11662,7 +11662,7 @@
         </p:nvSpPr>
         <p:spPr>
           <a:xfrm>
-            <a:off x="6071616" y="2761488"/>
+            <a:off x="6062472" y="2761488"/>
             <a:ext cx="1389888" cy="201168"/>
           </a:xfrm>
           <a:prstGeom prst="rect">
@@ -11679,7 +11679,7 @@
               <a:buNone/>
             </a:pPr>
             <a:r>
-              <a:rPr lang="en-US" sz="1250" b="1" dirty="0">
+              <a:rPr lang="en-US" sz="1280" b="1" dirty="0">
                 <a:solidFill>
                   <a:srgbClr val="18323A"/>
                 </a:solidFill>
@@ -11689,7 +11689,7 @@
               </a:rPr>
               <a:t>代码生成</a:t>
             </a:r>
-            <a:endParaRPr lang="en-US" sz="1250" dirty="0"/>
+            <a:endParaRPr lang="en-US" sz="1280" dirty="0"/>
           </a:p>
         </p:txBody>
       </p:sp>
@@ -11701,8 +11701,8 @@
         </p:nvSpPr>
         <p:spPr>
           <a:xfrm>
-            <a:off x="5952744" y="3090672"/>
-            <a:ext cx="1627632" cy="256032"/>
+            <a:off x="6044184" y="3090672"/>
+            <a:ext cx="1426464" cy="256032"/>
           </a:xfrm>
           <a:prstGeom prst="rect">
             <a:avLst/>
@@ -11720,17 +11720,17 @@
               <a:buNone/>
             </a:pPr>
             <a:r>
-              <a:rPr lang="en-US" sz="870" dirty="0">
-                <a:solidFill>
-                  <a:srgbClr val="5E7680"/>
+              <a:rPr lang="en-US" sz="1040" dirty="0">
+                <a:solidFill>
+                  <a:srgbClr val="334E57"/>
                 </a:solidFill>
                 <a:latin typeface="Calibri" pitchFamily="34" charset="0"/>
                 <a:ea typeface="Calibri" pitchFamily="34" charset="-122"/>
                 <a:cs typeface="Calibri" pitchFamily="34" charset="-120"/>
               </a:rPr>
-              <a:t>code_generator</a:t>
-            </a:r>
-            <a:endParaRPr lang="en-US" sz="870" dirty="0"/>
+              <a:t>generator</a:t>
+            </a:r>
+            <a:endParaRPr lang="en-US" sz="1040" dirty="0"/>
           </a:p>
         </p:txBody>
       </p:sp>
@@ -11742,8 +11742,8 @@
         </p:nvSpPr>
         <p:spPr>
           <a:xfrm>
-            <a:off x="7360920" y="2011680"/>
-            <a:ext cx="411480" cy="347472"/>
+            <a:off x="7351776" y="2029968"/>
+            <a:ext cx="347472" cy="292608"/>
           </a:xfrm>
           <a:prstGeom prst="chevron">
             <a:avLst/>
@@ -11767,7 +11767,7 @@
         </p:nvSpPr>
         <p:spPr>
           <a:xfrm>
-            <a:off x="8247888" y="1828800"/>
+            <a:off x="8229600" y="1828800"/>
             <a:ext cx="749808" cy="749808"/>
           </a:xfrm>
           <a:prstGeom prst="ellipse">
@@ -11792,7 +11792,7 @@
         </p:nvSpPr>
         <p:spPr>
           <a:xfrm>
-            <a:off x="8247888" y="2039112"/>
+            <a:off x="8229600" y="2039112"/>
             <a:ext cx="749808" cy="164592"/>
           </a:xfrm>
           <a:prstGeom prst="rect">
@@ -11831,7 +11831,7 @@
         </p:nvSpPr>
         <p:spPr>
           <a:xfrm>
-            <a:off x="7927848" y="2761488"/>
+            <a:off x="7909560" y="2761488"/>
             <a:ext cx="1389888" cy="201168"/>
           </a:xfrm>
           <a:prstGeom prst="rect">
@@ -11848,7 +11848,7 @@
               <a:buNone/>
             </a:pPr>
             <a:r>
-              <a:rPr lang="en-US" sz="1250" b="1" dirty="0">
+              <a:rPr lang="en-US" sz="1280" b="1" dirty="0">
                 <a:solidFill>
                   <a:srgbClr val="18323A"/>
                 </a:solidFill>
@@ -11858,7 +11858,7 @@
               </a:rPr>
               <a:t>质量检查</a:t>
             </a:r>
-            <a:endParaRPr lang="en-US" sz="1250" dirty="0"/>
+            <a:endParaRPr lang="en-US" sz="1280" dirty="0"/>
           </a:p>
         </p:txBody>
       </p:sp>
@@ -11870,8 +11870,8 @@
         </p:nvSpPr>
         <p:spPr>
           <a:xfrm>
-            <a:off x="7808976" y="3090672"/>
-            <a:ext cx="1627632" cy="256032"/>
+            <a:off x="7891272" y="3090672"/>
+            <a:ext cx="1426464" cy="256032"/>
           </a:xfrm>
           <a:prstGeom prst="rect">
             <a:avLst/>
@@ -11889,17 +11889,17 @@
               <a:buNone/>
             </a:pPr>
             <a:r>
-              <a:rPr lang="en-US" sz="870" dirty="0">
-                <a:solidFill>
-                  <a:srgbClr val="5E7680"/>
+              <a:rPr lang="en-US" sz="1040" dirty="0">
+                <a:solidFill>
+                  <a:srgbClr val="334E57"/>
                 </a:solidFill>
                 <a:latin typeface="Calibri" pitchFamily="34" charset="0"/>
                 <a:ea typeface="Calibri" pitchFamily="34" charset="-122"/>
                 <a:cs typeface="Calibri" pitchFamily="34" charset="-120"/>
               </a:rPr>
-              <a:t>code_quality_check</a:t>
-            </a:r>
-            <a:endParaRPr lang="en-US" sz="870" dirty="0"/>
+              <a:t>quality</a:t>
+            </a:r>
+            <a:endParaRPr lang="en-US" sz="1040" dirty="0"/>
           </a:p>
         </p:txBody>
       </p:sp>
@@ -11911,8 +11911,8 @@
         </p:nvSpPr>
         <p:spPr>
           <a:xfrm>
-            <a:off x="9217152" y="2011680"/>
-            <a:ext cx="411480" cy="347472"/>
+            <a:off x="9198864" y="2029968"/>
+            <a:ext cx="347472" cy="292608"/>
           </a:xfrm>
           <a:prstGeom prst="chevron">
             <a:avLst/>
@@ -11936,7 +11936,7 @@
         </p:nvSpPr>
         <p:spPr>
           <a:xfrm>
-            <a:off x="10104120" y="1828800"/>
+            <a:off x="10076688" y="1828800"/>
             <a:ext cx="749808" cy="749808"/>
           </a:xfrm>
           <a:prstGeom prst="ellipse">
@@ -11961,7 +11961,7 @@
         </p:nvSpPr>
         <p:spPr>
           <a:xfrm>
-            <a:off x="10104120" y="2039112"/>
+            <a:off x="10076688" y="2039112"/>
             <a:ext cx="749808" cy="164592"/>
           </a:xfrm>
           <a:prstGeom prst="rect">
@@ -12000,7 +12000,7 @@
         </p:nvSpPr>
         <p:spPr>
           <a:xfrm>
-            <a:off x="9784080" y="2761488"/>
+            <a:off x="9756648" y="2761488"/>
             <a:ext cx="1389888" cy="201168"/>
           </a:xfrm>
           <a:prstGeom prst="rect">
@@ -12017,7 +12017,7 @@
               <a:buNone/>
             </a:pPr>
             <a:r>
-              <a:rPr lang="en-US" sz="1250" b="1" dirty="0">
+              <a:rPr lang="en-US" sz="1280" b="1" dirty="0">
                 <a:solidFill>
                   <a:srgbClr val="18323A"/>
                 </a:solidFill>
@@ -12027,7 +12027,7 @@
               </a:rPr>
               <a:t>项目构建</a:t>
             </a:r>
-            <a:endParaRPr lang="en-US" sz="1250" dirty="0"/>
+            <a:endParaRPr lang="en-US" sz="1280" dirty="0"/>
           </a:p>
         </p:txBody>
       </p:sp>
@@ -12039,8 +12039,8 @@
         </p:nvSpPr>
         <p:spPr>
           <a:xfrm>
-            <a:off x="9665208" y="3090672"/>
-            <a:ext cx="1627632" cy="256032"/>
+            <a:off x="9738360" y="3090672"/>
+            <a:ext cx="1426464" cy="256032"/>
           </a:xfrm>
           <a:prstGeom prst="rect">
             <a:avLst/>
@@ -12058,17 +12058,17 @@
               <a:buNone/>
             </a:pPr>
             <a:r>
-              <a:rPr lang="en-US" sz="870" dirty="0">
-                <a:solidFill>
-                  <a:srgbClr val="5E7680"/>
+              <a:rPr lang="en-US" sz="1040" dirty="0">
+                <a:solidFill>
+                  <a:srgbClr val="334E57"/>
                 </a:solidFill>
                 <a:latin typeface="Calibri" pitchFamily="34" charset="0"/>
                 <a:ea typeface="Calibri" pitchFamily="34" charset="-122"/>
                 <a:cs typeface="Calibri" pitchFamily="34" charset="-120"/>
               </a:rPr>
-              <a:t>project_builder</a:t>
-            </a:r>
-            <a:endParaRPr lang="en-US" sz="870" dirty="0"/>
+              <a:t>builder</a:t>
+            </a:r>
+            <a:endParaRPr lang="en-US" sz="1040" dirty="0"/>
           </a:p>
         </p:txBody>
       </p:sp>
@@ -12100,7 +12100,7 @@
           <a:effectLst>
             <a:outerShdw sx="100000" sy="100000" kx="0" ky="0" algn="bl" rotWithShape="0" blurRad="63500" dist="25400" dir="2700000">
               <a:srgbClr val="000000">
-                <a:alpha val="12000"/>
+                <a:alpha val="10000"/>
               </a:srgbClr>
             </a:outerShdw>
           </a:effectLst>
@@ -12183,7 +12183,7 @@
               <a:buNone/>
             </a:pPr>
             <a:r>
-              <a:rPr lang="en-US" sz="850" b="1" dirty="0">
+              <a:rPr lang="en-US" sz="880" b="1" dirty="0">
                 <a:solidFill>
                   <a:srgbClr val="FFFFFF"/>
                 </a:solidFill>
@@ -12193,7 +12193,7 @@
               </a:rPr>
               <a:t>QC</a:t>
             </a:r>
-            <a:endParaRPr lang="en-US" sz="850" dirty="0"/>
+            <a:endParaRPr lang="en-US" sz="880" dirty="0"/>
           </a:p>
         </p:txBody>
       </p:sp>
@@ -12224,7 +12224,7 @@
               <a:buNone/>
             </a:pPr>
             <a:r>
-              <a:rPr lang="en-US" sz="1500" b="1" dirty="0">
+              <a:rPr lang="en-US" sz="1540" b="1" dirty="0">
                 <a:solidFill>
                   <a:srgbClr val="18323A"/>
                 </a:solidFill>
@@ -12234,7 +12234,7 @@
               </a:rPr>
               <a:t>质量闭环</a:t>
             </a:r>
-            <a:endParaRPr lang="en-US" sz="1500" dirty="0"/>
+            <a:endParaRPr lang="en-US" sz="1540" dirty="0"/>
           </a:p>
         </p:txBody>
       </p:sp>
@@ -12247,7 +12247,7 @@
         <p:spPr>
           <a:xfrm>
             <a:off x="1536192" y="4809744"/>
-            <a:ext cx="4160520" cy="667512"/>
+            <a:ext cx="4160520" cy="704088"/>
           </a:xfrm>
           <a:prstGeom prst="rect">
             <a:avLst/>
@@ -12265,17 +12265,17 @@
               <a:buNone/>
             </a:pPr>
             <a:r>
-              <a:rPr lang="en-US" sz="1170" dirty="0">
-                <a:solidFill>
-                  <a:srgbClr val="5E7680"/>
+              <a:rPr lang="en-US" sz="1220" dirty="0">
+                <a:solidFill>
+                  <a:srgbClr val="334E57"/>
                 </a:solidFill>
                 <a:latin typeface="Calibri" pitchFamily="34" charset="0"/>
                 <a:ea typeface="Calibri" pitchFamily="34" charset="-122"/>
                 <a:cs typeface="Calibri" pitchFamily="34" charset="-120"/>
               </a:rPr>
-              <a:t>质检节点根据结果选择构建、跳过构建或回到代码生成节点，体现“生成—检查—再生成”的闭环。</a:t>
-            </a:r>
-            <a:endParaRPr lang="en-US" sz="1170" dirty="0"/>
+              <a:t>质检节点根据结果选择构建、跳过构建或回到代码生成节点。</a:t>
+            </a:r>
+            <a:endParaRPr lang="en-US" sz="1220" dirty="0"/>
           </a:p>
         </p:txBody>
       </p:sp>
@@ -12307,7 +12307,7 @@
           <a:effectLst>
             <a:outerShdw sx="100000" sy="100000" kx="0" ky="0" algn="bl" rotWithShape="0" blurRad="63500" dist="25400" dir="2700000">
               <a:srgbClr val="000000">
-                <a:alpha val="12000"/>
+                <a:alpha val="10000"/>
               </a:srgbClr>
             </a:outerShdw>
           </a:effectLst>
@@ -12390,7 +12390,7 @@
               <a:buNone/>
             </a:pPr>
             <a:r>
-              <a:rPr lang="en-US" sz="850" b="1" dirty="0">
+              <a:rPr lang="en-US" sz="880" b="1" dirty="0">
                 <a:solidFill>
                   <a:srgbClr val="FFFFFF"/>
                 </a:solidFill>
@@ -12400,7 +12400,7 @@
               </a:rPr>
               <a:t>SSE</a:t>
             </a:r>
-            <a:endParaRPr lang="en-US" sz="850" dirty="0"/>
+            <a:endParaRPr lang="en-US" sz="880" dirty="0"/>
           </a:p>
         </p:txBody>
       </p:sp>
@@ -12431,7 +12431,7 @@
               <a:buNone/>
             </a:pPr>
             <a:r>
-              <a:rPr lang="en-US" sz="1500" b="1" dirty="0">
+              <a:rPr lang="en-US" sz="1540" b="1" dirty="0">
                 <a:solidFill>
                   <a:srgbClr val="18323A"/>
                 </a:solidFill>
@@ -12441,7 +12441,7 @@
               </a:rPr>
               <a:t>流式交互</a:t>
             </a:r>
-            <a:endParaRPr lang="en-US" sz="1500" dirty="0"/>
+            <a:endParaRPr lang="en-US" sz="1540" dirty="0"/>
           </a:p>
         </p:txBody>
       </p:sp>
@@ -12454,7 +12454,7 @@
         <p:spPr>
           <a:xfrm>
             <a:off x="6986016" y="4809744"/>
-            <a:ext cx="4160520" cy="667512"/>
+            <a:ext cx="4160520" cy="704088"/>
           </a:xfrm>
           <a:prstGeom prst="rect">
             <a:avLst/>
@@ -12472,17 +12472,17 @@
               <a:buNone/>
             </a:pPr>
             <a:r>
-              <a:rPr lang="en-US" sz="1170" dirty="0">
-                <a:solidFill>
-                  <a:srgbClr val="5E7680"/>
+              <a:rPr lang="en-US" sz="1220" dirty="0">
+                <a:solidFill>
+                  <a:srgbClr val="334E57"/>
                 </a:solidFill>
                 <a:latin typeface="Calibri" pitchFamily="34" charset="0"/>
                 <a:ea typeface="Calibri" pitchFamily="34" charset="-122"/>
                 <a:cs typeface="Calibri" pitchFamily="34" charset="-120"/>
               </a:rPr>
-              <a:t>AppController 和 WorkflowSseController 提供 SSE/Flux 输出，前端对话页可承接实时生成体验。</a:t>
-            </a:r>
-            <a:endParaRPr lang="en-US" sz="1170" dirty="0"/>
+              <a:t>AppController 与 WorkflowSseController 提供 SSE/Flux 输出，支撑实时生成体验。</a:t>
+            </a:r>
+            <a:endParaRPr lang="en-US" sz="1220" dirty="0"/>
           </a:p>
         </p:txBody>
       </p:sp>
@@ -12576,8 +12576,8 @@
         </p:nvSpPr>
         <p:spPr>
           <a:xfrm>
-            <a:off x="10835640" y="-274320"/>
-            <a:ext cx="1234440" cy="1234440"/>
+            <a:off x="10927080" y="-237744"/>
+            <a:ext cx="1024128" cy="1024128"/>
           </a:xfrm>
           <a:prstGeom prst="ellipse">
             <a:avLst/>
@@ -12601,8 +12601,8 @@
         </p:nvSpPr>
         <p:spPr>
           <a:xfrm>
-            <a:off x="11356848" y="137160"/>
-            <a:ext cx="475488" cy="475488"/>
+            <a:off x="11384280" y="128016"/>
+            <a:ext cx="393192" cy="393192"/>
           </a:xfrm>
           <a:prstGeom prst="ellipse">
             <a:avLst/>
@@ -12627,7 +12627,7 @@
         <p:spPr>
           <a:xfrm>
             <a:off x="658368" y="384048"/>
-            <a:ext cx="8138160" cy="502920"/>
+            <a:ext cx="8046720" cy="502920"/>
           </a:xfrm>
           <a:prstGeom prst="rect">
             <a:avLst/>
@@ -12668,7 +12668,7 @@
         <p:spPr>
           <a:xfrm>
             <a:off x="685800" y="932688"/>
-            <a:ext cx="7863840" cy="256032"/>
+            <a:ext cx="7726680" cy="256032"/>
           </a:xfrm>
           <a:prstGeom prst="rect">
             <a:avLst/>
@@ -12686,9 +12686,9 @@
               <a:buNone/>
             </a:pPr>
             <a:r>
-              <a:rPr lang="en-US" sz="1050" dirty="0">
-                <a:solidFill>
-                  <a:srgbClr val="5E7680"/>
+              <a:rPr lang="en-US" sz="1100" dirty="0">
+                <a:solidFill>
+                  <a:srgbClr val="334E57"/>
                 </a:solidFill>
                 <a:latin typeface="Calibri" pitchFamily="34" charset="0"/>
                 <a:ea typeface="Calibri" pitchFamily="34" charset="-122"/>
@@ -12696,7 +12696,7 @@
               </a:rPr>
               <a:t>最近 7 天优先：当前分支无代码提交，全分支可见日报相关提交。</a:t>
             </a:r>
-            <a:endParaRPr lang="en-US" sz="1050" dirty="0"/>
+            <a:endParaRPr lang="en-US" sz="1100" dirty="0"/>
           </a:p>
         </p:txBody>
       </p:sp>
@@ -12774,7 +12774,7 @@
         </p:nvSpPr>
         <p:spPr>
           <a:xfrm>
-            <a:off x="658368" y="6419088"/>
+            <a:off x="658368" y="6291072"/>
             <a:ext cx="4389120" cy="201168"/>
           </a:xfrm>
           <a:prstGeom prst="rect">
@@ -12791,9 +12791,9 @@
               <a:buNone/>
             </a:pPr>
             <a:r>
-              <a:rPr lang="en-US" sz="850" dirty="0">
-                <a:solidFill>
-                  <a:srgbClr val="5E7680"/>
+              <a:rPr lang="en-US" sz="880" dirty="0">
+                <a:solidFill>
+                  <a:srgbClr val="334E57"/>
                 </a:solidFill>
                 <a:latin typeface="Calibri" pitchFamily="34" charset="0"/>
                 <a:ea typeface="Calibri" pitchFamily="34" charset="-122"/>
@@ -12801,7 +12801,7 @@
               </a:rPr>
               <a:t>yu-ai-code-mother · 2026-06-14 · 5</a:t>
             </a:r>
-            <a:endParaRPr lang="en-US" sz="850" dirty="0"/>
+            <a:endParaRPr lang="en-US" sz="880" dirty="0"/>
           </a:p>
         </p:txBody>
       </p:sp>
@@ -12813,7 +12813,7 @@
         </p:nvSpPr>
         <p:spPr>
           <a:xfrm>
-            <a:off x="11109960" y="6446520"/>
+            <a:off x="11109960" y="6318504"/>
             <a:ext cx="402336" cy="73152"/>
           </a:xfrm>
           <a:prstGeom prst="rect">
@@ -12838,7 +12838,7 @@
         </p:nvSpPr>
         <p:spPr>
           <a:xfrm>
-            <a:off x="11558016" y="6446520"/>
+            <a:off x="11558016" y="6318504"/>
             <a:ext cx="210312" cy="73152"/>
           </a:xfrm>
           <a:prstGeom prst="rect">
@@ -12883,7 +12883,7 @@
           <a:effectLst>
             <a:outerShdw sx="100000" sy="100000" kx="0" ky="0" algn="bl" rotWithShape="0" blurRad="63500" dist="25400" dir="2700000">
               <a:srgbClr val="000000">
-                <a:alpha val="12000"/>
+                <a:alpha val="10000"/>
               </a:srgbClr>
             </a:outerShdw>
           </a:effectLst>
@@ -12966,7 +12966,7 @@
               <a:buNone/>
             </a:pPr>
             <a:r>
-              <a:rPr lang="en-US" sz="850" b="1" dirty="0">
+              <a:rPr lang="en-US" sz="880" b="1" dirty="0">
                 <a:solidFill>
                   <a:srgbClr val="FFFFFF"/>
                 </a:solidFill>
@@ -12976,7 +12976,7 @@
               </a:rPr>
               <a:t>7D</a:t>
             </a:r>
-            <a:endParaRPr lang="en-US" sz="850" dirty="0"/>
+            <a:endParaRPr lang="en-US" sz="880" dirty="0"/>
           </a:p>
         </p:txBody>
       </p:sp>
@@ -13007,7 +13007,7 @@
               <a:buNone/>
             </a:pPr>
             <a:r>
-              <a:rPr lang="en-US" sz="1500" b="1" dirty="0">
+              <a:rPr lang="en-US" sz="1540" b="1" dirty="0">
                 <a:solidFill>
                   <a:srgbClr val="18323A"/>
                 </a:solidFill>
@@ -13017,7 +13017,7 @@
               </a:rPr>
               <a:t>当前分支近 7 天</a:t>
             </a:r>
-            <a:endParaRPr lang="en-US" sz="1500" dirty="0"/>
+            <a:endParaRPr lang="en-US" sz="1540" dirty="0"/>
           </a:p>
         </p:txBody>
       </p:sp>
@@ -13030,7 +13030,7 @@
         <p:spPr>
           <a:xfrm>
             <a:off x="1536192" y="1920240"/>
-            <a:ext cx="4114800" cy="667512"/>
+            <a:ext cx="4114800" cy="704088"/>
           </a:xfrm>
           <a:prstGeom prst="rect">
             <a:avLst/>
@@ -13048,17 +13048,17 @@
               <a:buNone/>
             </a:pPr>
             <a:r>
-              <a:rPr lang="en-US" sz="1170" dirty="0">
-                <a:solidFill>
-                  <a:srgbClr val="5E7680"/>
+              <a:rPr lang="en-US" sz="1220" dirty="0">
+                <a:solidFill>
+                  <a:srgbClr val="334E57"/>
                 </a:solidFill>
                 <a:latin typeface="Calibri" pitchFamily="34" charset="0"/>
                 <a:ea typeface="Calibri" pitchFamily="34" charset="-122"/>
                 <a:cs typeface="Calibri" pitchFamily="34" charset="-120"/>
               </a:rPr>
-              <a:t>未发现业务代码或配置变更提交；本次报告仅新增当天 PPT 文件。</a:t>
-            </a:r>
-            <a:endParaRPr lang="en-US" sz="1170" dirty="0"/>
+              <a:t>未发现业务代码或配置变更提交；本次仅新增当天 PPT 文件。</a:t>
+            </a:r>
+            <a:endParaRPr lang="en-US" sz="1220" dirty="0"/>
           </a:p>
         </p:txBody>
       </p:sp>
@@ -13090,7 +13090,7 @@
           <a:effectLst>
             <a:outerShdw sx="100000" sy="100000" kx="0" ky="0" algn="bl" rotWithShape="0" blurRad="63500" dist="25400" dir="2700000">
               <a:srgbClr val="000000">
-                <a:alpha val="12000"/>
+                <a:alpha val="10000"/>
               </a:srgbClr>
             </a:outerShdw>
           </a:effectLst>
@@ -13173,7 +13173,7 @@
               <a:buNone/>
             </a:pPr>
             <a:r>
-              <a:rPr lang="en-US" sz="850" b="1" dirty="0">
+              <a:rPr lang="en-US" sz="880" b="1" dirty="0">
                 <a:solidFill>
                   <a:srgbClr val="FFFFFF"/>
                 </a:solidFill>
@@ -13183,7 +13183,7 @@
               </a:rPr>
               <a:t>DOC</a:t>
             </a:r>
-            <a:endParaRPr lang="en-US" sz="850" dirty="0"/>
+            <a:endParaRPr lang="en-US" sz="880" dirty="0"/>
           </a:p>
         </p:txBody>
       </p:sp>
@@ -13214,7 +13214,7 @@
               <a:buNone/>
             </a:pPr>
             <a:r>
-              <a:rPr lang="en-US" sz="1500" b="1" dirty="0">
+              <a:rPr lang="en-US" sz="1540" b="1" dirty="0">
                 <a:solidFill>
                   <a:srgbClr val="18323A"/>
                 </a:solidFill>
@@ -13224,7 +13224,7 @@
               </a:rPr>
               <a:t>全分支近 7 天</a:t>
             </a:r>
-            <a:endParaRPr lang="en-US" sz="1500" dirty="0"/>
+            <a:endParaRPr lang="en-US" sz="1540" dirty="0"/>
           </a:p>
         </p:txBody>
       </p:sp>
@@ -13237,7 +13237,7 @@
         <p:spPr>
           <a:xfrm>
             <a:off x="6986016" y="1920240"/>
-            <a:ext cx="4114800" cy="667512"/>
+            <a:ext cx="4114800" cy="704088"/>
           </a:xfrm>
           <a:prstGeom prst="rect">
             <a:avLst/>
@@ -13255,17 +13255,17 @@
               <a:buNone/>
             </a:pPr>
             <a:r>
-              <a:rPr lang="en-US" sz="1170" dirty="0">
-                <a:solidFill>
-                  <a:srgbClr val="5E7680"/>
+              <a:rPr lang="en-US" sz="1220" dirty="0">
+                <a:solidFill>
+                  <a:srgbClr val="334E57"/>
                 </a:solidFill>
                 <a:latin typeface="Calibri" pitchFamily="34" charset="0"/>
                 <a:ea typeface="Calibri" pitchFamily="34" charset="-122"/>
                 <a:cs typeface="Calibri" pitchFamily="34" charset="-120"/>
               </a:rPr>
-              <a:t>可见 2026-06-07 至 2026-06-13 的每日项目状态报告与视觉优化提交。</a:t>
-            </a:r>
-            <a:endParaRPr lang="en-US" sz="1170" dirty="0"/>
+              <a:t>可见 2026-06-07 至 2026-06-13 的日报与视觉优化提交。</a:t>
+            </a:r>
+            <a:endParaRPr lang="en-US" sz="1220" dirty="0"/>
           </a:p>
         </p:txBody>
       </p:sp>
@@ -13278,11 +13278,11 @@
         <p:spPr>
           <a:xfrm>
             <a:off x="749808" y="3127248"/>
-            <a:ext cx="5074920" cy="1600200"/>
+            <a:ext cx="5074920" cy="1536192"/>
           </a:xfrm>
           <a:prstGeom prst="roundRect">
             <a:avLst>
-              <a:gd name="adj" fmla="val 6857"/>
+              <a:gd name="adj" fmla="val 7143"/>
             </a:avLst>
           </a:prstGeom>
           <a:solidFill>
@@ -13297,7 +13297,7 @@
           <a:effectLst>
             <a:outerShdw sx="100000" sy="100000" kx="0" ky="0" algn="bl" rotWithShape="0" blurRad="63500" dist="25400" dir="2700000">
               <a:srgbClr val="000000">
-                <a:alpha val="12000"/>
+                <a:alpha val="10000"/>
               </a:srgbClr>
             </a:outerShdw>
           </a:effectLst>
@@ -13312,7 +13312,7 @@
         <p:spPr>
           <a:xfrm>
             <a:off x="749808" y="3127248"/>
-            <a:ext cx="100584" cy="1600200"/>
+            <a:ext cx="100584" cy="1536192"/>
           </a:xfrm>
           <a:prstGeom prst="rect">
             <a:avLst/>
@@ -13380,7 +13380,7 @@
               <a:buNone/>
             </a:pPr>
             <a:r>
-              <a:rPr lang="en-US" sz="850" b="1" dirty="0">
+              <a:rPr lang="en-US" sz="880" b="1" dirty="0">
                 <a:solidFill>
                   <a:srgbClr val="FFFFFF"/>
                 </a:solidFill>
@@ -13390,7 +13390,7 @@
               </a:rPr>
               <a:t>MS</a:t>
             </a:r>
-            <a:endParaRPr lang="en-US" sz="850" dirty="0"/>
+            <a:endParaRPr lang="en-US" sz="880" dirty="0"/>
           </a:p>
         </p:txBody>
       </p:sp>
@@ -13421,7 +13421,7 @@
               <a:buNone/>
             </a:pPr>
             <a:r>
-              <a:rPr lang="en-US" sz="1500" b="1" dirty="0">
+              <a:rPr lang="en-US" sz="1540" b="1" dirty="0">
                 <a:solidFill>
                   <a:srgbClr val="18323A"/>
                 </a:solidFill>
@@ -13431,7 +13431,7 @@
               </a:rPr>
               <a:t>最近非文档里程碑</a:t>
             </a:r>
-            <a:endParaRPr lang="en-US" sz="1500" dirty="0"/>
+            <a:endParaRPr lang="en-US" sz="1540" dirty="0"/>
           </a:p>
         </p:txBody>
       </p:sp>
@@ -13444,7 +13444,7 @@
         <p:spPr>
           <a:xfrm>
             <a:off x="1536192" y="3749040"/>
-            <a:ext cx="4114800" cy="850392"/>
+            <a:ext cx="4114800" cy="822960"/>
           </a:xfrm>
           <a:prstGeom prst="rect">
             <a:avLst/>
@@ -13462,17 +13462,17 @@
               <a:buNone/>
             </a:pPr>
             <a:r>
-              <a:rPr lang="en-US" sz="1170" dirty="0">
-                <a:solidFill>
-                  <a:srgbClr val="5E7680"/>
+              <a:rPr lang="en-US" sz="1220" dirty="0">
+                <a:solidFill>
+                  <a:srgbClr val="334E57"/>
                 </a:solidFill>
                 <a:latin typeface="Calibri" pitchFamily="34" charset="0"/>
                 <a:ea typeface="Calibri" pitchFamily="34" charset="-122"/>
                 <a:cs typeface="Calibri" pitchFamily="34" charset="-120"/>
               </a:rPr>
-              <a:t>2025-08-26 完成微服务改造，涉及 user/app/ai/screenshot 等模块，并保留单体项目代码。</a:t>
-            </a:r>
-            <a:endParaRPr lang="en-US" sz="1170" dirty="0"/>
+              <a:t>2025-08-26 完成微服务改造，涉及 user/app/ai/screenshot 等模块。</a:t>
+            </a:r>
+            <a:endParaRPr lang="en-US" sz="1220" dirty="0"/>
           </a:p>
         </p:txBody>
       </p:sp>
@@ -13485,11 +13485,11 @@
         <p:spPr>
           <a:xfrm>
             <a:off x="6199632" y="3127248"/>
-            <a:ext cx="5074920" cy="1600200"/>
+            <a:ext cx="5074920" cy="1536192"/>
           </a:xfrm>
           <a:prstGeom prst="roundRect">
             <a:avLst>
-              <a:gd name="adj" fmla="val 6857"/>
+              <a:gd name="adj" fmla="val 7143"/>
             </a:avLst>
           </a:prstGeom>
           <a:solidFill>
@@ -13504,7 +13504,7 @@
           <a:effectLst>
             <a:outerShdw sx="100000" sy="100000" kx="0" ky="0" algn="bl" rotWithShape="0" blurRad="63500" dist="25400" dir="2700000">
               <a:srgbClr val="000000">
-                <a:alpha val="12000"/>
+                <a:alpha val="10000"/>
               </a:srgbClr>
             </a:outerShdw>
           </a:effectLst>
@@ -13519,7 +13519,7 @@
         <p:spPr>
           <a:xfrm>
             <a:off x="6199632" y="3127248"/>
-            <a:ext cx="100584" cy="1600200"/>
+            <a:ext cx="100584" cy="1536192"/>
           </a:xfrm>
           <a:prstGeom prst="rect">
             <a:avLst/>
@@ -13587,7 +13587,7 @@
               <a:buNone/>
             </a:pPr>
             <a:r>
-              <a:rPr lang="en-US" sz="850" b="1" dirty="0">
+              <a:rPr lang="en-US" sz="880" b="1" dirty="0">
                 <a:solidFill>
                   <a:srgbClr val="FFFFFF"/>
                 </a:solidFill>
@@ -13597,7 +13597,7 @@
               </a:rPr>
               <a:t>TR</a:t>
             </a:r>
-            <a:endParaRPr lang="en-US" sz="850" dirty="0"/>
+            <a:endParaRPr lang="en-US" sz="880" dirty="0"/>
           </a:p>
         </p:txBody>
       </p:sp>
@@ -13628,7 +13628,7 @@
               <a:buNone/>
             </a:pPr>
             <a:r>
-              <a:rPr lang="en-US" sz="1500" b="1" dirty="0">
+              <a:rPr lang="en-US" sz="1540" b="1" dirty="0">
                 <a:solidFill>
                   <a:srgbClr val="18323A"/>
                 </a:solidFill>
@@ -13638,7 +13638,7 @@
               </a:rPr>
               <a:t>工程趋势</a:t>
             </a:r>
-            <a:endParaRPr lang="en-US" sz="1500" dirty="0"/>
+            <a:endParaRPr lang="en-US" sz="1540" dirty="0"/>
           </a:p>
         </p:txBody>
       </p:sp>
@@ -13651,7 +13651,7 @@
         <p:spPr>
           <a:xfrm>
             <a:off x="6986016" y="3749040"/>
-            <a:ext cx="4114800" cy="850392"/>
+            <a:ext cx="4114800" cy="822960"/>
           </a:xfrm>
           <a:prstGeom prst="rect">
             <a:avLst/>
@@ -13669,17 +13669,17 @@
               <a:buNone/>
             </a:pPr>
             <a:r>
-              <a:rPr lang="en-US" sz="1170" dirty="0">
-                <a:solidFill>
-                  <a:srgbClr val="5E7680"/>
+              <a:rPr lang="en-US" sz="1220" dirty="0">
+                <a:solidFill>
+                  <a:srgbClr val="334E57"/>
                 </a:solidFill>
                 <a:latin typeface="Calibri" pitchFamily="34" charset="0"/>
                 <a:ea typeface="Calibri" pitchFamily="34" charset="-122"/>
                 <a:cs typeface="Calibri" pitchFamily="34" charset="-120"/>
               </a:rPr>
-              <a:t>项目重点从核心功能演进到架构拆分、可观测性、稳定性、成本和并发优化。</a:t>
-            </a:r>
-            <a:endParaRPr lang="en-US" sz="1170" dirty="0"/>
+              <a:t>项目重点从核心功能演进到架构拆分、可观测性、稳定性和成本优化。</a:t>
+            </a:r>
+            <a:endParaRPr lang="en-US" sz="1220" dirty="0"/>
           </a:p>
         </p:txBody>
       </p:sp>
@@ -13691,7 +13691,7 @@
         </p:nvSpPr>
         <p:spPr>
           <a:xfrm>
-            <a:off x="1005840" y="5577840"/>
+            <a:off x="1005840" y="5376672"/>
             <a:ext cx="10012680" cy="109728"/>
           </a:xfrm>
           <a:prstGeom prst="rect">
@@ -13716,7 +13716,7 @@
         </p:nvSpPr>
         <p:spPr>
           <a:xfrm>
-            <a:off x="1097280" y="5413248"/>
+            <a:off x="1097280" y="5212080"/>
             <a:ext cx="411480" cy="411480"/>
           </a:xfrm>
           <a:prstGeom prst="ellipse">
@@ -13741,7 +13741,7 @@
         </p:nvSpPr>
         <p:spPr>
           <a:xfrm>
-            <a:off x="868680" y="5897880"/>
+            <a:off x="868680" y="5696712"/>
             <a:ext cx="868680" cy="164592"/>
           </a:xfrm>
           <a:prstGeom prst="rect">
@@ -13758,9 +13758,9 @@
               <a:buNone/>
             </a:pPr>
             <a:r>
-              <a:rPr lang="en-US" sz="880" dirty="0">
-                <a:solidFill>
-                  <a:srgbClr val="5E7680"/>
+              <a:rPr lang="en-US" sz="920" dirty="0">
+                <a:solidFill>
+                  <a:srgbClr val="334E57"/>
                 </a:solidFill>
                 <a:latin typeface="Calibri" pitchFamily="34" charset="0"/>
                 <a:ea typeface="Calibri" pitchFamily="34" charset="-122"/>
@@ -13768,7 +13768,7 @@
               </a:rPr>
               <a:t>06-07</a:t>
             </a:r>
-            <a:endParaRPr lang="en-US" sz="880" dirty="0"/>
+            <a:endParaRPr lang="en-US" sz="920" dirty="0"/>
           </a:p>
         </p:txBody>
       </p:sp>
@@ -13780,7 +13780,7 @@
         </p:nvSpPr>
         <p:spPr>
           <a:xfrm>
-            <a:off x="3520440" y="5413248"/>
+            <a:off x="3520440" y="5212080"/>
             <a:ext cx="411480" cy="411480"/>
           </a:xfrm>
           <a:prstGeom prst="ellipse">
@@ -13805,7 +13805,7 @@
         </p:nvSpPr>
         <p:spPr>
           <a:xfrm>
-            <a:off x="3291840" y="5897880"/>
+            <a:off x="3291840" y="5696712"/>
             <a:ext cx="868680" cy="164592"/>
           </a:xfrm>
           <a:prstGeom prst="rect">
@@ -13822,9 +13822,9 @@
               <a:buNone/>
             </a:pPr>
             <a:r>
-              <a:rPr lang="en-US" sz="880" dirty="0">
-                <a:solidFill>
-                  <a:srgbClr val="5E7680"/>
+              <a:rPr lang="en-US" sz="920" dirty="0">
+                <a:solidFill>
+                  <a:srgbClr val="334E57"/>
                 </a:solidFill>
                 <a:latin typeface="Calibri" pitchFamily="34" charset="0"/>
                 <a:ea typeface="Calibri" pitchFamily="34" charset="-122"/>
@@ -13832,7 +13832,7 @@
               </a:rPr>
               <a:t>06-10</a:t>
             </a:r>
-            <a:endParaRPr lang="en-US" sz="880" dirty="0"/>
+            <a:endParaRPr lang="en-US" sz="920" dirty="0"/>
           </a:p>
         </p:txBody>
       </p:sp>
@@ -13844,7 +13844,7 @@
         </p:nvSpPr>
         <p:spPr>
           <a:xfrm>
-            <a:off x="5925312" y="5413248"/>
+            <a:off x="5925312" y="5212080"/>
             <a:ext cx="411480" cy="411480"/>
           </a:xfrm>
           <a:prstGeom prst="ellipse">
@@ -13869,7 +13869,7 @@
         </p:nvSpPr>
         <p:spPr>
           <a:xfrm>
-            <a:off x="5696712" y="5897880"/>
+            <a:off x="5696712" y="5696712"/>
             <a:ext cx="868680" cy="164592"/>
           </a:xfrm>
           <a:prstGeom prst="rect">
@@ -13886,9 +13886,9 @@
               <a:buNone/>
             </a:pPr>
             <a:r>
-              <a:rPr lang="en-US" sz="880" dirty="0">
-                <a:solidFill>
-                  <a:srgbClr val="5E7680"/>
+              <a:rPr lang="en-US" sz="920" dirty="0">
+                <a:solidFill>
+                  <a:srgbClr val="334E57"/>
                 </a:solidFill>
                 <a:latin typeface="Calibri" pitchFamily="34" charset="0"/>
                 <a:ea typeface="Calibri" pitchFamily="34" charset="-122"/>
@@ -13896,7 +13896,7 @@
               </a:rPr>
               <a:t>06-12</a:t>
             </a:r>
-            <a:endParaRPr lang="en-US" sz="880" dirty="0"/>
+            <a:endParaRPr lang="en-US" sz="920" dirty="0"/>
           </a:p>
         </p:txBody>
       </p:sp>
@@ -13908,7 +13908,7 @@
         </p:nvSpPr>
         <p:spPr>
           <a:xfrm>
-            <a:off x="8321040" y="5413248"/>
+            <a:off x="8321040" y="5212080"/>
             <a:ext cx="411480" cy="411480"/>
           </a:xfrm>
           <a:prstGeom prst="ellipse">
@@ -13933,7 +13933,7 @@
         </p:nvSpPr>
         <p:spPr>
           <a:xfrm>
-            <a:off x="8092440" y="5897880"/>
+            <a:off x="8092440" y="5696712"/>
             <a:ext cx="868680" cy="164592"/>
           </a:xfrm>
           <a:prstGeom prst="rect">
@@ -13950,9 +13950,9 @@
               <a:buNone/>
             </a:pPr>
             <a:r>
-              <a:rPr lang="en-US" sz="880" dirty="0">
-                <a:solidFill>
-                  <a:srgbClr val="5E7680"/>
+              <a:rPr lang="en-US" sz="920" dirty="0">
+                <a:solidFill>
+                  <a:srgbClr val="334E57"/>
                 </a:solidFill>
                 <a:latin typeface="Calibri" pitchFamily="34" charset="0"/>
                 <a:ea typeface="Calibri" pitchFamily="34" charset="-122"/>
@@ -13960,7 +13960,7 @@
               </a:rPr>
               <a:t>06-13</a:t>
             </a:r>
-            <a:endParaRPr lang="en-US" sz="880" dirty="0"/>
+            <a:endParaRPr lang="en-US" sz="920" dirty="0"/>
           </a:p>
         </p:txBody>
       </p:sp>
@@ -13972,7 +13972,7 @@
         </p:nvSpPr>
         <p:spPr>
           <a:xfrm>
-            <a:off x="10716768" y="5413248"/>
+            <a:off x="10716768" y="5212080"/>
             <a:ext cx="411480" cy="411480"/>
           </a:xfrm>
           <a:prstGeom prst="ellipse">
@@ -13997,7 +13997,7 @@
         </p:nvSpPr>
         <p:spPr>
           <a:xfrm>
-            <a:off x="10488168" y="5897880"/>
+            <a:off x="10488168" y="5696712"/>
             <a:ext cx="868680" cy="164592"/>
           </a:xfrm>
           <a:prstGeom prst="rect">
@@ -14014,9 +14014,9 @@
               <a:buNone/>
             </a:pPr>
             <a:r>
-              <a:rPr lang="en-US" sz="880" dirty="0">
-                <a:solidFill>
-                  <a:srgbClr val="5E7680"/>
+              <a:rPr lang="en-US" sz="920" dirty="0">
+                <a:solidFill>
+                  <a:srgbClr val="334E57"/>
                 </a:solidFill>
                 <a:latin typeface="Calibri" pitchFamily="34" charset="0"/>
                 <a:ea typeface="Calibri" pitchFamily="34" charset="-122"/>
@@ -14024,7 +14024,7 @@
               </a:rPr>
               <a:t>06-14</a:t>
             </a:r>
-            <a:endParaRPr lang="en-US" sz="880" dirty="0"/>
+            <a:endParaRPr lang="en-US" sz="920" dirty="0"/>
           </a:p>
         </p:txBody>
       </p:sp>
@@ -14118,8 +14118,8 @@
         </p:nvSpPr>
         <p:spPr>
           <a:xfrm>
-            <a:off x="10835640" y="-274320"/>
-            <a:ext cx="1234440" cy="1234440"/>
+            <a:off x="10927080" y="-237744"/>
+            <a:ext cx="1024128" cy="1024128"/>
           </a:xfrm>
           <a:prstGeom prst="ellipse">
             <a:avLst/>
@@ -14143,8 +14143,8 @@
         </p:nvSpPr>
         <p:spPr>
           <a:xfrm>
-            <a:off x="11356848" y="137160"/>
-            <a:ext cx="475488" cy="475488"/>
+            <a:off x="11384280" y="128016"/>
+            <a:ext cx="393192" cy="393192"/>
           </a:xfrm>
           <a:prstGeom prst="ellipse">
             <a:avLst/>
@@ -14169,7 +14169,7 @@
         <p:spPr>
           <a:xfrm>
             <a:off x="658368" y="384048"/>
-            <a:ext cx="8138160" cy="502920"/>
+            <a:ext cx="8046720" cy="502920"/>
           </a:xfrm>
           <a:prstGeom prst="rect">
             <a:avLst/>
@@ -14210,7 +14210,7 @@
         <p:spPr>
           <a:xfrm>
             <a:off x="685800" y="932688"/>
-            <a:ext cx="7863840" cy="256032"/>
+            <a:ext cx="7726680" cy="256032"/>
           </a:xfrm>
           <a:prstGeom prst="rect">
             <a:avLst/>
@@ -14228,9 +14228,9 @@
               <a:buNone/>
             </a:pPr>
             <a:r>
-              <a:rPr lang="en-US" sz="1050" dirty="0">
-                <a:solidFill>
-                  <a:srgbClr val="5E7680"/>
+              <a:rPr lang="en-US" sz="1100" dirty="0">
+                <a:solidFill>
+                  <a:srgbClr val="334E57"/>
                 </a:solidFill>
                 <a:latin typeface="Calibri" pitchFamily="34" charset="0"/>
                 <a:ea typeface="Calibri" pitchFamily="34" charset="-122"/>
@@ -14238,7 +14238,7 @@
               </a:rPr>
               <a:t>当前仓库提供监控基础设施配置，但没有随仓库提交运行态指标快照。</a:t>
             </a:r>
-            <a:endParaRPr lang="en-US" sz="1050" dirty="0"/>
+            <a:endParaRPr lang="en-US" sz="1100" dirty="0"/>
           </a:p>
         </p:txBody>
       </p:sp>
@@ -14316,7 +14316,7 @@
         </p:nvSpPr>
         <p:spPr>
           <a:xfrm>
-            <a:off x="658368" y="6419088"/>
+            <a:off x="658368" y="6291072"/>
             <a:ext cx="4389120" cy="201168"/>
           </a:xfrm>
           <a:prstGeom prst="rect">
@@ -14333,9 +14333,9 @@
               <a:buNone/>
             </a:pPr>
             <a:r>
-              <a:rPr lang="en-US" sz="850" dirty="0">
-                <a:solidFill>
-                  <a:srgbClr val="5E7680"/>
+              <a:rPr lang="en-US" sz="880" dirty="0">
+                <a:solidFill>
+                  <a:srgbClr val="334E57"/>
                 </a:solidFill>
                 <a:latin typeface="Calibri" pitchFamily="34" charset="0"/>
                 <a:ea typeface="Calibri" pitchFamily="34" charset="-122"/>
@@ -14343,7 +14343,7 @@
               </a:rPr>
               <a:t>yu-ai-code-mother · 2026-06-14 · 6</a:t>
             </a:r>
-            <a:endParaRPr lang="en-US" sz="850" dirty="0"/>
+            <a:endParaRPr lang="en-US" sz="880" dirty="0"/>
           </a:p>
         </p:txBody>
       </p:sp>
@@ -14355,7 +14355,7 @@
         </p:nvSpPr>
         <p:spPr>
           <a:xfrm>
-            <a:off x="11109960" y="6446520"/>
+            <a:off x="11109960" y="6318504"/>
             <a:ext cx="402336" cy="73152"/>
           </a:xfrm>
           <a:prstGeom prst="rect">
@@ -14380,7 +14380,7 @@
         </p:nvSpPr>
         <p:spPr>
           <a:xfrm>
-            <a:off x="11558016" y="6446520"/>
+            <a:off x="11558016" y="6318504"/>
             <a:ext cx="210312" cy="73152"/>
           </a:xfrm>
           <a:prstGeom prst="rect">
@@ -14425,7 +14425,7 @@
           <a:effectLst>
             <a:outerShdw sx="100000" sy="100000" kx="0" ky="0" algn="bl" rotWithShape="0" blurRad="63500" dist="25400" dir="2700000">
               <a:srgbClr val="000000">
-                <a:alpha val="12000"/>
+                <a:alpha val="10000"/>
               </a:srgbClr>
             </a:outerShdw>
           </a:effectLst>
@@ -14480,8 +14480,8 @@
         </p:nvSpPr>
         <p:spPr>
           <a:xfrm>
-            <a:off x="1005840" y="2130552"/>
-            <a:ext cx="1737360" cy="182880"/>
+            <a:off x="969264" y="2130552"/>
+            <a:ext cx="1819656" cy="182880"/>
           </a:xfrm>
           <a:prstGeom prst="rect">
             <a:avLst/>
@@ -14499,7 +14499,7 @@
               <a:buNone/>
             </a:pPr>
             <a:r>
-              <a:rPr lang="en-US" sz="1100" b="1" dirty="0">
+              <a:rPr lang="en-US" sz="1130" b="1" dirty="0">
                 <a:solidFill>
                   <a:srgbClr val="18323A"/>
                 </a:solidFill>
@@ -14509,7 +14509,7 @@
               </a:rPr>
               <a:t>Prometheus 全局抓取</a:t>
             </a:r>
-            <a:endParaRPr lang="en-US" sz="1100" dirty="0"/>
+            <a:endParaRPr lang="en-US" sz="1130" dirty="0"/>
           </a:p>
         </p:txBody>
       </p:sp>
@@ -14521,8 +14521,8 @@
         </p:nvSpPr>
         <p:spPr>
           <a:xfrm>
-            <a:off x="1005840" y="2395728"/>
-            <a:ext cx="1737360" cy="164592"/>
+            <a:off x="969264" y="2395728"/>
+            <a:ext cx="1819656" cy="182880"/>
           </a:xfrm>
           <a:prstGeom prst="rect">
             <a:avLst/>
@@ -14540,9 +14540,9 @@
               <a:buNone/>
             </a:pPr>
             <a:r>
-              <a:rPr lang="en-US" sz="880" dirty="0">
-                <a:solidFill>
-                  <a:srgbClr val="5E7680"/>
+              <a:rPr lang="en-US" sz="940" dirty="0">
+                <a:solidFill>
+                  <a:srgbClr val="334E57"/>
                 </a:solidFill>
                 <a:latin typeface="Calibri" pitchFamily="34" charset="0"/>
                 <a:ea typeface="Calibri" pitchFamily="34" charset="-122"/>
@@ -14550,7 +14550,7 @@
               </a:rPr>
               <a:t>prometheus.yml</a:t>
             </a:r>
-            <a:endParaRPr lang="en-US" sz="880" dirty="0"/>
+            <a:endParaRPr lang="en-US" sz="940" dirty="0"/>
           </a:p>
         </p:txBody>
       </p:sp>
@@ -14582,7 +14582,7 @@
           <a:effectLst>
             <a:outerShdw sx="100000" sy="100000" kx="0" ky="0" algn="bl" rotWithShape="0" blurRad="63500" dist="25400" dir="2700000">
               <a:srgbClr val="000000">
-                <a:alpha val="12000"/>
+                <a:alpha val="10000"/>
               </a:srgbClr>
             </a:outerShdw>
           </a:effectLst>
@@ -14637,8 +14637,8 @@
         </p:nvSpPr>
         <p:spPr>
           <a:xfrm>
-            <a:off x="3447288" y="2130552"/>
-            <a:ext cx="1737360" cy="182880"/>
+            <a:off x="3410712" y="2130552"/>
+            <a:ext cx="1819656" cy="182880"/>
           </a:xfrm>
           <a:prstGeom prst="rect">
             <a:avLst/>
@@ -14656,7 +14656,7 @@
               <a:buNone/>
             </a:pPr>
             <a:r>
-              <a:rPr lang="en-US" sz="1100" b="1" dirty="0">
+              <a:rPr lang="en-US" sz="1130" b="1" dirty="0">
                 <a:solidFill>
                   <a:srgbClr val="18323A"/>
                 </a:solidFill>
@@ -14666,7 +14666,7 @@
               </a:rPr>
               <a:t>应用指标抓取</a:t>
             </a:r>
-            <a:endParaRPr lang="en-US" sz="1100" dirty="0"/>
+            <a:endParaRPr lang="en-US" sz="1130" dirty="0"/>
           </a:p>
         </p:txBody>
       </p:sp>
@@ -14678,8 +14678,8 @@
         </p:nvSpPr>
         <p:spPr>
           <a:xfrm>
-            <a:off x="3447288" y="2395728"/>
-            <a:ext cx="1737360" cy="164592"/>
+            <a:off x="3410712" y="2395728"/>
+            <a:ext cx="1819656" cy="182880"/>
           </a:xfrm>
           <a:prstGeom prst="rect">
             <a:avLst/>
@@ -14697,17 +14697,17 @@
               <a:buNone/>
             </a:pPr>
             <a:r>
-              <a:rPr lang="en-US" sz="880" dirty="0">
-                <a:solidFill>
-                  <a:srgbClr val="5E7680"/>
+              <a:rPr lang="en-US" sz="940" dirty="0">
+                <a:solidFill>
+                  <a:srgbClr val="334E57"/>
                 </a:solidFill>
                 <a:latin typeface="Calibri" pitchFamily="34" charset="0"/>
                 <a:ea typeface="Calibri" pitchFamily="34" charset="-122"/>
                 <a:cs typeface="Calibri" pitchFamily="34" charset="-120"/>
               </a:rPr>
-              <a:t>/api/actuator/prometheus</a:t>
-            </a:r>
-            <a:endParaRPr lang="en-US" sz="880" dirty="0"/>
+              <a:t>Actuator metrics</a:t>
+            </a:r>
+            <a:endParaRPr lang="en-US" sz="940" dirty="0"/>
           </a:p>
         </p:txBody>
       </p:sp>
@@ -14739,7 +14739,7 @@
           <a:effectLst>
             <a:outerShdw sx="100000" sy="100000" kx="0" ky="0" algn="bl" rotWithShape="0" blurRad="63500" dist="25400" dir="2700000">
               <a:srgbClr val="000000">
-                <a:alpha val="12000"/>
+                <a:alpha val="10000"/>
               </a:srgbClr>
             </a:outerShdw>
           </a:effectLst>
@@ -14794,8 +14794,8 @@
         </p:nvSpPr>
         <p:spPr>
           <a:xfrm>
-            <a:off x="5888736" y="2130552"/>
-            <a:ext cx="1737360" cy="182880"/>
+            <a:off x="5852160" y="2130552"/>
+            <a:ext cx="1819656" cy="182880"/>
           </a:xfrm>
           <a:prstGeom prst="rect">
             <a:avLst/>
@@ -14813,7 +14813,7 @@
               <a:buNone/>
             </a:pPr>
             <a:r>
-              <a:rPr lang="en-US" sz="1100" b="1" dirty="0">
+              <a:rPr lang="en-US" sz="1130" b="1" dirty="0">
                 <a:solidFill>
                   <a:srgbClr val="18323A"/>
                 </a:solidFill>
@@ -14823,7 +14823,7 @@
               </a:rPr>
               <a:t>AI 对话限流</a:t>
             </a:r>
-            <a:endParaRPr lang="en-US" sz="1100" dirty="0"/>
+            <a:endParaRPr lang="en-US" sz="1130" dirty="0"/>
           </a:p>
         </p:txBody>
       </p:sp>
@@ -14835,8 +14835,8 @@
         </p:nvSpPr>
         <p:spPr>
           <a:xfrm>
-            <a:off x="5888736" y="2395728"/>
-            <a:ext cx="1737360" cy="164592"/>
+            <a:off x="5852160" y="2395728"/>
+            <a:ext cx="1819656" cy="182880"/>
           </a:xfrm>
           <a:prstGeom prst="rect">
             <a:avLst/>
@@ -14854,9 +14854,9 @@
               <a:buNone/>
             </a:pPr>
             <a:r>
-              <a:rPr lang="en-US" sz="880" dirty="0">
-                <a:solidFill>
-                  <a:srgbClr val="5E7680"/>
+              <a:rPr lang="en-US" sz="940" dirty="0">
+                <a:solidFill>
+                  <a:srgbClr val="334E57"/>
                 </a:solidFill>
                 <a:latin typeface="Calibri" pitchFamily="34" charset="0"/>
                 <a:ea typeface="Calibri" pitchFamily="34" charset="-122"/>
@@ -14864,7 +14864,7 @@
               </a:rPr>
               <a:t>按用户维度</a:t>
             </a:r>
-            <a:endParaRPr lang="en-US" sz="880" dirty="0"/>
+            <a:endParaRPr lang="en-US" sz="940" dirty="0"/>
           </a:p>
         </p:txBody>
       </p:sp>
@@ -14896,7 +14896,7 @@
           <a:effectLst>
             <a:outerShdw sx="100000" sy="100000" kx="0" ky="0" algn="bl" rotWithShape="0" blurRad="63500" dist="25400" dir="2700000">
               <a:srgbClr val="000000">
-                <a:alpha val="12000"/>
+                <a:alpha val="10000"/>
               </a:srgbClr>
             </a:outerShdw>
           </a:effectLst>
@@ -14951,8 +14951,8 @@
         </p:nvSpPr>
         <p:spPr>
           <a:xfrm>
-            <a:off x="8330184" y="2130552"/>
-            <a:ext cx="1737360" cy="182880"/>
+            <a:off x="8293608" y="2130552"/>
+            <a:ext cx="1819656" cy="182880"/>
           </a:xfrm>
           <a:prstGeom prst="rect">
             <a:avLst/>
@@ -14970,7 +14970,7 @@
               <a:buNone/>
             </a:pPr>
             <a:r>
-              <a:rPr lang="en-US" sz="1100" b="1" dirty="0">
+              <a:rPr lang="en-US" sz="1130" b="1" dirty="0">
                 <a:solidFill>
                   <a:srgbClr val="18323A"/>
                 </a:solidFill>
@@ -14980,7 +14980,7 @@
               </a:rPr>
               <a:t>精选优先级约定</a:t>
             </a:r>
-            <a:endParaRPr lang="en-US" sz="1100" dirty="0"/>
+            <a:endParaRPr lang="en-US" sz="1130" dirty="0"/>
           </a:p>
         </p:txBody>
       </p:sp>
@@ -14992,8 +14992,8 @@
         </p:nvSpPr>
         <p:spPr>
           <a:xfrm>
-            <a:off x="8330184" y="2395728"/>
-            <a:ext cx="1737360" cy="164592"/>
+            <a:off x="8293608" y="2395728"/>
+            <a:ext cx="1819656" cy="182880"/>
           </a:xfrm>
           <a:prstGeom prst="rect">
             <a:avLst/>
@@ -15011,9 +15011,9 @@
               <a:buNone/>
             </a:pPr>
             <a:r>
-              <a:rPr lang="en-US" sz="880" dirty="0">
-                <a:solidFill>
-                  <a:srgbClr val="5E7680"/>
+              <a:rPr lang="en-US" sz="940" dirty="0">
+                <a:solidFill>
+                  <a:srgbClr val="334E57"/>
                 </a:solidFill>
                 <a:latin typeface="Calibri" pitchFamily="34" charset="0"/>
                 <a:ea typeface="Calibri" pitchFamily="34" charset="-122"/>
@@ -15021,7 +15021,7 @@
               </a:rPr>
               <a:t>管理员精选应用</a:t>
             </a:r>
-            <a:endParaRPr lang="en-US" sz="880" dirty="0"/>
+            <a:endParaRPr lang="en-US" sz="940" dirty="0"/>
           </a:p>
         </p:txBody>
       </p:sp>
@@ -15053,7 +15053,7 @@
           <a:effectLst>
             <a:outerShdw sx="100000" sy="100000" kx="0" ky="0" algn="bl" rotWithShape="0" blurRad="63500" dist="25400" dir="2700000">
               <a:srgbClr val="000000">
-                <a:alpha val="12000"/>
+                <a:alpha val="10000"/>
               </a:srgbClr>
             </a:outerShdw>
           </a:effectLst>
@@ -15136,7 +15136,7 @@
               <a:buNone/>
             </a:pPr>
             <a:r>
-              <a:rPr lang="en-US" sz="850" b="1" dirty="0">
+              <a:rPr lang="en-US" sz="880" b="1" dirty="0">
                 <a:solidFill>
                   <a:srgbClr val="FFFFFF"/>
                 </a:solidFill>
@@ -15146,7 +15146,7 @@
               </a:rPr>
               <a:t>OBS</a:t>
             </a:r>
-            <a:endParaRPr lang="en-US" sz="850" dirty="0"/>
+            <a:endParaRPr lang="en-US" sz="880" dirty="0"/>
           </a:p>
         </p:txBody>
       </p:sp>
@@ -15177,7 +15177,7 @@
               <a:buNone/>
             </a:pPr>
             <a:r>
-              <a:rPr lang="en-US" sz="1500" b="1" dirty="0">
+              <a:rPr lang="en-US" sz="1540" b="1" dirty="0">
                 <a:solidFill>
                   <a:srgbClr val="18323A"/>
                 </a:solidFill>
@@ -15187,7 +15187,7 @@
               </a:rPr>
               <a:t>已能观测</a:t>
             </a:r>
-            <a:endParaRPr lang="en-US" sz="1500" dirty="0"/>
+            <a:endParaRPr lang="en-US" sz="1540" dirty="0"/>
           </a:p>
         </p:txBody>
       </p:sp>
@@ -15200,7 +15200,7 @@
         <p:spPr>
           <a:xfrm>
             <a:off x="1591056" y="3867912"/>
-            <a:ext cx="4206240" cy="896112"/>
+            <a:ext cx="4206240" cy="932688"/>
           </a:xfrm>
           <a:prstGeom prst="rect">
             <a:avLst/>
@@ -15218,17 +15218,17 @@
               <a:buNone/>
             </a:pPr>
             <a:r>
-              <a:rPr lang="en-US" sz="1170" dirty="0">
-                <a:solidFill>
-                  <a:srgbClr val="5E7680"/>
+              <a:rPr lang="en-US" sz="1220" dirty="0">
+                <a:solidFill>
+                  <a:srgbClr val="334E57"/>
                 </a:solidFill>
                 <a:latin typeface="Calibri" pitchFamily="34" charset="0"/>
                 <a:ea typeface="Calibri" pitchFamily="34" charset="-122"/>
                 <a:cs typeface="Calibri" pitchFamily="34" charset="-120"/>
               </a:rPr>
-              <a:t>Spring Boot Actuator + Micrometer Prometheus、AI 模型指标采集类、限流切面与缓存键工具，为后续指标面板打基础。</a:t>
-            </a:r>
-            <a:endParaRPr lang="en-US" sz="1170" dirty="0"/>
+              <a:t>Actuator + Micrometer Prometheus、AI 模型指标采集类、限流切面与缓存键工具。</a:t>
+            </a:r>
+            <a:endParaRPr lang="en-US" sz="1220" dirty="0"/>
           </a:p>
         </p:txBody>
       </p:sp>
@@ -15260,7 +15260,7 @@
           <a:effectLst>
             <a:outerShdw sx="100000" sy="100000" kx="0" ky="0" algn="bl" rotWithShape="0" blurRad="63500" dist="25400" dir="2700000">
               <a:srgbClr val="000000">
-                <a:alpha val="12000"/>
+                <a:alpha val="10000"/>
               </a:srgbClr>
             </a:outerShdw>
           </a:effectLst>
@@ -15281,11 +15281,11 @@
             <a:avLst/>
           </a:prstGeom>
           <a:solidFill>
-            <a:srgbClr val="F2A65A"/>
-          </a:solidFill>
-          <a:ln w="12700">
-            <a:solidFill>
-              <a:srgbClr val="F2A65A"/>
+            <a:srgbClr val="D98032"/>
+          </a:solidFill>
+          <a:ln w="12700">
+            <a:solidFill>
+              <a:srgbClr val="D98032"/>
             </a:solidFill>
             <a:prstDash val="solid"/>
           </a:ln>
@@ -15306,11 +15306,11 @@
             <a:avLst/>
           </a:prstGeom>
           <a:solidFill>
-            <a:srgbClr val="F2A65A"/>
-          </a:solidFill>
-          <a:ln w="12700">
-            <a:solidFill>
-              <a:srgbClr val="F2A65A"/>
+            <a:srgbClr val="D98032"/>
+          </a:solidFill>
+          <a:ln w="12700">
+            <a:solidFill>
+              <a:srgbClr val="D98032"/>
             </a:solidFill>
             <a:prstDash val="solid"/>
           </a:ln>
@@ -15343,7 +15343,7 @@
               <a:buNone/>
             </a:pPr>
             <a:r>
-              <a:rPr lang="en-US" sz="850" b="1" dirty="0">
+              <a:rPr lang="en-US" sz="880" b="1" dirty="0">
                 <a:solidFill>
                   <a:srgbClr val="FFFFFF"/>
                 </a:solidFill>
@@ -15353,7 +15353,7 @@
               </a:rPr>
               <a:t>DATA</a:t>
             </a:r>
-            <a:endParaRPr lang="en-US" sz="850" dirty="0"/>
+            <a:endParaRPr lang="en-US" sz="880" dirty="0"/>
           </a:p>
         </p:txBody>
       </p:sp>
@@ -15384,7 +15384,7 @@
               <a:buNone/>
             </a:pPr>
             <a:r>
-              <a:rPr lang="en-US" sz="1500" b="1" dirty="0">
+              <a:rPr lang="en-US" sz="1540" b="1" dirty="0">
                 <a:solidFill>
                   <a:srgbClr val="18323A"/>
                 </a:solidFill>
@@ -15394,7 +15394,7 @@
               </a:rPr>
               <a:t>待补数据</a:t>
             </a:r>
-            <a:endParaRPr lang="en-US" sz="1500" dirty="0"/>
+            <a:endParaRPr lang="en-US" sz="1540" dirty="0"/>
           </a:p>
         </p:txBody>
       </p:sp>
@@ -15407,7 +15407,7 @@
         <p:spPr>
           <a:xfrm>
             <a:off x="7095744" y="3867912"/>
-            <a:ext cx="4206240" cy="896112"/>
+            <a:ext cx="4206240" cy="932688"/>
           </a:xfrm>
           <a:prstGeom prst="rect">
             <a:avLst/>
@@ -15425,17 +15425,17 @@
               <a:buNone/>
             </a:pPr>
             <a:r>
-              <a:rPr lang="en-US" sz="1170" dirty="0">
-                <a:solidFill>
-                  <a:srgbClr val="5E7680"/>
+              <a:rPr lang="en-US" sz="1220" dirty="0">
+                <a:solidFill>
+                  <a:srgbClr val="334E57"/>
                 </a:solidFill>
                 <a:latin typeface="Calibri" pitchFamily="34" charset="0"/>
                 <a:ea typeface="Calibri" pitchFamily="34" charset="-122"/>
                 <a:cs typeface="Calibri" pitchFamily="34" charset="-120"/>
               </a:rPr>
-              <a:t>建议补充生成成功率、平均生成耗时、部署成功率、AI token/成本、活跃应用数、错误率等日报指标。</a:t>
-            </a:r>
-            <a:endParaRPr lang="en-US" sz="1170" dirty="0"/>
+              <a:t>建议补充生成成功率、耗时、部署成功率、AI 成本、活跃应用数和错误率。</a:t>
+            </a:r>
+            <a:endParaRPr lang="en-US" sz="1220" dirty="0"/>
           </a:p>
         </p:txBody>
       </p:sp>
@@ -15529,8 +15529,8 @@
         </p:nvSpPr>
         <p:spPr>
           <a:xfrm>
-            <a:off x="10835640" y="-274320"/>
-            <a:ext cx="1234440" cy="1234440"/>
+            <a:off x="10927080" y="-237744"/>
+            <a:ext cx="1024128" cy="1024128"/>
           </a:xfrm>
           <a:prstGeom prst="ellipse">
             <a:avLst/>
@@ -15554,8 +15554,8 @@
         </p:nvSpPr>
         <p:spPr>
           <a:xfrm>
-            <a:off x="11356848" y="137160"/>
-            <a:ext cx="475488" cy="475488"/>
+            <a:off x="11384280" y="128016"/>
+            <a:ext cx="393192" cy="393192"/>
           </a:xfrm>
           <a:prstGeom prst="ellipse">
             <a:avLst/>
@@ -15580,7 +15580,7 @@
         <p:spPr>
           <a:xfrm>
             <a:off x="658368" y="384048"/>
-            <a:ext cx="8138160" cy="502920"/>
+            <a:ext cx="8046720" cy="502920"/>
           </a:xfrm>
           <a:prstGeom prst="rect">
             <a:avLst/>
@@ -15621,7 +15621,7 @@
         <p:spPr>
           <a:xfrm>
             <a:off x="685800" y="932688"/>
-            <a:ext cx="7863840" cy="256032"/>
+            <a:ext cx="7726680" cy="256032"/>
           </a:xfrm>
           <a:prstGeom prst="rect">
             <a:avLst/>
@@ -15639,9 +15639,9 @@
               <a:buNone/>
             </a:pPr>
             <a:r>
-              <a:rPr lang="en-US" sz="1050" dirty="0">
-                <a:solidFill>
-                  <a:srgbClr val="5E7680"/>
+              <a:rPr lang="en-US" sz="1100" dirty="0">
+                <a:solidFill>
+                  <a:srgbClr val="334E57"/>
                 </a:solidFill>
                 <a:latin typeface="Calibri" pitchFamily="34" charset="0"/>
                 <a:ea typeface="Calibri" pitchFamily="34" charset="-122"/>
@@ -15649,7 +15649,7 @@
               </a:rPr>
               <a:t>检查构建脚本、测试目录与 CI 配置后的结论。</a:t>
             </a:r>
-            <a:endParaRPr lang="en-US" sz="1050" dirty="0"/>
+            <a:endParaRPr lang="en-US" sz="1100" dirty="0"/>
           </a:p>
         </p:txBody>
       </p:sp>
@@ -15727,7 +15727,7 @@
         </p:nvSpPr>
         <p:spPr>
           <a:xfrm>
-            <a:off x="658368" y="6419088"/>
+            <a:off x="658368" y="6291072"/>
             <a:ext cx="4389120" cy="201168"/>
           </a:xfrm>
           <a:prstGeom prst="rect">
@@ -15744,9 +15744,9 @@
               <a:buNone/>
             </a:pPr>
             <a:r>
-              <a:rPr lang="en-US" sz="850" dirty="0">
-                <a:solidFill>
-                  <a:srgbClr val="5E7680"/>
+              <a:rPr lang="en-US" sz="880" dirty="0">
+                <a:solidFill>
+                  <a:srgbClr val="334E57"/>
                 </a:solidFill>
                 <a:latin typeface="Calibri" pitchFamily="34" charset="0"/>
                 <a:ea typeface="Calibri" pitchFamily="34" charset="-122"/>
@@ -15754,7 +15754,7 @@
               </a:rPr>
               <a:t>yu-ai-code-mother · 2026-06-14 · 7</a:t>
             </a:r>
-            <a:endParaRPr lang="en-US" sz="850" dirty="0"/>
+            <a:endParaRPr lang="en-US" sz="880" dirty="0"/>
           </a:p>
         </p:txBody>
       </p:sp>
@@ -15766,7 +15766,7 @@
         </p:nvSpPr>
         <p:spPr>
           <a:xfrm>
-            <a:off x="11109960" y="6446520"/>
+            <a:off x="11109960" y="6318504"/>
             <a:ext cx="402336" cy="73152"/>
           </a:xfrm>
           <a:prstGeom prst="rect">
@@ -15791,7 +15791,7 @@
         </p:nvSpPr>
         <p:spPr>
           <a:xfrm>
-            <a:off x="11558016" y="6446520"/>
+            <a:off x="11558016" y="6318504"/>
             <a:ext cx="210312" cy="73152"/>
           </a:xfrm>
           <a:prstGeom prst="rect">
@@ -15836,7 +15836,7 @@
           <a:effectLst>
             <a:outerShdw sx="100000" sy="100000" kx="0" ky="0" algn="bl" rotWithShape="0" blurRad="63500" dist="25400" dir="2700000">
               <a:srgbClr val="000000">
-                <a:alpha val="12000"/>
+                <a:alpha val="10000"/>
               </a:srgbClr>
             </a:outerShdw>
           </a:effectLst>
@@ -15919,7 +15919,7 @@
               <a:buNone/>
             </a:pPr>
             <a:r>
-              <a:rPr lang="en-US" sz="850" b="1" dirty="0">
+              <a:rPr lang="en-US" sz="880" b="1" dirty="0">
                 <a:solidFill>
                   <a:srgbClr val="FFFFFF"/>
                 </a:solidFill>
@@ -15929,7 +15929,7 @@
               </a:rPr>
               <a:t>BE</a:t>
             </a:r>
-            <a:endParaRPr lang="en-US" sz="850" dirty="0"/>
+            <a:endParaRPr lang="en-US" sz="880" dirty="0"/>
           </a:p>
         </p:txBody>
       </p:sp>
@@ -15960,7 +15960,7 @@
               <a:buNone/>
             </a:pPr>
             <a:r>
-              <a:rPr lang="en-US" sz="1500" b="1" dirty="0">
+              <a:rPr lang="en-US" sz="1540" b="1" dirty="0">
                 <a:solidFill>
                   <a:srgbClr val="18323A"/>
                 </a:solidFill>
@@ -15970,7 +15970,7 @@
               </a:rPr>
               <a:t>后端测试</a:t>
             </a:r>
-            <a:endParaRPr lang="en-US" sz="1500" dirty="0"/>
+            <a:endParaRPr lang="en-US" sz="1540" dirty="0"/>
           </a:p>
         </p:txBody>
       </p:sp>
@@ -15983,7 +15983,7 @@
         <p:spPr>
           <a:xfrm>
             <a:off x="1536192" y="1993392"/>
-            <a:ext cx="2468880" cy="1078992"/>
+            <a:ext cx="2468880" cy="1115568"/>
           </a:xfrm>
           <a:prstGeom prst="rect">
             <a:avLst/>
@@ -16001,17 +16001,17 @@
               <a:buNone/>
             </a:pPr>
             <a:r>
-              <a:rPr lang="en-US" sz="1170" dirty="0">
-                <a:solidFill>
-                  <a:srgbClr val="5E7680"/>
+              <a:rPr lang="en-US" sz="1220" dirty="0">
+                <a:solidFill>
+                  <a:srgbClr val="334E57"/>
                 </a:solidFill>
                 <a:latin typeface="Calibri" pitchFamily="34" charset="0"/>
                 <a:ea typeface="Calibri" pitchFamily="34" charset="-122"/>
                 <a:cs typeface="Calibri" pitchFamily="34" charset="-120"/>
               </a:rPr>
-              <a:t>单体项目存在 JUnit/Spring Boot 测试，覆盖代码解析、AI 生成、工作流和截图工具等。</a:t>
-            </a:r>
-            <a:endParaRPr lang="en-US" sz="1170" dirty="0"/>
+              <a:t>单体项目存在 JUnit/Spring Boot 测试，覆盖解析、AI 生成、工作流和截图工具。</a:t>
+            </a:r>
+            <a:endParaRPr lang="en-US" sz="1220" dirty="0"/>
           </a:p>
         </p:txBody>
       </p:sp>
@@ -16043,7 +16043,7 @@
           <a:effectLst>
             <a:outerShdw sx="100000" sy="100000" kx="0" ky="0" algn="bl" rotWithShape="0" blurRad="63500" dist="25400" dir="2700000">
               <a:srgbClr val="000000">
-                <a:alpha val="12000"/>
+                <a:alpha val="10000"/>
               </a:srgbClr>
             </a:outerShdw>
           </a:effectLst>
@@ -16126,7 +16126,7 @@
               <a:buNone/>
             </a:pPr>
             <a:r>
-              <a:rPr lang="en-US" sz="850" b="1" dirty="0">
+              <a:rPr lang="en-US" sz="880" b="1" dirty="0">
                 <a:solidFill>
                   <a:srgbClr val="FFFFFF"/>
                 </a:solidFill>
@@ -16136,7 +16136,7 @@
               </a:rPr>
               <a:t>FE</a:t>
             </a:r>
-            <a:endParaRPr lang="en-US" sz="850" dirty="0"/>
+            <a:endParaRPr lang="en-US" sz="880" dirty="0"/>
           </a:p>
         </p:txBody>
       </p:sp>
@@ -16167,7 +16167,7 @@
               <a:buNone/>
             </a:pPr>
             <a:r>
-              <a:rPr lang="en-US" sz="1500" b="1" dirty="0">
+              <a:rPr lang="en-US" sz="1540" b="1" dirty="0">
                 <a:solidFill>
                   <a:srgbClr val="18323A"/>
                 </a:solidFill>
@@ -16177,7 +16177,7 @@
               </a:rPr>
               <a:t>前端检查</a:t>
             </a:r>
-            <a:endParaRPr lang="en-US" sz="1500" dirty="0"/>
+            <a:endParaRPr lang="en-US" sz="1540" dirty="0"/>
           </a:p>
         </p:txBody>
       </p:sp>
@@ -16190,7 +16190,7 @@
         <p:spPr>
           <a:xfrm>
             <a:off x="5230368" y="1993392"/>
-            <a:ext cx="2468880" cy="1078992"/>
+            <a:ext cx="2468880" cy="1115568"/>
           </a:xfrm>
           <a:prstGeom prst="rect">
             <a:avLst/>
@@ -16208,17 +16208,17 @@
               <a:buNone/>
             </a:pPr>
             <a:r>
-              <a:rPr lang="en-US" sz="1170" dirty="0">
-                <a:solidFill>
-                  <a:srgbClr val="5E7680"/>
+              <a:rPr lang="en-US" sz="1220" dirty="0">
+                <a:solidFill>
+                  <a:srgbClr val="334E57"/>
                 </a:solidFill>
                 <a:latin typeface="Calibri" pitchFamily="34" charset="0"/>
                 <a:ea typeface="Calibri" pitchFamily="34" charset="-122"/>
                 <a:cs typeface="Calibri" pitchFamily="34" charset="-120"/>
               </a:rPr>
-              <a:t>package.json 提供 build、type-check、lint、format 脚本；未发现前端单元测试文件。</a:t>
-            </a:r>
-            <a:endParaRPr lang="en-US" sz="1170" dirty="0"/>
+              <a:t>package.json 提供 build、type-check、lint、format；未发现前端测试文件。</a:t>
+            </a:r>
+            <a:endParaRPr lang="en-US" sz="1220" dirty="0"/>
           </a:p>
         </p:txBody>
       </p:sp>
@@ -16250,7 +16250,7 @@
           <a:effectLst>
             <a:outerShdw sx="100000" sy="100000" kx="0" ky="0" algn="bl" rotWithShape="0" blurRad="63500" dist="25400" dir="2700000">
               <a:srgbClr val="000000">
-                <a:alpha val="12000"/>
+                <a:alpha val="10000"/>
               </a:srgbClr>
             </a:outerShdw>
           </a:effectLst>
@@ -16271,11 +16271,11 @@
             <a:avLst/>
           </a:prstGeom>
           <a:solidFill>
-            <a:srgbClr val="F2A65A"/>
-          </a:solidFill>
-          <a:ln w="12700">
-            <a:solidFill>
-              <a:srgbClr val="F2A65A"/>
+            <a:srgbClr val="D98032"/>
+          </a:solidFill>
+          <a:ln w="12700">
+            <a:solidFill>
+              <a:srgbClr val="D98032"/>
             </a:solidFill>
             <a:prstDash val="solid"/>
           </a:ln>
@@ -16296,11 +16296,11 @@
             <a:avLst/>
           </a:prstGeom>
           <a:solidFill>
-            <a:srgbClr val="F2A65A"/>
-          </a:solidFill>
-          <a:ln w="12700">
-            <a:solidFill>
-              <a:srgbClr val="F2A65A"/>
+            <a:srgbClr val="D98032"/>
+          </a:solidFill>
+          <a:ln w="12700">
+            <a:solidFill>
+              <a:srgbClr val="D98032"/>
             </a:solidFill>
             <a:prstDash val="solid"/>
           </a:ln>
@@ -16333,7 +16333,7 @@
               <a:buNone/>
             </a:pPr>
             <a:r>
-              <a:rPr lang="en-US" sz="850" b="1" dirty="0">
+              <a:rPr lang="en-US" sz="880" b="1" dirty="0">
                 <a:solidFill>
                   <a:srgbClr val="FFFFFF"/>
                 </a:solidFill>
@@ -16343,7 +16343,7 @@
               </a:rPr>
               <a:t>CI</a:t>
             </a:r>
-            <a:endParaRPr lang="en-US" sz="850" dirty="0"/>
+            <a:endParaRPr lang="en-US" sz="880" dirty="0"/>
           </a:p>
         </p:txBody>
       </p:sp>
@@ -16374,7 +16374,7 @@
               <a:buNone/>
             </a:pPr>
             <a:r>
-              <a:rPr lang="en-US" sz="1500" b="1" dirty="0">
+              <a:rPr lang="en-US" sz="1540" b="1" dirty="0">
                 <a:solidFill>
                   <a:srgbClr val="18323A"/>
                 </a:solidFill>
@@ -16384,7 +16384,7 @@
               </a:rPr>
               <a:t>CI 配置</a:t>
             </a:r>
-            <a:endParaRPr lang="en-US" sz="1500" dirty="0"/>
+            <a:endParaRPr lang="en-US" sz="1540" dirty="0"/>
           </a:p>
         </p:txBody>
       </p:sp>
@@ -16397,7 +16397,7 @@
         <p:spPr>
           <a:xfrm>
             <a:off x="8924544" y="1993392"/>
-            <a:ext cx="2468880" cy="1078992"/>
+            <a:ext cx="2468880" cy="1115568"/>
           </a:xfrm>
           <a:prstGeom prst="rect">
             <a:avLst/>
@@ -16415,17 +16415,17 @@
               <a:buNone/>
             </a:pPr>
             <a:r>
-              <a:rPr lang="en-US" sz="1170" dirty="0">
-                <a:solidFill>
-                  <a:srgbClr val="5E7680"/>
+              <a:rPr lang="en-US" sz="1220" dirty="0">
+                <a:solidFill>
+                  <a:srgbClr val="334E57"/>
                 </a:solidFill>
                 <a:latin typeface="Calibri" pitchFamily="34" charset="0"/>
                 <a:ea typeface="Calibri" pitchFamily="34" charset="-122"/>
                 <a:cs typeface="Calibri" pitchFamily="34" charset="-120"/>
               </a:rPr>
-              <a:t>未发现 .github/workflows；当前自动化状态需要依赖本地或外部流水线。</a:t>
-            </a:r>
-            <a:endParaRPr lang="en-US" sz="1170" dirty="0"/>
+              <a:t>未发现 .github/workflows；当前自动化状态依赖本地或外部流水线。</a:t>
+            </a:r>
+            <a:endParaRPr lang="en-US" sz="1220" dirty="0"/>
           </a:p>
         </p:txBody>
       </p:sp>
@@ -16457,7 +16457,7 @@
           <a:effectLst>
             <a:outerShdw sx="100000" sy="100000" kx="0" ky="0" algn="bl" rotWithShape="0" blurRad="63500" dist="25400" dir="2700000">
               <a:srgbClr val="000000">
-                <a:alpha val="12000"/>
+                <a:alpha val="10000"/>
               </a:srgbClr>
             </a:outerShdw>
           </a:effectLst>
@@ -16540,7 +16540,7 @@
               <a:buNone/>
             </a:pPr>
             <a:r>
-              <a:rPr lang="en-US" sz="850" b="1" dirty="0">
+              <a:rPr lang="en-US" sz="880" b="1" dirty="0">
                 <a:solidFill>
                   <a:srgbClr val="FFFFFF"/>
                 </a:solidFill>
@@ -16550,7 +16550,7 @@
               </a:rPr>
               <a:t>MET</a:t>
             </a:r>
-            <a:endParaRPr lang="en-US" sz="850" dirty="0"/>
+            <a:endParaRPr lang="en-US" sz="880" dirty="0"/>
           </a:p>
         </p:txBody>
       </p:sp>
@@ -16581,7 +16581,7 @@
               <a:buNone/>
             </a:pPr>
             <a:r>
-              <a:rPr lang="en-US" sz="1500" b="1" dirty="0">
+              <a:rPr lang="en-US" sz="1540" b="1" dirty="0">
                 <a:solidFill>
                   <a:srgbClr val="18323A"/>
                 </a:solidFill>
@@ -16591,7 +16591,7 @@
               </a:rPr>
               <a:t>运行态监控</a:t>
             </a:r>
-            <a:endParaRPr lang="en-US" sz="1500" dirty="0"/>
+            <a:endParaRPr lang="en-US" sz="1540" dirty="0"/>
           </a:p>
         </p:txBody>
       </p:sp>
@@ -16604,7 +16604,7 @@
         <p:spPr>
           <a:xfrm>
             <a:off x="1536192" y="4325112"/>
-            <a:ext cx="4206240" cy="758952"/>
+            <a:ext cx="4206240" cy="795528"/>
           </a:xfrm>
           <a:prstGeom prst="rect">
             <a:avLst/>
@@ -16622,17 +16622,17 @@
               <a:buNone/>
             </a:pPr>
             <a:r>
-              <a:rPr lang="en-US" sz="1170" dirty="0">
-                <a:solidFill>
-                  <a:srgbClr val="5E7680"/>
+              <a:rPr lang="en-US" sz="1220" dirty="0">
+                <a:solidFill>
+                  <a:srgbClr val="334E57"/>
                 </a:solidFill>
                 <a:latin typeface="Calibri" pitchFamily="34" charset="0"/>
                 <a:ea typeface="Calibri" pitchFamily="34" charset="-122"/>
                 <a:cs typeface="Calibri" pitchFamily="34" charset="-120"/>
               </a:rPr>
-              <a:t>prometheus.yml 已配置 Prometheus 自身和 Spring Boot 应用抓取目标，Grafana 目录存在。</a:t>
-            </a:r>
-            <a:endParaRPr lang="en-US" sz="1170" dirty="0"/>
+              <a:t>prometheus.yml 已配置 Prometheus 自身和 Spring Boot 应用抓取目标。</a:t>
+            </a:r>
+            <a:endParaRPr lang="en-US" sz="1220" dirty="0"/>
           </a:p>
         </p:txBody>
       </p:sp>
@@ -16664,7 +16664,7 @@
           <a:effectLst>
             <a:outerShdw sx="100000" sy="100000" kx="0" ky="0" algn="bl" rotWithShape="0" blurRad="63500" dist="25400" dir="2700000">
               <a:srgbClr val="000000">
-                <a:alpha val="12000"/>
+                <a:alpha val="10000"/>
               </a:srgbClr>
             </a:outerShdw>
           </a:effectLst>
@@ -16747,7 +16747,7 @@
               <a:buNone/>
             </a:pPr>
             <a:r>
-              <a:rPr lang="en-US" sz="850" b="1" dirty="0">
+              <a:rPr lang="en-US" sz="880" b="1" dirty="0">
                 <a:solidFill>
                   <a:srgbClr val="FFFFFF"/>
                 </a:solidFill>
@@ -16757,7 +16757,7 @@
               </a:rPr>
               <a:t>QA</a:t>
             </a:r>
-            <a:endParaRPr lang="en-US" sz="850" dirty="0"/>
+            <a:endParaRPr lang="en-US" sz="880" dirty="0"/>
           </a:p>
         </p:txBody>
       </p:sp>
@@ -16788,7 +16788,7 @@
               <a:buNone/>
             </a:pPr>
             <a:r>
-              <a:rPr lang="en-US" sz="1500" b="1" dirty="0">
+              <a:rPr lang="en-US" sz="1540" b="1" dirty="0">
                 <a:solidFill>
                   <a:srgbClr val="18323A"/>
                 </a:solidFill>
@@ -16798,7 +16798,7 @@
               </a:rPr>
               <a:t>本次报告校验</a:t>
             </a:r>
-            <a:endParaRPr lang="en-US" sz="1500" dirty="0"/>
+            <a:endParaRPr lang="en-US" sz="1540" dirty="0"/>
           </a:p>
         </p:txBody>
       </p:sp>
@@ -16811,7 +16811,7 @@
         <p:spPr>
           <a:xfrm>
             <a:off x="7022592" y="4325112"/>
-            <a:ext cx="4206240" cy="758952"/>
+            <a:ext cx="4206240" cy="795528"/>
           </a:xfrm>
           <a:prstGeom prst="rect">
             <a:avLst/>
@@ -16829,17 +16829,17 @@
               <a:buNone/>
             </a:pPr>
             <a:r>
-              <a:rPr lang="en-US" sz="1170" dirty="0">
-                <a:solidFill>
-                  <a:srgbClr val="5E7680"/>
+              <a:rPr lang="en-US" sz="1220" dirty="0">
+                <a:solidFill>
+                  <a:srgbClr val="334E57"/>
                 </a:solidFill>
                 <a:latin typeface="Calibri" pitchFamily="34" charset="0"/>
                 <a:ea typeface="Calibri" pitchFamily="34" charset="-122"/>
                 <a:cs typeface="Calibri" pitchFamily="34" charset="-120"/>
               </a:rPr>
-              <a:t>PPT 生成后将执行文本抽取/占位符检查，并进行渲染检查以确认无明显版式问题。</a:t>
-            </a:r>
-            <a:endParaRPr lang="en-US" sz="1170" dirty="0"/>
+              <a:t>已执行文本抽取、占位符检查和渲染检查，确认无明显版式问题。</a:t>
+            </a:r>
+            <a:endParaRPr lang="en-US" sz="1220" dirty="0"/>
           </a:p>
         </p:txBody>
       </p:sp>
@@ -16933,8 +16933,8 @@
         </p:nvSpPr>
         <p:spPr>
           <a:xfrm>
-            <a:off x="10835640" y="-274320"/>
-            <a:ext cx="1234440" cy="1234440"/>
+            <a:off x="10927080" y="-237744"/>
+            <a:ext cx="1024128" cy="1024128"/>
           </a:xfrm>
           <a:prstGeom prst="ellipse">
             <a:avLst/>
@@ -16958,8 +16958,8 @@
         </p:nvSpPr>
         <p:spPr>
           <a:xfrm>
-            <a:off x="11356848" y="137160"/>
-            <a:ext cx="475488" cy="475488"/>
+            <a:off x="11384280" y="128016"/>
+            <a:ext cx="393192" cy="393192"/>
           </a:xfrm>
           <a:prstGeom prst="ellipse">
             <a:avLst/>
@@ -16984,7 +16984,7 @@
         <p:spPr>
           <a:xfrm>
             <a:off x="658368" y="384048"/>
-            <a:ext cx="8138160" cy="502920"/>
+            <a:ext cx="8046720" cy="502920"/>
           </a:xfrm>
           <a:prstGeom prst="rect">
             <a:avLst/>
@@ -17025,7 +17025,7 @@
         <p:spPr>
           <a:xfrm>
             <a:off x="685800" y="932688"/>
-            <a:ext cx="7863840" cy="256032"/>
+            <a:ext cx="7726680" cy="256032"/>
           </a:xfrm>
           <a:prstGeom prst="rect">
             <a:avLst/>
@@ -17043,9 +17043,9 @@
               <a:buNone/>
             </a:pPr>
             <a:r>
-              <a:rPr lang="en-US" sz="1050" dirty="0">
-                <a:solidFill>
-                  <a:srgbClr val="5E7680"/>
+              <a:rPr lang="en-US" sz="1100" dirty="0">
+                <a:solidFill>
+                  <a:srgbClr val="334E57"/>
                 </a:solidFill>
                 <a:latin typeface="Calibri" pitchFamily="34" charset="0"/>
                 <a:ea typeface="Calibri" pitchFamily="34" charset="-122"/>
@@ -17053,7 +17053,7 @@
               </a:rPr>
               <a:t>按当前仓库状态推断的待补齐工程事项。</a:t>
             </a:r>
-            <a:endParaRPr lang="en-US" sz="1050" dirty="0"/>
+            <a:endParaRPr lang="en-US" sz="1100" dirty="0"/>
           </a:p>
         </p:txBody>
       </p:sp>
@@ -17131,7 +17131,7 @@
         </p:nvSpPr>
         <p:spPr>
           <a:xfrm>
-            <a:off x="658368" y="6419088"/>
+            <a:off x="658368" y="6291072"/>
             <a:ext cx="4389120" cy="201168"/>
           </a:xfrm>
           <a:prstGeom prst="rect">
@@ -17148,9 +17148,9 @@
               <a:buNone/>
             </a:pPr>
             <a:r>
-              <a:rPr lang="en-US" sz="850" dirty="0">
-                <a:solidFill>
-                  <a:srgbClr val="5E7680"/>
+              <a:rPr lang="en-US" sz="880" dirty="0">
+                <a:solidFill>
+                  <a:srgbClr val="334E57"/>
                 </a:solidFill>
                 <a:latin typeface="Calibri" pitchFamily="34" charset="0"/>
                 <a:ea typeface="Calibri" pitchFamily="34" charset="-122"/>
@@ -17158,7 +17158,7 @@
               </a:rPr>
               <a:t>yu-ai-code-mother · 2026-06-14 · 8</a:t>
             </a:r>
-            <a:endParaRPr lang="en-US" sz="850" dirty="0"/>
+            <a:endParaRPr lang="en-US" sz="880" dirty="0"/>
           </a:p>
         </p:txBody>
       </p:sp>
@@ -17170,7 +17170,7 @@
         </p:nvSpPr>
         <p:spPr>
           <a:xfrm>
-            <a:off x="11109960" y="6446520"/>
+            <a:off x="11109960" y="6318504"/>
             <a:ext cx="402336" cy="73152"/>
           </a:xfrm>
           <a:prstGeom prst="rect">
@@ -17195,7 +17195,7 @@
         </p:nvSpPr>
         <p:spPr>
           <a:xfrm>
-            <a:off x="11558016" y="6446520"/>
+            <a:off x="11558016" y="6318504"/>
             <a:ext cx="210312" cy="73152"/>
           </a:xfrm>
           <a:prstGeom prst="rect">
@@ -17240,7 +17240,7 @@
           <a:effectLst>
             <a:outerShdw sx="100000" sy="100000" kx="0" ky="0" algn="bl" rotWithShape="0" blurRad="63500" dist="25400" dir="2700000">
               <a:srgbClr val="000000">
-                <a:alpha val="12000"/>
+                <a:alpha val="10000"/>
               </a:srgbClr>
             </a:outerShdw>
           </a:effectLst>
@@ -17261,11 +17261,11 @@
             <a:avLst/>
           </a:prstGeom>
           <a:solidFill>
-            <a:srgbClr val="F2A65A"/>
-          </a:solidFill>
-          <a:ln w="12700">
-            <a:solidFill>
-              <a:srgbClr val="F2A65A"/>
+            <a:srgbClr val="D98032"/>
+          </a:solidFill>
+          <a:ln w="12700">
+            <a:solidFill>
+              <a:srgbClr val="D98032"/>
             </a:solidFill>
             <a:prstDash val="solid"/>
           </a:ln>
@@ -17286,11 +17286,11 @@
             <a:avLst/>
           </a:prstGeom>
           <a:solidFill>
-            <a:srgbClr val="F2A65A"/>
-          </a:solidFill>
-          <a:ln w="12700">
-            <a:solidFill>
-              <a:srgbClr val="F2A65A"/>
+            <a:srgbClr val="D98032"/>
+          </a:solidFill>
+          <a:ln w="12700">
+            <a:solidFill>
+              <a:srgbClr val="D98032"/>
             </a:solidFill>
             <a:prstDash val="solid"/>
           </a:ln>
@@ -17323,7 +17323,7 @@
               <a:buNone/>
             </a:pPr>
             <a:r>
-              <a:rPr lang="en-US" sz="850" b="1" dirty="0">
+              <a:rPr lang="en-US" sz="880" b="1" dirty="0">
                 <a:solidFill>
                   <a:srgbClr val="FFFFFF"/>
                 </a:solidFill>
@@ -17333,7 +17333,7 @@
               </a:rPr>
               <a:t>1</a:t>
             </a:r>
-            <a:endParaRPr lang="en-US" sz="850" dirty="0"/>
+            <a:endParaRPr lang="en-US" sz="880" dirty="0"/>
           </a:p>
         </p:txBody>
       </p:sp>
@@ -17364,7 +17364,7 @@
               <a:buNone/>
             </a:pPr>
             <a:r>
-              <a:rPr lang="en-US" sz="1500" b="1" dirty="0">
+              <a:rPr lang="en-US" sz="1540" b="1" dirty="0">
                 <a:solidFill>
                   <a:srgbClr val="18323A"/>
                 </a:solidFill>
@@ -17374,7 +17374,7 @@
               </a:rPr>
               <a:t>自动化质量门禁</a:t>
             </a:r>
-            <a:endParaRPr lang="en-US" sz="1500" dirty="0"/>
+            <a:endParaRPr lang="en-US" sz="1540" dirty="0"/>
           </a:p>
         </p:txBody>
       </p:sp>
@@ -17387,7 +17387,7 @@
         <p:spPr>
           <a:xfrm>
             <a:off x="1536192" y="1856232"/>
-            <a:ext cx="4114800" cy="530352"/>
+            <a:ext cx="4114800" cy="566928"/>
           </a:xfrm>
           <a:prstGeom prst="rect">
             <a:avLst/>
@@ -17405,17 +17405,17 @@
               <a:buNone/>
             </a:pPr>
             <a:r>
-              <a:rPr lang="en-US" sz="1170" dirty="0">
-                <a:solidFill>
-                  <a:srgbClr val="5E7680"/>
+              <a:rPr lang="en-US" sz="1220" dirty="0">
+                <a:solidFill>
+                  <a:srgbClr val="334E57"/>
                 </a:solidFill>
                 <a:latin typeface="Calibri" pitchFamily="34" charset="0"/>
                 <a:ea typeface="Calibri" pitchFamily="34" charset="-122"/>
                 <a:cs typeface="Calibri" pitchFamily="34" charset="-120"/>
               </a:rPr>
-              <a:t>缺少仓库内 CI 工作流，建议固化后端测试、前端 type-check/build 和报告文件检查。</a:t>
-            </a:r>
-            <a:endParaRPr lang="en-US" sz="1170" dirty="0"/>
+              <a:t>缺少仓库内 CI 工作流，建议固化后端测试、前端构建和报告检查。</a:t>
+            </a:r>
+            <a:endParaRPr lang="en-US" sz="1220" dirty="0"/>
           </a:p>
         </p:txBody>
       </p:sp>
@@ -17447,7 +17447,7 @@
           <a:effectLst>
             <a:outerShdw sx="100000" sy="100000" kx="0" ky="0" algn="bl" rotWithShape="0" blurRad="63500" dist="25400" dir="2700000">
               <a:srgbClr val="000000">
-                <a:alpha val="12000"/>
+                <a:alpha val="10000"/>
               </a:srgbClr>
             </a:outerShdw>
           </a:effectLst>
@@ -17468,11 +17468,11 @@
             <a:avLst/>
           </a:prstGeom>
           <a:solidFill>
-            <a:srgbClr val="F2A65A"/>
-          </a:solidFill>
-          <a:ln w="12700">
-            <a:solidFill>
-              <a:srgbClr val="F2A65A"/>
+            <a:srgbClr val="D98032"/>
+          </a:solidFill>
+          <a:ln w="12700">
+            <a:solidFill>
+              <a:srgbClr val="D98032"/>
             </a:solidFill>
             <a:prstDash val="solid"/>
           </a:ln>
@@ -17493,11 +17493,11 @@
             <a:avLst/>
           </a:prstGeom>
           <a:solidFill>
-            <a:srgbClr val="F2A65A"/>
-          </a:solidFill>
-          <a:ln w="12700">
-            <a:solidFill>
-              <a:srgbClr val="F2A65A"/>
+            <a:srgbClr val="D98032"/>
+          </a:solidFill>
+          <a:ln w="12700">
+            <a:solidFill>
+              <a:srgbClr val="D98032"/>
             </a:solidFill>
             <a:prstDash val="solid"/>
           </a:ln>
@@ -17530,7 +17530,7 @@
               <a:buNone/>
             </a:pPr>
             <a:r>
-              <a:rPr lang="en-US" sz="850" b="1" dirty="0">
+              <a:rPr lang="en-US" sz="880" b="1" dirty="0">
                 <a:solidFill>
                   <a:srgbClr val="FFFFFF"/>
                 </a:solidFill>
@@ -17540,7 +17540,7 @@
               </a:rPr>
               <a:t>2</a:t>
             </a:r>
-            <a:endParaRPr lang="en-US" sz="850" dirty="0"/>
+            <a:endParaRPr lang="en-US" sz="880" dirty="0"/>
           </a:p>
         </p:txBody>
       </p:sp>
@@ -17571,7 +17571,7 @@
               <a:buNone/>
             </a:pPr>
             <a:r>
-              <a:rPr lang="en-US" sz="1500" b="1" dirty="0">
+              <a:rPr lang="en-US" sz="1540" b="1" dirty="0">
                 <a:solidFill>
                   <a:srgbClr val="18323A"/>
                 </a:solidFill>
@@ -17581,7 +17581,7 @@
               </a:rPr>
               <a:t>日报指标采集</a:t>
             </a:r>
-            <a:endParaRPr lang="en-US" sz="1500" dirty="0"/>
+            <a:endParaRPr lang="en-US" sz="1540" dirty="0"/>
           </a:p>
         </p:txBody>
       </p:sp>
@@ -17594,7 +17594,7 @@
         <p:spPr>
           <a:xfrm>
             <a:off x="6986016" y="1856232"/>
-            <a:ext cx="4114800" cy="530352"/>
+            <a:ext cx="4114800" cy="566928"/>
           </a:xfrm>
           <a:prstGeom prst="rect">
             <a:avLst/>
@@ -17612,17 +17612,17 @@
               <a:buNone/>
             </a:pPr>
             <a:r>
-              <a:rPr lang="en-US" sz="1170" dirty="0">
-                <a:solidFill>
-                  <a:srgbClr val="5E7680"/>
+              <a:rPr lang="en-US" sz="1220" dirty="0">
+                <a:solidFill>
+                  <a:srgbClr val="334E57"/>
                 </a:solidFill>
                 <a:latin typeface="Calibri" pitchFamily="34" charset="0"/>
                 <a:ea typeface="Calibri" pitchFamily="34" charset="-122"/>
                 <a:cs typeface="Calibri" pitchFamily="34" charset="-120"/>
               </a:rPr>
-              <a:t>目前报告只能引用配置和源码，缺少真实运行态数据快照与趋势图。</a:t>
-            </a:r>
-            <a:endParaRPr lang="en-US" sz="1170" dirty="0"/>
+              <a:t>目前报告只能引用配置和源码，缺少真实运行态数据快照。</a:t>
+            </a:r>
+            <a:endParaRPr lang="en-US" sz="1220" dirty="0"/>
           </a:p>
         </p:txBody>
       </p:sp>
@@ -17654,7 +17654,7 @@
           <a:effectLst>
             <a:outerShdw sx="100000" sy="100000" kx="0" ky="0" algn="bl" rotWithShape="0" blurRad="63500" dist="25400" dir="2700000">
               <a:srgbClr val="000000">
-                <a:alpha val="12000"/>
+                <a:alpha val="10000"/>
               </a:srgbClr>
             </a:outerShdw>
           </a:effectLst>
@@ -17737,7 +17737,7 @@
               <a:buNone/>
             </a:pPr>
             <a:r>
-              <a:rPr lang="en-US" sz="850" b="1" dirty="0">
+              <a:rPr lang="en-US" sz="880" b="1" dirty="0">
                 <a:solidFill>
                   <a:srgbClr val="FFFFFF"/>
                 </a:solidFill>
@@ -17747,7 +17747,7 @@
               </a:rPr>
               <a:t>3</a:t>
             </a:r>
-            <a:endParaRPr lang="en-US" sz="850" dirty="0"/>
+            <a:endParaRPr lang="en-US" sz="880" dirty="0"/>
           </a:p>
         </p:txBody>
       </p:sp>
@@ -17778,7 +17778,7 @@
               <a:buNone/>
             </a:pPr>
             <a:r>
-              <a:rPr lang="en-US" sz="1500" b="1" dirty="0">
+              <a:rPr lang="en-US" sz="1540" b="1" dirty="0">
                 <a:solidFill>
                   <a:srgbClr val="18323A"/>
                 </a:solidFill>
@@ -17788,7 +17788,7 @@
               </a:rPr>
               <a:t>微服务运行说明</a:t>
             </a:r>
-            <a:endParaRPr lang="en-US" sz="1500" dirty="0"/>
+            <a:endParaRPr lang="en-US" sz="1540" dirty="0"/>
           </a:p>
         </p:txBody>
       </p:sp>
@@ -17801,7 +17801,7 @@
         <p:spPr>
           <a:xfrm>
             <a:off x="1536192" y="3529584"/>
-            <a:ext cx="4114800" cy="530352"/>
+            <a:ext cx="4114800" cy="566928"/>
           </a:xfrm>
           <a:prstGeom prst="rect">
             <a:avLst/>
@@ -17819,17 +17819,17 @@
               <a:buNone/>
             </a:pPr>
             <a:r>
-              <a:rPr lang="en-US" sz="1170" dirty="0">
-                <a:solidFill>
-                  <a:srgbClr val="5E7680"/>
+              <a:rPr lang="en-US" sz="1220" dirty="0">
+                <a:solidFill>
+                  <a:srgbClr val="334E57"/>
                 </a:solidFill>
                 <a:latin typeface="Calibri" pitchFamily="34" charset="0"/>
                 <a:ea typeface="Calibri" pitchFamily="34" charset="-122"/>
                 <a:cs typeface="Calibri" pitchFamily="34" charset="-120"/>
               </a:rPr>
-              <a:t>微服务模块已拆分，但启动依赖、服务发现、跨服务调用和环境变量说明可继续增强。</a:t>
-            </a:r>
-            <a:endParaRPr lang="en-US" sz="1170" dirty="0"/>
+              <a:t>微服务模块已拆分，启动依赖、服务发现和环境变量说明可继续增强。</a:t>
+            </a:r>
+            <a:endParaRPr lang="en-US" sz="1220" dirty="0"/>
           </a:p>
         </p:txBody>
       </p:sp>
@@ -17861,7 +17861,7 @@
           <a:effectLst>
             <a:outerShdw sx="100000" sy="100000" kx="0" ky="0" algn="bl" rotWithShape="0" blurRad="63500" dist="25400" dir="2700000">
               <a:srgbClr val="000000">
-                <a:alpha val="12000"/>
+                <a:alpha val="10000"/>
               </a:srgbClr>
             </a:outerShdw>
           </a:effectLst>
@@ -17944,7 +17944,7 @@
               <a:buNone/>
             </a:pPr>
             <a:r>
-              <a:rPr lang="en-US" sz="850" b="1" dirty="0">
+              <a:rPr lang="en-US" sz="880" b="1" dirty="0">
                 <a:solidFill>
                   <a:srgbClr val="FFFFFF"/>
                 </a:solidFill>
@@ -17954,7 +17954,7 @@
               </a:rPr>
               <a:t>4</a:t>
             </a:r>
-            <a:endParaRPr lang="en-US" sz="850" dirty="0"/>
+            <a:endParaRPr lang="en-US" sz="880" dirty="0"/>
           </a:p>
         </p:txBody>
       </p:sp>
@@ -17985,7 +17985,7 @@
               <a:buNone/>
             </a:pPr>
             <a:r>
-              <a:rPr lang="en-US" sz="1500" b="1" dirty="0">
+              <a:rPr lang="en-US" sz="1540" b="1" dirty="0">
                 <a:solidFill>
                   <a:srgbClr val="18323A"/>
                 </a:solidFill>
@@ -17995,7 +17995,7 @@
               </a:rPr>
               <a:t>前端测试覆盖</a:t>
             </a:r>
-            <a:endParaRPr lang="en-US" sz="1500" dirty="0"/>
+            <a:endParaRPr lang="en-US" sz="1540" dirty="0"/>
           </a:p>
         </p:txBody>
       </p:sp>
@@ -18008,7 +18008,7 @@
         <p:spPr>
           <a:xfrm>
             <a:off x="6986016" y="3529584"/>
-            <a:ext cx="4114800" cy="530352"/>
+            <a:ext cx="4114800" cy="566928"/>
           </a:xfrm>
           <a:prstGeom prst="rect">
             <a:avLst/>
@@ -18026,17 +18026,17 @@
               <a:buNone/>
             </a:pPr>
             <a:r>
-              <a:rPr lang="en-US" sz="1170" dirty="0">
-                <a:solidFill>
-                  <a:srgbClr val="5E7680"/>
+              <a:rPr lang="en-US" sz="1220" dirty="0">
+                <a:solidFill>
+                  <a:srgbClr val="334E57"/>
                 </a:solidFill>
                 <a:latin typeface="Calibri" pitchFamily="34" charset="0"/>
                 <a:ea typeface="Calibri" pitchFamily="34" charset="-122"/>
                 <a:cs typeface="Calibri" pitchFamily="34" charset="-120"/>
               </a:rPr>
-              <a:t>未发现前端测试文件，可补充关键页面的组件测试或端到端流程校验。</a:t>
-            </a:r>
-            <a:endParaRPr lang="en-US" sz="1170" dirty="0"/>
+              <a:t>未发现前端测试文件，可补充关键页面组件测试或端到端校验。</a:t>
+            </a:r>
+            <a:endParaRPr lang="en-US" sz="1220" dirty="0"/>
           </a:p>
         </p:txBody>
       </p:sp>
@@ -18048,12 +18048,12 @@
         </p:nvSpPr>
         <p:spPr>
           <a:xfrm>
-            <a:off x="3273552" y="4590288"/>
-            <a:ext cx="5669280" cy="1143000"/>
+            <a:off x="3273552" y="4553712"/>
+            <a:ext cx="5669280" cy="1060704"/>
           </a:xfrm>
           <a:prstGeom prst="roundRect">
             <a:avLst>
-              <a:gd name="adj" fmla="val 9600"/>
+              <a:gd name="adj" fmla="val 10345"/>
             </a:avLst>
           </a:prstGeom>
           <a:solidFill>
@@ -18068,7 +18068,7 @@
           <a:effectLst>
             <a:outerShdw sx="100000" sy="100000" kx="0" ky="0" algn="bl" rotWithShape="0" blurRad="63500" dist="25400" dir="2700000">
               <a:srgbClr val="000000">
-                <a:alpha val="12000"/>
+                <a:alpha val="10000"/>
               </a:srgbClr>
             </a:outerShdw>
           </a:effectLst>
@@ -18082,8 +18082,8 @@
         </p:nvSpPr>
         <p:spPr>
           <a:xfrm>
-            <a:off x="3273552" y="4590288"/>
-            <a:ext cx="100584" cy="1143000"/>
+            <a:off x="3273552" y="4553712"/>
+            <a:ext cx="100584" cy="1060704"/>
           </a:xfrm>
           <a:prstGeom prst="rect">
             <a:avLst/>
@@ -18107,7 +18107,7 @@
         </p:nvSpPr>
         <p:spPr>
           <a:xfrm>
-            <a:off x="3474720" y="4791456"/>
+            <a:off x="3474720" y="4754880"/>
             <a:ext cx="438912" cy="438912"/>
           </a:xfrm>
           <a:prstGeom prst="ellipse">
@@ -18132,7 +18132,7 @@
         </p:nvSpPr>
         <p:spPr>
           <a:xfrm>
-            <a:off x="3474720" y="4910328"/>
+            <a:off x="3474720" y="4873752"/>
             <a:ext cx="438912" cy="128016"/>
           </a:xfrm>
           <a:prstGeom prst="rect">
@@ -18151,7 +18151,7 @@
               <a:buNone/>
             </a:pPr>
             <a:r>
-              <a:rPr lang="en-US" sz="850" b="1" dirty="0">
+              <a:rPr lang="en-US" sz="880" b="1" dirty="0">
                 <a:solidFill>
                   <a:srgbClr val="FFFFFF"/>
                 </a:solidFill>
@@ -18161,7 +18161,7 @@
               </a:rPr>
               <a:t>5</a:t>
             </a:r>
-            <a:endParaRPr lang="en-US" sz="850" dirty="0"/>
+            <a:endParaRPr lang="en-US" sz="880" dirty="0"/>
           </a:p>
         </p:txBody>
       </p:sp>
@@ -18173,7 +18173,7 @@
         </p:nvSpPr>
         <p:spPr>
           <a:xfrm>
-            <a:off x="4059936" y="4791456"/>
+            <a:off x="4059936" y="4754880"/>
             <a:ext cx="4663440" cy="301752"/>
           </a:xfrm>
           <a:prstGeom prst="rect">
@@ -18192,7 +18192,7 @@
               <a:buNone/>
             </a:pPr>
             <a:r>
-              <a:rPr lang="en-US" sz="1500" b="1" dirty="0">
+              <a:rPr lang="en-US" sz="1540" b="1" dirty="0">
                 <a:solidFill>
                   <a:srgbClr val="18323A"/>
                 </a:solidFill>
@@ -18202,7 +18202,7 @@
               </a:rPr>
               <a:t>发布与运营数据闭环</a:t>
             </a:r>
-            <a:endParaRPr lang="en-US" sz="1500" dirty="0"/>
+            <a:endParaRPr lang="en-US" sz="1540" dirty="0"/>
           </a:p>
         </p:txBody>
       </p:sp>
@@ -18214,8 +18214,8 @@
         </p:nvSpPr>
         <p:spPr>
           <a:xfrm>
-            <a:off x="4059936" y="5212080"/>
-            <a:ext cx="4709160" cy="393192"/>
+            <a:off x="4059936" y="5175504"/>
+            <a:ext cx="4709160" cy="347472"/>
           </a:xfrm>
           <a:prstGeom prst="rect">
             <a:avLst/>
@@ -18233,17 +18233,17 @@
               <a:buNone/>
             </a:pPr>
             <a:r>
-              <a:rPr lang="en-US" sz="1170" dirty="0">
-                <a:solidFill>
-                  <a:srgbClr val="5E7680"/>
+              <a:rPr lang="en-US" sz="1220" dirty="0">
+                <a:solidFill>
+                  <a:srgbClr val="334E57"/>
                 </a:solidFill>
                 <a:latin typeface="Calibri" pitchFamily="34" charset="0"/>
                 <a:ea typeface="Calibri" pitchFamily="34" charset="-122"/>
                 <a:cs typeface="Calibri" pitchFamily="34" charset="-120"/>
               </a:rPr>
-              <a:t>部署成功率、生成耗时、AI 成本、用户活跃度和精选应用转化等指标尚未进入日报自动化输入。</a:t>
-            </a:r>
-            <a:endParaRPr lang="en-US" sz="1170" dirty="0"/>
+              <a:t>部署成功率、生成耗时、AI 成本和用户活跃度尚未进入日报自动输入。</a:t>
+            </a:r>
+            <a:endParaRPr lang="en-US" sz="1220" dirty="0"/>
           </a:p>
         </p:txBody>
       </p:sp>
